--- a/J2_Matin_Formation_Fidelis.pptx
+++ b/J2_Matin_Formation_Fidelis.pptx
@@ -16,6 +16,10 @@
     <p:sldId id="264" r:id="rId15"/>
     <p:sldId id="265" r:id="rId16"/>
     <p:sldId id="266" r:id="rId17"/>
+    <p:sldId id="267" r:id="rId18"/>
+    <p:sldId id="268" r:id="rId19"/>
+    <p:sldId id="269" r:id="rId20"/>
+    <p:sldId id="270" r:id="rId21"/>
   </p:sldIdLst>
   <p:sldSz cx="12188952" cy="6858000" type="screen4x3"/>
   <p:notesSz cx="6858000" cy="9144000"/>
@@ -8518,6 +8522,7077 @@
                 <a:latin typeface="Segoe UI"/>
               </a:rPr>
               <a:t>J2 FIM — Récapitulatif Matinée  |  Fidelis × SHY Performance  |  Prêt(e) pour l'après-midi</a:t>
+            </a:r>
+          </a:p>
+        </p:txBody>
+      </p:sp>
+    </p:spTree>
+  </p:cSld>
+  <p:clrMapOvr>
+    <a:masterClrMapping/>
+  </p:clrMapOvr>
+</p:sld>
+</file>
+
+<file path=ppt/slides/slide12.xml><?xml version="1.0" encoding="utf-8"?>
+<p:sld xmlns:a="http://schemas.openxmlformats.org/drawingml/2006/main" xmlns:p="http://schemas.openxmlformats.org/presentationml/2006/main" xmlns:r="http://schemas.openxmlformats.org/officeDocument/2006/relationships">
+  <p:cSld>
+    <p:spTree>
+      <p:nvGrpSpPr>
+        <p:cNvPr id="1" name=""/>
+        <p:cNvGrpSpPr/>
+        <p:nvPr/>
+      </p:nvGrpSpPr>
+      <p:grpSpPr/>
+      <p:sp>
+        <p:nvSpPr>
+          <p:cNvPr id="2" name="Rectangle 1"/>
+          <p:cNvSpPr/>
+          <p:nvPr/>
+        </p:nvSpPr>
+        <p:spPr>
+          <a:xfrm>
+            <a:off x="0" y="0"/>
+            <a:ext cx="12188952" cy="6858000"/>
+          </a:xfrm>
+          <a:prstGeom prst="rect">
+            <a:avLst/>
+          </a:prstGeom>
+          <a:solidFill>
+            <a:srgbClr val="0A1628"/>
+          </a:solidFill>
+          <a:ln>
+            <a:noFill/>
+          </a:ln>
+        </p:spPr>
+        <p:style>
+          <a:lnRef idx="1">
+            <a:schemeClr val="accent1"/>
+          </a:lnRef>
+          <a:fillRef idx="3">
+            <a:schemeClr val="accent1"/>
+          </a:fillRef>
+          <a:effectRef idx="2">
+            <a:schemeClr val="accent1"/>
+          </a:effectRef>
+          <a:fontRef idx="minor">
+            <a:schemeClr val="lt1"/>
+          </a:fontRef>
+        </p:style>
+        <p:txBody>
+          <a:bodyPr rtlCol="0" anchor="ctr"/>
+          <a:lstStyle/>
+          <a:p>
+            <a:pPr algn="ctr"/>
+          </a:p>
+        </p:txBody>
+      </p:sp>
+      <p:sp>
+        <p:nvSpPr>
+          <p:cNvPr id="3" name="Rectangle 2"/>
+          <p:cNvSpPr/>
+          <p:nvPr/>
+        </p:nvSpPr>
+        <p:spPr>
+          <a:xfrm>
+            <a:off x="0" y="0"/>
+            <a:ext cx="12188952" cy="54864"/>
+          </a:xfrm>
+          <a:prstGeom prst="rect">
+            <a:avLst/>
+          </a:prstGeom>
+          <a:solidFill>
+            <a:srgbClr val="E74C3C"/>
+          </a:solidFill>
+          <a:ln>
+            <a:noFill/>
+          </a:ln>
+        </p:spPr>
+        <p:style>
+          <a:lnRef idx="1">
+            <a:schemeClr val="accent1"/>
+          </a:lnRef>
+          <a:fillRef idx="3">
+            <a:schemeClr val="accent1"/>
+          </a:fillRef>
+          <a:effectRef idx="2">
+            <a:schemeClr val="accent1"/>
+          </a:effectRef>
+          <a:fontRef idx="minor">
+            <a:schemeClr val="lt1"/>
+          </a:fontRef>
+        </p:style>
+        <p:txBody>
+          <a:bodyPr rtlCol="0" anchor="ctr"/>
+          <a:lstStyle/>
+          <a:p>
+            <a:pPr algn="ctr"/>
+          </a:p>
+        </p:txBody>
+      </p:sp>
+      <p:sp>
+        <p:nvSpPr>
+          <p:cNvPr id="4" name="Rectangle 3"/>
+          <p:cNvSpPr/>
+          <p:nvPr/>
+        </p:nvSpPr>
+        <p:spPr>
+          <a:xfrm>
+            <a:off x="0" y="6492240"/>
+            <a:ext cx="12188952" cy="365760"/>
+          </a:xfrm>
+          <a:prstGeom prst="rect">
+            <a:avLst/>
+          </a:prstGeom>
+          <a:solidFill>
+            <a:srgbClr val="003087"/>
+          </a:solidFill>
+          <a:ln>
+            <a:noFill/>
+          </a:ln>
+        </p:spPr>
+        <p:style>
+          <a:lnRef idx="1">
+            <a:schemeClr val="accent1"/>
+          </a:lnRef>
+          <a:fillRef idx="3">
+            <a:schemeClr val="accent1"/>
+          </a:fillRef>
+          <a:effectRef idx="2">
+            <a:schemeClr val="accent1"/>
+          </a:effectRef>
+          <a:fontRef idx="minor">
+            <a:schemeClr val="lt1"/>
+          </a:fontRef>
+        </p:style>
+        <p:txBody>
+          <a:bodyPr rtlCol="0" anchor="ctr"/>
+          <a:lstStyle/>
+          <a:p>
+            <a:pPr algn="ctr"/>
+          </a:p>
+        </p:txBody>
+      </p:sp>
+      <p:sp>
+        <p:nvSpPr>
+          <p:cNvPr id="5" name="TextBox 4"/>
+          <p:cNvSpPr txBox="1"/>
+          <p:nvPr/>
+        </p:nvSpPr>
+        <p:spPr>
+          <a:xfrm>
+            <a:off x="274320" y="6510528"/>
+            <a:ext cx="11640312" cy="310896"/>
+          </a:xfrm>
+          <a:prstGeom prst="rect">
+            <a:avLst/>
+          </a:prstGeom>
+          <a:noFill/>
+        </p:spPr>
+        <p:txBody>
+          <a:bodyPr wrap="square">
+            <a:spAutoFit/>
+          </a:bodyPr>
+          <a:lstStyle/>
+          <a:p>
+            <a:pPr algn="ctr"/>
+            <a:r>
+              <a:rPr sz="900" b="0" i="0">
+                <a:solidFill>
+                  <a:srgbClr val="AABBDD"/>
+                </a:solidFill>
+                <a:latin typeface="Segoe UI"/>
+              </a:rPr>
+              <a:t>J2 FIM — Matinée  |  Fidelis × SHY Performance  |  Le Monde Associatif &amp; Humanitaire</a:t>
+            </a:r>
+          </a:p>
+        </p:txBody>
+      </p:sp>
+      <p:sp>
+        <p:nvSpPr>
+          <p:cNvPr id="6" name="Rectangle 5"/>
+          <p:cNvSpPr/>
+          <p:nvPr/>
+        </p:nvSpPr>
+        <p:spPr>
+          <a:xfrm>
+            <a:off x="0" y="0"/>
+            <a:ext cx="12188952" cy="1051560"/>
+          </a:xfrm>
+          <a:prstGeom prst="rect">
+            <a:avLst/>
+          </a:prstGeom>
+          <a:solidFill>
+            <a:srgbClr val="120505"/>
+          </a:solidFill>
+          <a:ln>
+            <a:noFill/>
+          </a:ln>
+        </p:spPr>
+        <p:style>
+          <a:lnRef idx="1">
+            <a:schemeClr val="accent1"/>
+          </a:lnRef>
+          <a:fillRef idx="3">
+            <a:schemeClr val="accent1"/>
+          </a:fillRef>
+          <a:effectRef idx="2">
+            <a:schemeClr val="accent1"/>
+          </a:effectRef>
+          <a:fontRef idx="minor">
+            <a:schemeClr val="lt1"/>
+          </a:fontRef>
+        </p:style>
+        <p:txBody>
+          <a:bodyPr rtlCol="0" anchor="ctr"/>
+          <a:lstStyle/>
+          <a:p>
+            <a:pPr algn="ctr"/>
+          </a:p>
+        </p:txBody>
+      </p:sp>
+      <p:sp>
+        <p:nvSpPr>
+          <p:cNvPr id="7" name="Rectangle 6"/>
+          <p:cNvSpPr/>
+          <p:nvPr/>
+        </p:nvSpPr>
+        <p:spPr>
+          <a:xfrm>
+            <a:off x="0" y="0"/>
+            <a:ext cx="12188952" cy="54864"/>
+          </a:xfrm>
+          <a:prstGeom prst="rect">
+            <a:avLst/>
+          </a:prstGeom>
+          <a:solidFill>
+            <a:srgbClr val="E74C3C"/>
+          </a:solidFill>
+          <a:ln>
+            <a:noFill/>
+          </a:ln>
+        </p:spPr>
+        <p:style>
+          <a:lnRef idx="1">
+            <a:schemeClr val="accent1"/>
+          </a:lnRef>
+          <a:fillRef idx="3">
+            <a:schemeClr val="accent1"/>
+          </a:fillRef>
+          <a:effectRef idx="2">
+            <a:schemeClr val="accent1"/>
+          </a:effectRef>
+          <a:fontRef idx="minor">
+            <a:schemeClr val="lt1"/>
+          </a:fontRef>
+        </p:style>
+        <p:txBody>
+          <a:bodyPr rtlCol="0" anchor="ctr"/>
+          <a:lstStyle/>
+          <a:p>
+            <a:pPr algn="ctr"/>
+          </a:p>
+        </p:txBody>
+      </p:sp>
+      <p:sp>
+        <p:nvSpPr>
+          <p:cNvPr id="8" name="TextBox 7"/>
+          <p:cNvSpPr txBox="1"/>
+          <p:nvPr/>
+        </p:nvSpPr>
+        <p:spPr>
+          <a:xfrm>
+            <a:off x="365760" y="91440"/>
+            <a:ext cx="9144000" cy="475488"/>
+          </a:xfrm>
+          <a:prstGeom prst="rect">
+            <a:avLst/>
+          </a:prstGeom>
+          <a:noFill/>
+        </p:spPr>
+        <p:txBody>
+          <a:bodyPr wrap="square">
+            <a:spAutoFit/>
+          </a:bodyPr>
+          <a:lstStyle/>
+          <a:p>
+            <a:pPr algn="l"/>
+            <a:r>
+              <a:rPr sz="2200" b="1" i="0">
+                <a:solidFill>
+                  <a:srgbClr val="FFFFFF"/>
+                </a:solidFill>
+                <a:latin typeface="Segoe UI"/>
+              </a:rPr>
+              <a:t>LA BATAILLE DE SOLFÉRINO — 24 JUIN 1859</a:t>
+            </a:r>
+          </a:p>
+        </p:txBody>
+      </p:sp>
+      <p:sp>
+        <p:nvSpPr>
+          <p:cNvPr id="9" name="TextBox 8"/>
+          <p:cNvSpPr txBox="1"/>
+          <p:nvPr/>
+        </p:nvSpPr>
+        <p:spPr>
+          <a:xfrm>
+            <a:off x="365760" y="603504"/>
+            <a:ext cx="9144000" cy="329184"/>
+          </a:xfrm>
+          <a:prstGeom prst="rect">
+            <a:avLst/>
+          </a:prstGeom>
+          <a:noFill/>
+        </p:spPr>
+        <p:txBody>
+          <a:bodyPr wrap="square">
+            <a:spAutoFit/>
+          </a:bodyPr>
+          <a:lstStyle/>
+          <a:p>
+            <a:pPr algn="l"/>
+            <a:r>
+              <a:rPr sz="1100" b="0" i="1">
+                <a:solidFill>
+                  <a:srgbClr val="E74C3C"/>
+                </a:solidFill>
+                <a:latin typeface="Segoe UI"/>
+              </a:rPr>
+              <a:t>L'événement fondateur du droit humanitaire international et de la Croix-Rouge</a:t>
+            </a:r>
+          </a:p>
+        </p:txBody>
+      </p:sp>
+      <p:sp>
+        <p:nvSpPr>
+          <p:cNvPr id="10" name="Rectangle 9"/>
+          <p:cNvSpPr/>
+          <p:nvPr/>
+        </p:nvSpPr>
+        <p:spPr>
+          <a:xfrm>
+            <a:off x="10058400" y="109728"/>
+            <a:ext cx="1828800" cy="804672"/>
+          </a:xfrm>
+          <a:prstGeom prst="rect">
+            <a:avLst/>
+          </a:prstGeom>
+          <a:solidFill>
+            <a:srgbClr val="E74C3C"/>
+          </a:solidFill>
+          <a:ln>
+            <a:noFill/>
+          </a:ln>
+        </p:spPr>
+        <p:style>
+          <a:lnRef idx="1">
+            <a:schemeClr val="accent1"/>
+          </a:lnRef>
+          <a:fillRef idx="3">
+            <a:schemeClr val="accent1"/>
+          </a:fillRef>
+          <a:effectRef idx="2">
+            <a:schemeClr val="accent1"/>
+          </a:effectRef>
+          <a:fontRef idx="minor">
+            <a:schemeClr val="lt1"/>
+          </a:fontRef>
+        </p:style>
+        <p:txBody>
+          <a:bodyPr rtlCol="0" anchor="ctr"/>
+          <a:lstStyle/>
+          <a:p>
+            <a:pPr algn="ctr"/>
+          </a:p>
+        </p:txBody>
+      </p:sp>
+      <p:sp>
+        <p:nvSpPr>
+          <p:cNvPr id="11" name="TextBox 10"/>
+          <p:cNvSpPr txBox="1"/>
+          <p:nvPr/>
+        </p:nvSpPr>
+        <p:spPr>
+          <a:xfrm>
+            <a:off x="10058400" y="182880"/>
+            <a:ext cx="1828800" cy="329184"/>
+          </a:xfrm>
+          <a:prstGeom prst="rect">
+            <a:avLst/>
+          </a:prstGeom>
+          <a:noFill/>
+        </p:spPr>
+        <p:txBody>
+          <a:bodyPr wrap="square">
+            <a:spAutoFit/>
+          </a:bodyPr>
+          <a:lstStyle/>
+          <a:p>
+            <a:pPr algn="ctr"/>
+            <a:r>
+              <a:rPr sz="1100" b="1" i="0">
+                <a:solidFill>
+                  <a:srgbClr val="FFFFFF"/>
+                </a:solidFill>
+                <a:latin typeface="Segoe UI"/>
+              </a:rPr>
+              <a:t>24 JUIN 1859</a:t>
+            </a:r>
+          </a:p>
+        </p:txBody>
+      </p:sp>
+      <p:sp>
+        <p:nvSpPr>
+          <p:cNvPr id="12" name="TextBox 11"/>
+          <p:cNvSpPr txBox="1"/>
+          <p:nvPr/>
+        </p:nvSpPr>
+        <p:spPr>
+          <a:xfrm>
+            <a:off x="10058400" y="502920"/>
+            <a:ext cx="1828800" cy="329184"/>
+          </a:xfrm>
+          <a:prstGeom prst="rect">
+            <a:avLst/>
+          </a:prstGeom>
+          <a:noFill/>
+        </p:spPr>
+        <p:txBody>
+          <a:bodyPr wrap="square">
+            <a:spAutoFit/>
+          </a:bodyPr>
+          <a:lstStyle/>
+          <a:p>
+            <a:pPr algn="ctr"/>
+            <a:r>
+              <a:rPr sz="900" b="0" i="1">
+                <a:solidFill>
+                  <a:srgbClr val="FFDDDD"/>
+                </a:solidFill>
+                <a:latin typeface="Segoe UI"/>
+              </a:rPr>
+              <a:t>SOLFÉRINO, ITALIE</a:t>
+            </a:r>
+          </a:p>
+        </p:txBody>
+      </p:sp>
+      <p:sp>
+        <p:nvSpPr>
+          <p:cNvPr id="13" name="Rectangle 12"/>
+          <p:cNvSpPr/>
+          <p:nvPr/>
+        </p:nvSpPr>
+        <p:spPr>
+          <a:xfrm>
+            <a:off x="274320" y="1115568"/>
+            <a:ext cx="3749039" cy="5074920"/>
+          </a:xfrm>
+          <a:prstGeom prst="rect">
+            <a:avLst/>
+          </a:prstGeom>
+          <a:solidFill>
+            <a:srgbClr val="1A0808"/>
+          </a:solidFill>
+          <a:ln>
+            <a:noFill/>
+          </a:ln>
+        </p:spPr>
+        <p:style>
+          <a:lnRef idx="1">
+            <a:schemeClr val="accent1"/>
+          </a:lnRef>
+          <a:fillRef idx="3">
+            <a:schemeClr val="accent1"/>
+          </a:fillRef>
+          <a:effectRef idx="2">
+            <a:schemeClr val="accent1"/>
+          </a:effectRef>
+          <a:fontRef idx="minor">
+            <a:schemeClr val="lt1"/>
+          </a:fontRef>
+        </p:style>
+        <p:txBody>
+          <a:bodyPr rtlCol="0" anchor="ctr"/>
+          <a:lstStyle/>
+          <a:p>
+            <a:pPr algn="ctr"/>
+          </a:p>
+        </p:txBody>
+      </p:sp>
+      <p:sp>
+        <p:nvSpPr>
+          <p:cNvPr id="14" name="Rectangle 13"/>
+          <p:cNvSpPr/>
+          <p:nvPr/>
+        </p:nvSpPr>
+        <p:spPr>
+          <a:xfrm>
+            <a:off x="274320" y="1115568"/>
+            <a:ext cx="3749039" cy="36576"/>
+          </a:xfrm>
+          <a:prstGeom prst="rect">
+            <a:avLst/>
+          </a:prstGeom>
+          <a:solidFill>
+            <a:srgbClr val="E74C3C"/>
+          </a:solidFill>
+          <a:ln>
+            <a:noFill/>
+          </a:ln>
+        </p:spPr>
+        <p:style>
+          <a:lnRef idx="1">
+            <a:schemeClr val="accent1"/>
+          </a:lnRef>
+          <a:fillRef idx="3">
+            <a:schemeClr val="accent1"/>
+          </a:fillRef>
+          <a:effectRef idx="2">
+            <a:schemeClr val="accent1"/>
+          </a:effectRef>
+          <a:fontRef idx="minor">
+            <a:schemeClr val="lt1"/>
+          </a:fontRef>
+        </p:style>
+        <p:txBody>
+          <a:bodyPr rtlCol="0" anchor="ctr"/>
+          <a:lstStyle/>
+          <a:p>
+            <a:pPr algn="ctr"/>
+          </a:p>
+        </p:txBody>
+      </p:sp>
+      <p:sp>
+        <p:nvSpPr>
+          <p:cNvPr id="15" name="TextBox 14"/>
+          <p:cNvSpPr txBox="1"/>
+          <p:nvPr/>
+        </p:nvSpPr>
+        <p:spPr>
+          <a:xfrm>
+            <a:off x="457200" y="1207008"/>
+            <a:ext cx="3383280" cy="256032"/>
+          </a:xfrm>
+          <a:prstGeom prst="rect">
+            <a:avLst/>
+          </a:prstGeom>
+          <a:noFill/>
+        </p:spPr>
+        <p:txBody>
+          <a:bodyPr wrap="square">
+            <a:spAutoFit/>
+          </a:bodyPr>
+          <a:lstStyle/>
+          <a:p>
+            <a:pPr algn="l"/>
+            <a:r>
+              <a:rPr sz="1100" b="1" i="0">
+                <a:solidFill>
+                  <a:srgbClr val="E74C3C"/>
+                </a:solidFill>
+                <a:latin typeface="Segoe UI"/>
+              </a:rPr>
+              <a:t>⚔  LA BATAILLE</a:t>
+            </a:r>
+          </a:p>
+        </p:txBody>
+      </p:sp>
+      <p:sp>
+        <p:nvSpPr>
+          <p:cNvPr id="16" name="Rectangle 15"/>
+          <p:cNvSpPr/>
+          <p:nvPr/>
+        </p:nvSpPr>
+        <p:spPr>
+          <a:xfrm>
+            <a:off x="384048" y="1572768"/>
+            <a:ext cx="54864" cy="658368"/>
+          </a:xfrm>
+          <a:prstGeom prst="rect">
+            <a:avLst/>
+          </a:prstGeom>
+          <a:solidFill>
+            <a:srgbClr val="E74C3C"/>
+          </a:solidFill>
+          <a:ln>
+            <a:noFill/>
+          </a:ln>
+        </p:spPr>
+        <p:style>
+          <a:lnRef idx="1">
+            <a:schemeClr val="accent1"/>
+          </a:lnRef>
+          <a:fillRef idx="3">
+            <a:schemeClr val="accent1"/>
+          </a:fillRef>
+          <a:effectRef idx="2">
+            <a:schemeClr val="accent1"/>
+          </a:effectRef>
+          <a:fontRef idx="minor">
+            <a:schemeClr val="lt1"/>
+          </a:fontRef>
+        </p:style>
+        <p:txBody>
+          <a:bodyPr rtlCol="0" anchor="ctr"/>
+          <a:lstStyle/>
+          <a:p>
+            <a:pPr algn="ctr"/>
+          </a:p>
+        </p:txBody>
+      </p:sp>
+      <p:sp>
+        <p:nvSpPr>
+          <p:cNvPr id="17" name="TextBox 16"/>
+          <p:cNvSpPr txBox="1"/>
+          <p:nvPr/>
+        </p:nvSpPr>
+        <p:spPr>
+          <a:xfrm>
+            <a:off x="548640" y="1572768"/>
+            <a:ext cx="3291840" cy="256032"/>
+          </a:xfrm>
+          <a:prstGeom prst="rect">
+            <a:avLst/>
+          </a:prstGeom>
+          <a:noFill/>
+        </p:spPr>
+        <p:txBody>
+          <a:bodyPr wrap="square">
+            <a:spAutoFit/>
+          </a:bodyPr>
+          <a:lstStyle/>
+          <a:p>
+            <a:pPr algn="l"/>
+            <a:r>
+              <a:rPr sz="1000" b="1" i="0">
+                <a:solidFill>
+                  <a:srgbClr val="FFFFFF"/>
+                </a:solidFill>
+                <a:latin typeface="Segoe UI"/>
+              </a:rPr>
+              <a:t>300 000 soldats</a:t>
+            </a:r>
+          </a:p>
+        </p:txBody>
+      </p:sp>
+      <p:sp>
+        <p:nvSpPr>
+          <p:cNvPr id="18" name="TextBox 17"/>
+          <p:cNvSpPr txBox="1"/>
+          <p:nvPr/>
+        </p:nvSpPr>
+        <p:spPr>
+          <a:xfrm>
+            <a:off x="548640" y="1828800"/>
+            <a:ext cx="3291840" cy="384048"/>
+          </a:xfrm>
+          <a:prstGeom prst="rect">
+            <a:avLst/>
+          </a:prstGeom>
+          <a:noFill/>
+        </p:spPr>
+        <p:txBody>
+          <a:bodyPr wrap="square">
+            <a:spAutoFit/>
+          </a:bodyPr>
+          <a:lstStyle/>
+          <a:p>
+            <a:pPr algn="l"/>
+            <a:r>
+              <a:rPr sz="850" b="0" i="1">
+                <a:solidFill>
+                  <a:srgbClr val="DDCCCC"/>
+                </a:solidFill>
+                <a:latin typeface="Segoe UI"/>
+              </a:rPr>
+              <a:t>Franco-Sardiniens (France + Piémont) contre l'Empire austro-hongrois</a:t>
+            </a:r>
+          </a:p>
+        </p:txBody>
+      </p:sp>
+      <p:sp>
+        <p:nvSpPr>
+          <p:cNvPr id="19" name="Rectangle 18"/>
+          <p:cNvSpPr/>
+          <p:nvPr/>
+        </p:nvSpPr>
+        <p:spPr>
+          <a:xfrm>
+            <a:off x="384048" y="2322576"/>
+            <a:ext cx="54864" cy="658368"/>
+          </a:xfrm>
+          <a:prstGeom prst="rect">
+            <a:avLst/>
+          </a:prstGeom>
+          <a:solidFill>
+            <a:srgbClr val="E74C3C"/>
+          </a:solidFill>
+          <a:ln>
+            <a:noFill/>
+          </a:ln>
+        </p:spPr>
+        <p:style>
+          <a:lnRef idx="1">
+            <a:schemeClr val="accent1"/>
+          </a:lnRef>
+          <a:fillRef idx="3">
+            <a:schemeClr val="accent1"/>
+          </a:fillRef>
+          <a:effectRef idx="2">
+            <a:schemeClr val="accent1"/>
+          </a:effectRef>
+          <a:fontRef idx="minor">
+            <a:schemeClr val="lt1"/>
+          </a:fontRef>
+        </p:style>
+        <p:txBody>
+          <a:bodyPr rtlCol="0" anchor="ctr"/>
+          <a:lstStyle/>
+          <a:p>
+            <a:pPr algn="ctr"/>
+          </a:p>
+        </p:txBody>
+      </p:sp>
+      <p:sp>
+        <p:nvSpPr>
+          <p:cNvPr id="20" name="TextBox 19"/>
+          <p:cNvSpPr txBox="1"/>
+          <p:nvPr/>
+        </p:nvSpPr>
+        <p:spPr>
+          <a:xfrm>
+            <a:off x="548640" y="2322576"/>
+            <a:ext cx="3291840" cy="256032"/>
+          </a:xfrm>
+          <a:prstGeom prst="rect">
+            <a:avLst/>
+          </a:prstGeom>
+          <a:noFill/>
+        </p:spPr>
+        <p:txBody>
+          <a:bodyPr wrap="square">
+            <a:spAutoFit/>
+          </a:bodyPr>
+          <a:lstStyle/>
+          <a:p>
+            <a:pPr algn="l"/>
+            <a:r>
+              <a:rPr sz="1000" b="1" i="0">
+                <a:solidFill>
+                  <a:srgbClr val="FFFFFF"/>
+                </a:solidFill>
+                <a:latin typeface="Segoe UI"/>
+              </a:rPr>
+              <a:t>40 000 victimes</a:t>
+            </a:r>
+          </a:p>
+        </p:txBody>
+      </p:sp>
+      <p:sp>
+        <p:nvSpPr>
+          <p:cNvPr id="21" name="TextBox 20"/>
+          <p:cNvSpPr txBox="1"/>
+          <p:nvPr/>
+        </p:nvSpPr>
+        <p:spPr>
+          <a:xfrm>
+            <a:off x="548640" y="2578608"/>
+            <a:ext cx="3291840" cy="384048"/>
+          </a:xfrm>
+          <a:prstGeom prst="rect">
+            <a:avLst/>
+          </a:prstGeom>
+          <a:noFill/>
+        </p:spPr>
+        <p:txBody>
+          <a:bodyPr wrap="square">
+            <a:spAutoFit/>
+          </a:bodyPr>
+          <a:lstStyle/>
+          <a:p>
+            <a:pPr algn="l"/>
+            <a:r>
+              <a:rPr sz="850" b="0" i="1">
+                <a:solidFill>
+                  <a:srgbClr val="DDCCCC"/>
+                </a:solidFill>
+                <a:latin typeface="Segoe UI"/>
+              </a:rPr>
+              <a:t>Morts et blessés en une seule journée de combat acharné</a:t>
+            </a:r>
+          </a:p>
+        </p:txBody>
+      </p:sp>
+      <p:sp>
+        <p:nvSpPr>
+          <p:cNvPr id="22" name="Rectangle 21"/>
+          <p:cNvSpPr/>
+          <p:nvPr/>
+        </p:nvSpPr>
+        <p:spPr>
+          <a:xfrm>
+            <a:off x="384048" y="3072384"/>
+            <a:ext cx="54864" cy="658368"/>
+          </a:xfrm>
+          <a:prstGeom prst="rect">
+            <a:avLst/>
+          </a:prstGeom>
+          <a:solidFill>
+            <a:srgbClr val="E74C3C"/>
+          </a:solidFill>
+          <a:ln>
+            <a:noFill/>
+          </a:ln>
+        </p:spPr>
+        <p:style>
+          <a:lnRef idx="1">
+            <a:schemeClr val="accent1"/>
+          </a:lnRef>
+          <a:fillRef idx="3">
+            <a:schemeClr val="accent1"/>
+          </a:fillRef>
+          <a:effectRef idx="2">
+            <a:schemeClr val="accent1"/>
+          </a:effectRef>
+          <a:fontRef idx="minor">
+            <a:schemeClr val="lt1"/>
+          </a:fontRef>
+        </p:style>
+        <p:txBody>
+          <a:bodyPr rtlCol="0" anchor="ctr"/>
+          <a:lstStyle/>
+          <a:p>
+            <a:pPr algn="ctr"/>
+          </a:p>
+        </p:txBody>
+      </p:sp>
+      <p:sp>
+        <p:nvSpPr>
+          <p:cNvPr id="23" name="TextBox 22"/>
+          <p:cNvSpPr txBox="1"/>
+          <p:nvPr/>
+        </p:nvSpPr>
+        <p:spPr>
+          <a:xfrm>
+            <a:off x="548640" y="3072384"/>
+            <a:ext cx="3291840" cy="256032"/>
+          </a:xfrm>
+          <a:prstGeom prst="rect">
+            <a:avLst/>
+          </a:prstGeom>
+          <a:noFill/>
+        </p:spPr>
+        <p:txBody>
+          <a:bodyPr wrap="square">
+            <a:spAutoFit/>
+          </a:bodyPr>
+          <a:lstStyle/>
+          <a:p>
+            <a:pPr algn="l"/>
+            <a:r>
+              <a:rPr sz="1000" b="1" i="0">
+                <a:solidFill>
+                  <a:srgbClr val="FFFFFF"/>
+                </a:solidFill>
+                <a:latin typeface="Segoe UI"/>
+              </a:rPr>
+              <a:t>Chaleur extrême</a:t>
+            </a:r>
+          </a:p>
+        </p:txBody>
+      </p:sp>
+      <p:sp>
+        <p:nvSpPr>
+          <p:cNvPr id="24" name="TextBox 23"/>
+          <p:cNvSpPr txBox="1"/>
+          <p:nvPr/>
+        </p:nvSpPr>
+        <p:spPr>
+          <a:xfrm>
+            <a:off x="548640" y="3328416"/>
+            <a:ext cx="3291840" cy="384048"/>
+          </a:xfrm>
+          <a:prstGeom prst="rect">
+            <a:avLst/>
+          </a:prstGeom>
+          <a:noFill/>
+        </p:spPr>
+        <p:txBody>
+          <a:bodyPr wrap="square">
+            <a:spAutoFit/>
+          </a:bodyPr>
+          <a:lstStyle/>
+          <a:p>
+            <a:pPr algn="l"/>
+            <a:r>
+              <a:rPr sz="850" b="0" i="1">
+                <a:solidFill>
+                  <a:srgbClr val="DDCCCC"/>
+                </a:solidFill>
+                <a:latin typeface="Segoe UI"/>
+              </a:rPr>
+              <a:t>38°C sous le soleil lombard — soif, épuisement, sang partout</a:t>
+            </a:r>
+          </a:p>
+        </p:txBody>
+      </p:sp>
+      <p:sp>
+        <p:nvSpPr>
+          <p:cNvPr id="25" name="Rectangle 24"/>
+          <p:cNvSpPr/>
+          <p:nvPr/>
+        </p:nvSpPr>
+        <p:spPr>
+          <a:xfrm>
+            <a:off x="384048" y="3822192"/>
+            <a:ext cx="54864" cy="658368"/>
+          </a:xfrm>
+          <a:prstGeom prst="rect">
+            <a:avLst/>
+          </a:prstGeom>
+          <a:solidFill>
+            <a:srgbClr val="E74C3C"/>
+          </a:solidFill>
+          <a:ln>
+            <a:noFill/>
+          </a:ln>
+        </p:spPr>
+        <p:style>
+          <a:lnRef idx="1">
+            <a:schemeClr val="accent1"/>
+          </a:lnRef>
+          <a:fillRef idx="3">
+            <a:schemeClr val="accent1"/>
+          </a:fillRef>
+          <a:effectRef idx="2">
+            <a:schemeClr val="accent1"/>
+          </a:effectRef>
+          <a:fontRef idx="minor">
+            <a:schemeClr val="lt1"/>
+          </a:fontRef>
+        </p:style>
+        <p:txBody>
+          <a:bodyPr rtlCol="0" anchor="ctr"/>
+          <a:lstStyle/>
+          <a:p>
+            <a:pPr algn="ctr"/>
+          </a:p>
+        </p:txBody>
+      </p:sp>
+      <p:sp>
+        <p:nvSpPr>
+          <p:cNvPr id="26" name="TextBox 25"/>
+          <p:cNvSpPr txBox="1"/>
+          <p:nvPr/>
+        </p:nvSpPr>
+        <p:spPr>
+          <a:xfrm>
+            <a:off x="548640" y="3822192"/>
+            <a:ext cx="3291840" cy="256032"/>
+          </a:xfrm>
+          <a:prstGeom prst="rect">
+            <a:avLst/>
+          </a:prstGeom>
+          <a:noFill/>
+        </p:spPr>
+        <p:txBody>
+          <a:bodyPr wrap="square">
+            <a:spAutoFit/>
+          </a:bodyPr>
+          <a:lstStyle/>
+          <a:p>
+            <a:pPr algn="l"/>
+            <a:r>
+              <a:rPr sz="1000" b="1" i="0">
+                <a:solidFill>
+                  <a:srgbClr val="FFFFFF"/>
+                </a:solidFill>
+                <a:latin typeface="Segoe UI"/>
+              </a:rPr>
+              <a:t>Aucun soin</a:t>
+            </a:r>
+          </a:p>
+        </p:txBody>
+      </p:sp>
+      <p:sp>
+        <p:nvSpPr>
+          <p:cNvPr id="27" name="TextBox 26"/>
+          <p:cNvSpPr txBox="1"/>
+          <p:nvPr/>
+        </p:nvSpPr>
+        <p:spPr>
+          <a:xfrm>
+            <a:off x="548640" y="4078224"/>
+            <a:ext cx="3291840" cy="384048"/>
+          </a:xfrm>
+          <a:prstGeom prst="rect">
+            <a:avLst/>
+          </a:prstGeom>
+          <a:noFill/>
+        </p:spPr>
+        <p:txBody>
+          <a:bodyPr wrap="square">
+            <a:spAutoFit/>
+          </a:bodyPr>
+          <a:lstStyle/>
+          <a:p>
+            <a:pPr algn="l"/>
+            <a:r>
+              <a:rPr sz="850" b="0" i="1">
+                <a:solidFill>
+                  <a:srgbClr val="DDCCCC"/>
+                </a:solidFill>
+                <a:latin typeface="Segoe UI"/>
+              </a:rPr>
+              <a:t>Les blessés abandonnés sur le champ de bataille, sans médecins</a:t>
+            </a:r>
+          </a:p>
+        </p:txBody>
+      </p:sp>
+      <p:sp>
+        <p:nvSpPr>
+          <p:cNvPr id="28" name="Rectangle 27"/>
+          <p:cNvSpPr/>
+          <p:nvPr/>
+        </p:nvSpPr>
+        <p:spPr>
+          <a:xfrm>
+            <a:off x="384048" y="4572000"/>
+            <a:ext cx="54864" cy="658368"/>
+          </a:xfrm>
+          <a:prstGeom prst="rect">
+            <a:avLst/>
+          </a:prstGeom>
+          <a:solidFill>
+            <a:srgbClr val="E74C3C"/>
+          </a:solidFill>
+          <a:ln>
+            <a:noFill/>
+          </a:ln>
+        </p:spPr>
+        <p:style>
+          <a:lnRef idx="1">
+            <a:schemeClr val="accent1"/>
+          </a:lnRef>
+          <a:fillRef idx="3">
+            <a:schemeClr val="accent1"/>
+          </a:fillRef>
+          <a:effectRef idx="2">
+            <a:schemeClr val="accent1"/>
+          </a:effectRef>
+          <a:fontRef idx="minor">
+            <a:schemeClr val="lt1"/>
+          </a:fontRef>
+        </p:style>
+        <p:txBody>
+          <a:bodyPr rtlCol="0" anchor="ctr"/>
+          <a:lstStyle/>
+          <a:p>
+            <a:pPr algn="ctr"/>
+          </a:p>
+        </p:txBody>
+      </p:sp>
+      <p:sp>
+        <p:nvSpPr>
+          <p:cNvPr id="29" name="TextBox 28"/>
+          <p:cNvSpPr txBox="1"/>
+          <p:nvPr/>
+        </p:nvSpPr>
+        <p:spPr>
+          <a:xfrm>
+            <a:off x="548640" y="4572000"/>
+            <a:ext cx="3291840" cy="256032"/>
+          </a:xfrm>
+          <a:prstGeom prst="rect">
+            <a:avLst/>
+          </a:prstGeom>
+          <a:noFill/>
+        </p:spPr>
+        <p:txBody>
+          <a:bodyPr wrap="square">
+            <a:spAutoFit/>
+          </a:bodyPr>
+          <a:lstStyle/>
+          <a:p>
+            <a:pPr algn="l"/>
+            <a:r>
+              <a:rPr sz="1000" b="1" i="0">
+                <a:solidFill>
+                  <a:srgbClr val="FFFFFF"/>
+                </a:solidFill>
+                <a:latin typeface="Segoe UI"/>
+              </a:rPr>
+              <a:t>Victoire française</a:t>
+            </a:r>
+          </a:p>
+        </p:txBody>
+      </p:sp>
+      <p:sp>
+        <p:nvSpPr>
+          <p:cNvPr id="30" name="TextBox 29"/>
+          <p:cNvSpPr txBox="1"/>
+          <p:nvPr/>
+        </p:nvSpPr>
+        <p:spPr>
+          <a:xfrm>
+            <a:off x="548640" y="4828032"/>
+            <a:ext cx="3291840" cy="384048"/>
+          </a:xfrm>
+          <a:prstGeom prst="rect">
+            <a:avLst/>
+          </a:prstGeom>
+          <a:noFill/>
+        </p:spPr>
+        <p:txBody>
+          <a:bodyPr wrap="square">
+            <a:spAutoFit/>
+          </a:bodyPr>
+          <a:lstStyle/>
+          <a:p>
+            <a:pPr algn="l"/>
+            <a:r>
+              <a:rPr sz="850" b="0" i="1">
+                <a:solidFill>
+                  <a:srgbClr val="DDCCCC"/>
+                </a:solidFill>
+                <a:latin typeface="Segoe UI"/>
+              </a:rPr>
+              <a:t>Napoléon III décide l'armistice de Villafranca — 11 juillet 1859</a:t>
+            </a:r>
+          </a:p>
+        </p:txBody>
+      </p:sp>
+      <p:sp>
+        <p:nvSpPr>
+          <p:cNvPr id="31" name="Rectangle 30"/>
+          <p:cNvSpPr/>
+          <p:nvPr/>
+        </p:nvSpPr>
+        <p:spPr>
+          <a:xfrm>
+            <a:off x="4206240" y="1115568"/>
+            <a:ext cx="3749039" cy="5074920"/>
+          </a:xfrm>
+          <a:prstGeom prst="rect">
+            <a:avLst/>
+          </a:prstGeom>
+          <a:solidFill>
+            <a:srgbClr val="050A1A"/>
+          </a:solidFill>
+          <a:ln>
+            <a:noFill/>
+          </a:ln>
+        </p:spPr>
+        <p:style>
+          <a:lnRef idx="1">
+            <a:schemeClr val="accent1"/>
+          </a:lnRef>
+          <a:fillRef idx="3">
+            <a:schemeClr val="accent1"/>
+          </a:fillRef>
+          <a:effectRef idx="2">
+            <a:schemeClr val="accent1"/>
+          </a:effectRef>
+          <a:fontRef idx="minor">
+            <a:schemeClr val="lt1"/>
+          </a:fontRef>
+        </p:style>
+        <p:txBody>
+          <a:bodyPr rtlCol="0" anchor="ctr"/>
+          <a:lstStyle/>
+          <a:p>
+            <a:pPr algn="ctr"/>
+          </a:p>
+        </p:txBody>
+      </p:sp>
+      <p:sp>
+        <p:nvSpPr>
+          <p:cNvPr id="32" name="Rectangle 31"/>
+          <p:cNvSpPr/>
+          <p:nvPr/>
+        </p:nvSpPr>
+        <p:spPr>
+          <a:xfrm>
+            <a:off x="4206240" y="1115568"/>
+            <a:ext cx="3749039" cy="36576"/>
+          </a:xfrm>
+          <a:prstGeom prst="rect">
+            <a:avLst/>
+          </a:prstGeom>
+          <a:solidFill>
+            <a:srgbClr val="00AEEF"/>
+          </a:solidFill>
+          <a:ln>
+            <a:noFill/>
+          </a:ln>
+        </p:spPr>
+        <p:style>
+          <a:lnRef idx="1">
+            <a:schemeClr val="accent1"/>
+          </a:lnRef>
+          <a:fillRef idx="3">
+            <a:schemeClr val="accent1"/>
+          </a:fillRef>
+          <a:effectRef idx="2">
+            <a:schemeClr val="accent1"/>
+          </a:effectRef>
+          <a:fontRef idx="minor">
+            <a:schemeClr val="lt1"/>
+          </a:fontRef>
+        </p:style>
+        <p:txBody>
+          <a:bodyPr rtlCol="0" anchor="ctr"/>
+          <a:lstStyle/>
+          <a:p>
+            <a:pPr algn="ctr"/>
+          </a:p>
+        </p:txBody>
+      </p:sp>
+      <p:sp>
+        <p:nvSpPr>
+          <p:cNvPr id="33" name="TextBox 32"/>
+          <p:cNvSpPr txBox="1"/>
+          <p:nvPr/>
+        </p:nvSpPr>
+        <p:spPr>
+          <a:xfrm>
+            <a:off x="4389120" y="1207008"/>
+            <a:ext cx="3383280" cy="256032"/>
+          </a:xfrm>
+          <a:prstGeom prst="rect">
+            <a:avLst/>
+          </a:prstGeom>
+          <a:noFill/>
+        </p:spPr>
+        <p:txBody>
+          <a:bodyPr wrap="square">
+            <a:spAutoFit/>
+          </a:bodyPr>
+          <a:lstStyle/>
+          <a:p>
+            <a:pPr algn="l"/>
+            <a:r>
+              <a:rPr sz="1100" b="1" i="0">
+                <a:solidFill>
+                  <a:srgbClr val="00AEEF"/>
+                </a:solidFill>
+                <a:latin typeface="Segoe UI"/>
+              </a:rPr>
+              <a:t>👤  HENRY DUNANT — LE TÉMOIN</a:t>
+            </a:r>
+          </a:p>
+        </p:txBody>
+      </p:sp>
+      <p:sp>
+        <p:nvSpPr>
+          <p:cNvPr id="34" name="Rectangle 33"/>
+          <p:cNvSpPr/>
+          <p:nvPr/>
+        </p:nvSpPr>
+        <p:spPr>
+          <a:xfrm>
+            <a:off x="5349240" y="1572768"/>
+            <a:ext cx="1463040" cy="1097280"/>
+          </a:xfrm>
+          <a:prstGeom prst="rect">
+            <a:avLst/>
+          </a:prstGeom>
+          <a:solidFill>
+            <a:srgbClr val="0A254F"/>
+          </a:solidFill>
+          <a:ln>
+            <a:noFill/>
+          </a:ln>
+        </p:spPr>
+        <p:style>
+          <a:lnRef idx="1">
+            <a:schemeClr val="accent1"/>
+          </a:lnRef>
+          <a:fillRef idx="3">
+            <a:schemeClr val="accent1"/>
+          </a:fillRef>
+          <a:effectRef idx="2">
+            <a:schemeClr val="accent1"/>
+          </a:effectRef>
+          <a:fontRef idx="minor">
+            <a:schemeClr val="lt1"/>
+          </a:fontRef>
+        </p:style>
+        <p:txBody>
+          <a:bodyPr rtlCol="0" anchor="ctr"/>
+          <a:lstStyle/>
+          <a:p>
+            <a:pPr algn="ctr"/>
+          </a:p>
+        </p:txBody>
+      </p:sp>
+      <p:sp>
+        <p:nvSpPr>
+          <p:cNvPr id="35" name="TextBox 34"/>
+          <p:cNvSpPr txBox="1"/>
+          <p:nvPr/>
+        </p:nvSpPr>
+        <p:spPr>
+          <a:xfrm>
+            <a:off x="5349240" y="1664208"/>
+            <a:ext cx="1463040" cy="822960"/>
+          </a:xfrm>
+          <a:prstGeom prst="rect">
+            <a:avLst/>
+          </a:prstGeom>
+          <a:noFill/>
+        </p:spPr>
+        <p:txBody>
+          <a:bodyPr wrap="square">
+            <a:spAutoFit/>
+          </a:bodyPr>
+          <a:lstStyle/>
+          <a:p>
+            <a:pPr algn="ctr"/>
+            <a:r>
+              <a:rPr sz="1000" b="1" i="0">
+                <a:solidFill>
+                  <a:srgbClr val="00AEEF"/>
+                </a:solidFill>
+                <a:latin typeface="Segoe UI"/>
+              </a:rPr>
+              <a:t>🇨🇭
+Henry
+Dunant</a:t>
+            </a:r>
+          </a:p>
+        </p:txBody>
+      </p:sp>
+      <p:sp>
+        <p:nvSpPr>
+          <p:cNvPr id="36" name="TextBox 35"/>
+          <p:cNvSpPr txBox="1"/>
+          <p:nvPr/>
+        </p:nvSpPr>
+        <p:spPr>
+          <a:xfrm>
+            <a:off x="4389120" y="1609344"/>
+            <a:ext cx="868680" cy="822960"/>
+          </a:xfrm>
+          <a:prstGeom prst="rect">
+            <a:avLst/>
+          </a:prstGeom>
+          <a:noFill/>
+        </p:spPr>
+        <p:txBody>
+          <a:bodyPr wrap="square">
+            <a:spAutoFit/>
+          </a:bodyPr>
+          <a:lstStyle/>
+          <a:p>
+            <a:pPr algn="l"/>
+            <a:r>
+              <a:rPr sz="800" b="0" i="1">
+                <a:solidFill>
+                  <a:srgbClr val="AABBDD"/>
+                </a:solidFill>
+                <a:latin typeface="Segoe UI"/>
+              </a:rPr>
+              <a:t>Genevois
+Homme
+d'affaires
+31 ans</a:t>
+            </a:r>
+          </a:p>
+        </p:txBody>
+      </p:sp>
+      <p:sp>
+        <p:nvSpPr>
+          <p:cNvPr id="37" name="TextBox 36"/>
+          <p:cNvSpPr txBox="1"/>
+          <p:nvPr/>
+        </p:nvSpPr>
+        <p:spPr>
+          <a:xfrm>
+            <a:off x="4389120" y="2724912"/>
+            <a:ext cx="3383280" cy="292608"/>
+          </a:xfrm>
+          <a:prstGeom prst="rect">
+            <a:avLst/>
+          </a:prstGeom>
+          <a:noFill/>
+        </p:spPr>
+        <p:txBody>
+          <a:bodyPr wrap="square">
+            <a:spAutoFit/>
+          </a:bodyPr>
+          <a:lstStyle/>
+          <a:p>
+            <a:pPr algn="l"/>
+            <a:r>
+              <a:rPr sz="950" b="0" i="0">
+                <a:solidFill>
+                  <a:srgbClr val="00AEEF"/>
+                </a:solidFill>
+                <a:latin typeface="Segoe UI"/>
+              </a:rPr>
+              <a:t>De passage en Italie pour rencontrer Napoléon III,</a:t>
+            </a:r>
+          </a:p>
+        </p:txBody>
+      </p:sp>
+      <p:sp>
+        <p:nvSpPr>
+          <p:cNvPr id="38" name="TextBox 37"/>
+          <p:cNvSpPr txBox="1"/>
+          <p:nvPr/>
+        </p:nvSpPr>
+        <p:spPr>
+          <a:xfrm>
+            <a:off x="4389120" y="2999232"/>
+            <a:ext cx="3383280" cy="292608"/>
+          </a:xfrm>
+          <a:prstGeom prst="rect">
+            <a:avLst/>
+          </a:prstGeom>
+          <a:noFill/>
+        </p:spPr>
+        <p:txBody>
+          <a:bodyPr wrap="square">
+            <a:spAutoFit/>
+          </a:bodyPr>
+          <a:lstStyle/>
+          <a:p>
+            <a:pPr algn="l"/>
+            <a:r>
+              <a:rPr sz="950" b="0" i="0">
+                <a:solidFill>
+                  <a:srgbClr val="FFFFFF"/>
+                </a:solidFill>
+                <a:latin typeface="Segoe UI"/>
+              </a:rPr>
+              <a:t>Dunant arrive à Solférino le soir même de la bataille.</a:t>
+            </a:r>
+          </a:p>
+        </p:txBody>
+      </p:sp>
+      <p:sp>
+        <p:nvSpPr>
+          <p:cNvPr id="39" name="TextBox 38"/>
+          <p:cNvSpPr txBox="1"/>
+          <p:nvPr/>
+        </p:nvSpPr>
+        <p:spPr>
+          <a:xfrm>
+            <a:off x="4389120" y="3273552"/>
+            <a:ext cx="3383280" cy="292608"/>
+          </a:xfrm>
+          <a:prstGeom prst="rect">
+            <a:avLst/>
+          </a:prstGeom>
+          <a:noFill/>
+        </p:spPr>
+        <p:txBody>
+          <a:bodyPr wrap="square">
+            <a:spAutoFit/>
+          </a:bodyPr>
+          <a:lstStyle/>
+          <a:p>
+            <a:pPr algn="l"/>
+            <a:r>
+              <a:rPr sz="950" b="0" i="0">
+                <a:solidFill>
+                  <a:srgbClr val="FFFFFF"/>
+                </a:solidFill>
+                <a:latin typeface="Segoe UI"/>
+              </a:rPr>
+              <a:t/>
+            </a:r>
+          </a:p>
+        </p:txBody>
+      </p:sp>
+      <p:sp>
+        <p:nvSpPr>
+          <p:cNvPr id="40" name="TextBox 39"/>
+          <p:cNvSpPr txBox="1"/>
+          <p:nvPr/>
+        </p:nvSpPr>
+        <p:spPr>
+          <a:xfrm>
+            <a:off x="4389120" y="3547872"/>
+            <a:ext cx="3383280" cy="292608"/>
+          </a:xfrm>
+          <a:prstGeom prst="rect">
+            <a:avLst/>
+          </a:prstGeom>
+          <a:noFill/>
+        </p:spPr>
+        <p:txBody>
+          <a:bodyPr wrap="square">
+            <a:spAutoFit/>
+          </a:bodyPr>
+          <a:lstStyle/>
+          <a:p>
+            <a:pPr algn="l"/>
+            <a:r>
+              <a:rPr sz="950" b="0" i="0">
+                <a:solidFill>
+                  <a:srgbClr val="00AEEF"/>
+                </a:solidFill>
+                <a:latin typeface="Segoe UI"/>
+              </a:rPr>
+              <a:t>Horrifié par les milliers de blessés abandonnés,</a:t>
+            </a:r>
+          </a:p>
+        </p:txBody>
+      </p:sp>
+      <p:sp>
+        <p:nvSpPr>
+          <p:cNvPr id="41" name="TextBox 40"/>
+          <p:cNvSpPr txBox="1"/>
+          <p:nvPr/>
+        </p:nvSpPr>
+        <p:spPr>
+          <a:xfrm>
+            <a:off x="4389120" y="3822192"/>
+            <a:ext cx="3383280" cy="292608"/>
+          </a:xfrm>
+          <a:prstGeom prst="rect">
+            <a:avLst/>
+          </a:prstGeom>
+          <a:noFill/>
+        </p:spPr>
+        <p:txBody>
+          <a:bodyPr wrap="square">
+            <a:spAutoFit/>
+          </a:bodyPr>
+          <a:lstStyle/>
+          <a:p>
+            <a:pPr algn="l"/>
+            <a:r>
+              <a:rPr sz="950" b="0" i="0">
+                <a:solidFill>
+                  <a:srgbClr val="00AEEF"/>
+                </a:solidFill>
+                <a:latin typeface="Segoe UI"/>
+              </a:rPr>
+              <a:t>il organise les femmes des villages voisins.</a:t>
+            </a:r>
+          </a:p>
+        </p:txBody>
+      </p:sp>
+      <p:sp>
+        <p:nvSpPr>
+          <p:cNvPr id="42" name="TextBox 41"/>
+          <p:cNvSpPr txBox="1"/>
+          <p:nvPr/>
+        </p:nvSpPr>
+        <p:spPr>
+          <a:xfrm>
+            <a:off x="4389120" y="4096512"/>
+            <a:ext cx="3383280" cy="292608"/>
+          </a:xfrm>
+          <a:prstGeom prst="rect">
+            <a:avLst/>
+          </a:prstGeom>
+          <a:noFill/>
+        </p:spPr>
+        <p:txBody>
+          <a:bodyPr wrap="square">
+            <a:spAutoFit/>
+          </a:bodyPr>
+          <a:lstStyle/>
+          <a:p>
+            <a:pPr algn="l"/>
+            <a:r>
+              <a:rPr sz="950" b="0" i="0">
+                <a:solidFill>
+                  <a:srgbClr val="FFFFFF"/>
+                </a:solidFill>
+                <a:latin typeface="Segoe UI"/>
+              </a:rPr>
+              <a:t/>
+            </a:r>
+          </a:p>
+        </p:txBody>
+      </p:sp>
+      <p:sp>
+        <p:nvSpPr>
+          <p:cNvPr id="43" name="TextBox 42"/>
+          <p:cNvSpPr txBox="1"/>
+          <p:nvPr/>
+        </p:nvSpPr>
+        <p:spPr>
+          <a:xfrm>
+            <a:off x="4389120" y="4370832"/>
+            <a:ext cx="3383280" cy="292608"/>
+          </a:xfrm>
+          <a:prstGeom prst="rect">
+            <a:avLst/>
+          </a:prstGeom>
+          <a:noFill/>
+        </p:spPr>
+        <p:txBody>
+          <a:bodyPr wrap="square">
+            <a:spAutoFit/>
+          </a:bodyPr>
+          <a:lstStyle/>
+          <a:p>
+            <a:pPr algn="l"/>
+            <a:r>
+              <a:rPr sz="1100" b="1" i="0">
+                <a:solidFill>
+                  <a:srgbClr val="F7941D"/>
+                </a:solidFill>
+                <a:latin typeface="Segoe UI"/>
+              </a:rPr>
+              <a:t>Mot d'ordre : « TUTTI FRATELLI »</a:t>
+            </a:r>
+          </a:p>
+        </p:txBody>
+      </p:sp>
+      <p:sp>
+        <p:nvSpPr>
+          <p:cNvPr id="44" name="TextBox 43"/>
+          <p:cNvSpPr txBox="1"/>
+          <p:nvPr/>
+        </p:nvSpPr>
+        <p:spPr>
+          <a:xfrm>
+            <a:off x="4389120" y="4645152"/>
+            <a:ext cx="3383280" cy="292608"/>
+          </a:xfrm>
+          <a:prstGeom prst="rect">
+            <a:avLst/>
+          </a:prstGeom>
+          <a:noFill/>
+        </p:spPr>
+        <p:txBody>
+          <a:bodyPr wrap="square">
+            <a:spAutoFit/>
+          </a:bodyPr>
+          <a:lstStyle/>
+          <a:p>
+            <a:pPr algn="l"/>
+            <a:r>
+              <a:rPr sz="1100" b="0" i="1">
+                <a:solidFill>
+                  <a:srgbClr val="F7941D"/>
+                </a:solidFill>
+                <a:latin typeface="Segoe UI"/>
+              </a:rPr>
+              <a:t>— « Tous frères » —</a:t>
+            </a:r>
+          </a:p>
+        </p:txBody>
+      </p:sp>
+      <p:sp>
+        <p:nvSpPr>
+          <p:cNvPr id="45" name="TextBox 44"/>
+          <p:cNvSpPr txBox="1"/>
+          <p:nvPr/>
+        </p:nvSpPr>
+        <p:spPr>
+          <a:xfrm>
+            <a:off x="4389120" y="4919472"/>
+            <a:ext cx="3383280" cy="292608"/>
+          </a:xfrm>
+          <a:prstGeom prst="rect">
+            <a:avLst/>
+          </a:prstGeom>
+          <a:noFill/>
+        </p:spPr>
+        <p:txBody>
+          <a:bodyPr wrap="square">
+            <a:spAutoFit/>
+          </a:bodyPr>
+          <a:lstStyle/>
+          <a:p>
+            <a:pPr algn="l"/>
+            <a:r>
+              <a:rPr sz="950" b="0" i="0">
+                <a:solidFill>
+                  <a:srgbClr val="FFFFFF"/>
+                </a:solidFill>
+                <a:latin typeface="Segoe UI"/>
+              </a:rPr>
+              <a:t>Sans distinction de nationalité ni d'uniforme.</a:t>
+            </a:r>
+          </a:p>
+        </p:txBody>
+      </p:sp>
+      <p:sp>
+        <p:nvSpPr>
+          <p:cNvPr id="46" name="TextBox 45"/>
+          <p:cNvSpPr txBox="1"/>
+          <p:nvPr/>
+        </p:nvSpPr>
+        <p:spPr>
+          <a:xfrm>
+            <a:off x="4389120" y="5193792"/>
+            <a:ext cx="3383280" cy="292608"/>
+          </a:xfrm>
+          <a:prstGeom prst="rect">
+            <a:avLst/>
+          </a:prstGeom>
+          <a:noFill/>
+        </p:spPr>
+        <p:txBody>
+          <a:bodyPr wrap="square">
+            <a:spAutoFit/>
+          </a:bodyPr>
+          <a:lstStyle/>
+          <a:p>
+            <a:pPr algn="l"/>
+            <a:r>
+              <a:rPr sz="950" b="0" i="0">
+                <a:solidFill>
+                  <a:srgbClr val="FFFFFF"/>
+                </a:solidFill>
+                <a:latin typeface="Segoe UI"/>
+              </a:rPr>
+              <a:t/>
+            </a:r>
+          </a:p>
+        </p:txBody>
+      </p:sp>
+      <p:sp>
+        <p:nvSpPr>
+          <p:cNvPr id="47" name="TextBox 46"/>
+          <p:cNvSpPr txBox="1"/>
+          <p:nvPr/>
+        </p:nvSpPr>
+        <p:spPr>
+          <a:xfrm>
+            <a:off x="4389120" y="5468112"/>
+            <a:ext cx="3383280" cy="292608"/>
+          </a:xfrm>
+          <a:prstGeom prst="rect">
+            <a:avLst/>
+          </a:prstGeom>
+          <a:noFill/>
+        </p:spPr>
+        <p:txBody>
+          <a:bodyPr wrap="square">
+            <a:spAutoFit/>
+          </a:bodyPr>
+          <a:lstStyle/>
+          <a:p>
+            <a:pPr algn="l"/>
+            <a:r>
+              <a:rPr sz="950" b="0" i="0">
+                <a:solidFill>
+                  <a:srgbClr val="00AEEF"/>
+                </a:solidFill>
+                <a:latin typeface="Segoe UI"/>
+              </a:rPr>
+              <a:t>Il finance les soins de sa propre fortune.</a:t>
+            </a:r>
+          </a:p>
+        </p:txBody>
+      </p:sp>
+      <p:sp>
+        <p:nvSpPr>
+          <p:cNvPr id="48" name="Rectangle 47"/>
+          <p:cNvSpPr/>
+          <p:nvPr/>
+        </p:nvSpPr>
+        <p:spPr>
+          <a:xfrm>
+            <a:off x="8138160" y="1115568"/>
+            <a:ext cx="3749039" cy="5074920"/>
+          </a:xfrm>
+          <a:prstGeom prst="rect">
+            <a:avLst/>
+          </a:prstGeom>
+          <a:solidFill>
+            <a:srgbClr val="051505"/>
+          </a:solidFill>
+          <a:ln>
+            <a:noFill/>
+          </a:ln>
+        </p:spPr>
+        <p:style>
+          <a:lnRef idx="1">
+            <a:schemeClr val="accent1"/>
+          </a:lnRef>
+          <a:fillRef idx="3">
+            <a:schemeClr val="accent1"/>
+          </a:fillRef>
+          <a:effectRef idx="2">
+            <a:schemeClr val="accent1"/>
+          </a:effectRef>
+          <a:fontRef idx="minor">
+            <a:schemeClr val="lt1"/>
+          </a:fontRef>
+        </p:style>
+        <p:txBody>
+          <a:bodyPr rtlCol="0" anchor="ctr"/>
+          <a:lstStyle/>
+          <a:p>
+            <a:pPr algn="ctr"/>
+          </a:p>
+        </p:txBody>
+      </p:sp>
+      <p:sp>
+        <p:nvSpPr>
+          <p:cNvPr id="49" name="Rectangle 48"/>
+          <p:cNvSpPr/>
+          <p:nvPr/>
+        </p:nvSpPr>
+        <p:spPr>
+          <a:xfrm>
+            <a:off x="8138160" y="1115568"/>
+            <a:ext cx="3749039" cy="36576"/>
+          </a:xfrm>
+          <a:prstGeom prst="rect">
+            <a:avLst/>
+          </a:prstGeom>
+          <a:solidFill>
+            <a:srgbClr val="27AE60"/>
+          </a:solidFill>
+          <a:ln>
+            <a:noFill/>
+          </a:ln>
+        </p:spPr>
+        <p:style>
+          <a:lnRef idx="1">
+            <a:schemeClr val="accent1"/>
+          </a:lnRef>
+          <a:fillRef idx="3">
+            <a:schemeClr val="accent1"/>
+          </a:fillRef>
+          <a:effectRef idx="2">
+            <a:schemeClr val="accent1"/>
+          </a:effectRef>
+          <a:fontRef idx="minor">
+            <a:schemeClr val="lt1"/>
+          </a:fontRef>
+        </p:style>
+        <p:txBody>
+          <a:bodyPr rtlCol="0" anchor="ctr"/>
+          <a:lstStyle/>
+          <a:p>
+            <a:pPr algn="ctr"/>
+          </a:p>
+        </p:txBody>
+      </p:sp>
+      <p:sp>
+        <p:nvSpPr>
+          <p:cNvPr id="50" name="TextBox 49"/>
+          <p:cNvSpPr txBox="1"/>
+          <p:nvPr/>
+        </p:nvSpPr>
+        <p:spPr>
+          <a:xfrm>
+            <a:off x="8321040" y="1207008"/>
+            <a:ext cx="3383280" cy="256032"/>
+          </a:xfrm>
+          <a:prstGeom prst="rect">
+            <a:avLst/>
+          </a:prstGeom>
+          <a:noFill/>
+        </p:spPr>
+        <p:txBody>
+          <a:bodyPr wrap="square">
+            <a:spAutoFit/>
+          </a:bodyPr>
+          <a:lstStyle/>
+          <a:p>
+            <a:pPr algn="l"/>
+            <a:r>
+              <a:rPr sz="1100" b="1" i="0">
+                <a:solidFill>
+                  <a:srgbClr val="27AE60"/>
+                </a:solidFill>
+                <a:latin typeface="Segoe UI"/>
+              </a:rPr>
+              <a:t>🌍  CONSÉQUENCES HISTORIQUES</a:t>
+            </a:r>
+          </a:p>
+        </p:txBody>
+      </p:sp>
+      <p:sp>
+        <p:nvSpPr>
+          <p:cNvPr id="51" name="Rectangle 50"/>
+          <p:cNvSpPr/>
+          <p:nvPr/>
+        </p:nvSpPr>
+        <p:spPr>
+          <a:xfrm>
+            <a:off x="8229600" y="1554480"/>
+            <a:ext cx="502920" cy="749808"/>
+          </a:xfrm>
+          <a:prstGeom prst="rect">
+            <a:avLst/>
+          </a:prstGeom>
+          <a:solidFill>
+            <a:srgbClr val="0A220A"/>
+          </a:solidFill>
+          <a:ln>
+            <a:noFill/>
+          </a:ln>
+        </p:spPr>
+        <p:style>
+          <a:lnRef idx="1">
+            <a:schemeClr val="accent1"/>
+          </a:lnRef>
+          <a:fillRef idx="3">
+            <a:schemeClr val="accent1"/>
+          </a:fillRef>
+          <a:effectRef idx="2">
+            <a:schemeClr val="accent1"/>
+          </a:effectRef>
+          <a:fontRef idx="minor">
+            <a:schemeClr val="lt1"/>
+          </a:fontRef>
+        </p:style>
+        <p:txBody>
+          <a:bodyPr rtlCol="0" anchor="ctr"/>
+          <a:lstStyle/>
+          <a:p>
+            <a:pPr algn="ctr"/>
+          </a:p>
+        </p:txBody>
+      </p:sp>
+      <p:sp>
+        <p:nvSpPr>
+          <p:cNvPr id="52" name="TextBox 51"/>
+          <p:cNvSpPr txBox="1"/>
+          <p:nvPr/>
+        </p:nvSpPr>
+        <p:spPr>
+          <a:xfrm>
+            <a:off x="8229600" y="1664208"/>
+            <a:ext cx="502920" cy="256032"/>
+          </a:xfrm>
+          <a:prstGeom prst="rect">
+            <a:avLst/>
+          </a:prstGeom>
+          <a:noFill/>
+        </p:spPr>
+        <p:txBody>
+          <a:bodyPr wrap="square">
+            <a:spAutoFit/>
+          </a:bodyPr>
+          <a:lstStyle/>
+          <a:p>
+            <a:pPr algn="ctr"/>
+            <a:r>
+              <a:rPr sz="800" b="1" i="0">
+                <a:solidFill>
+                  <a:srgbClr val="F1C40F"/>
+                </a:solidFill>
+                <a:latin typeface="Segoe UI"/>
+              </a:rPr>
+              <a:t>1862</a:t>
+            </a:r>
+          </a:p>
+        </p:txBody>
+      </p:sp>
+      <p:sp>
+        <p:nvSpPr>
+          <p:cNvPr id="53" name="TextBox 52"/>
+          <p:cNvSpPr txBox="1"/>
+          <p:nvPr/>
+        </p:nvSpPr>
+        <p:spPr>
+          <a:xfrm>
+            <a:off x="8823960" y="1600200"/>
+            <a:ext cx="2926080" cy="658368"/>
+          </a:xfrm>
+          <a:prstGeom prst="rect">
+            <a:avLst/>
+          </a:prstGeom>
+          <a:noFill/>
+        </p:spPr>
+        <p:txBody>
+          <a:bodyPr wrap="square">
+            <a:spAutoFit/>
+          </a:bodyPr>
+          <a:lstStyle/>
+          <a:p>
+            <a:pPr algn="l"/>
+            <a:r>
+              <a:rPr sz="900" b="0" i="0">
+                <a:solidFill>
+                  <a:srgbClr val="FFFFFF"/>
+                </a:solidFill>
+                <a:latin typeface="Segoe UI"/>
+              </a:rPr>
+              <a:t>Publication de « Un Souvenir de Solférino »
+Livre choc — 1 600 exemplaires vendus en 3 jours</a:t>
+            </a:r>
+          </a:p>
+        </p:txBody>
+      </p:sp>
+      <p:sp>
+        <p:nvSpPr>
+          <p:cNvPr id="54" name="Rectangle 53"/>
+          <p:cNvSpPr/>
+          <p:nvPr/>
+        </p:nvSpPr>
+        <p:spPr>
+          <a:xfrm>
+            <a:off x="8229600" y="2377440"/>
+            <a:ext cx="502920" cy="749808"/>
+          </a:xfrm>
+          <a:prstGeom prst="rect">
+            <a:avLst/>
+          </a:prstGeom>
+          <a:solidFill>
+            <a:srgbClr val="0A220A"/>
+          </a:solidFill>
+          <a:ln>
+            <a:noFill/>
+          </a:ln>
+        </p:spPr>
+        <p:style>
+          <a:lnRef idx="1">
+            <a:schemeClr val="accent1"/>
+          </a:lnRef>
+          <a:fillRef idx="3">
+            <a:schemeClr val="accent1"/>
+          </a:fillRef>
+          <a:effectRef idx="2">
+            <a:schemeClr val="accent1"/>
+          </a:effectRef>
+          <a:fontRef idx="minor">
+            <a:schemeClr val="lt1"/>
+          </a:fontRef>
+        </p:style>
+        <p:txBody>
+          <a:bodyPr rtlCol="0" anchor="ctr"/>
+          <a:lstStyle/>
+          <a:p>
+            <a:pPr algn="ctr"/>
+          </a:p>
+        </p:txBody>
+      </p:sp>
+      <p:sp>
+        <p:nvSpPr>
+          <p:cNvPr id="55" name="TextBox 54"/>
+          <p:cNvSpPr txBox="1"/>
+          <p:nvPr/>
+        </p:nvSpPr>
+        <p:spPr>
+          <a:xfrm>
+            <a:off x="8229600" y="2487168"/>
+            <a:ext cx="502920" cy="256032"/>
+          </a:xfrm>
+          <a:prstGeom prst="rect">
+            <a:avLst/>
+          </a:prstGeom>
+          <a:noFill/>
+        </p:spPr>
+        <p:txBody>
+          <a:bodyPr wrap="square">
+            <a:spAutoFit/>
+          </a:bodyPr>
+          <a:lstStyle/>
+          <a:p>
+            <a:pPr algn="ctr"/>
+            <a:r>
+              <a:rPr sz="800" b="1" i="0">
+                <a:solidFill>
+                  <a:srgbClr val="27AE60"/>
+                </a:solidFill>
+                <a:latin typeface="Segoe UI"/>
+              </a:rPr>
+              <a:t>1863</a:t>
+            </a:r>
+          </a:p>
+        </p:txBody>
+      </p:sp>
+      <p:sp>
+        <p:nvSpPr>
+          <p:cNvPr id="56" name="TextBox 55"/>
+          <p:cNvSpPr txBox="1"/>
+          <p:nvPr/>
+        </p:nvSpPr>
+        <p:spPr>
+          <a:xfrm>
+            <a:off x="8823960" y="2423160"/>
+            <a:ext cx="2926080" cy="658368"/>
+          </a:xfrm>
+          <a:prstGeom prst="rect">
+            <a:avLst/>
+          </a:prstGeom>
+          <a:noFill/>
+        </p:spPr>
+        <p:txBody>
+          <a:bodyPr wrap="square">
+            <a:spAutoFit/>
+          </a:bodyPr>
+          <a:lstStyle/>
+          <a:p>
+            <a:pPr algn="l"/>
+            <a:r>
+              <a:rPr sz="900" b="0" i="0">
+                <a:solidFill>
+                  <a:srgbClr val="FFFFFF"/>
+                </a:solidFill>
+                <a:latin typeface="Segoe UI"/>
+              </a:rPr>
+              <a:t>Fondation de la Croix-Rouge à Genève
+5 pays fondateurs — Comité International</a:t>
+            </a:r>
+          </a:p>
+        </p:txBody>
+      </p:sp>
+      <p:sp>
+        <p:nvSpPr>
+          <p:cNvPr id="57" name="Rectangle 56"/>
+          <p:cNvSpPr/>
+          <p:nvPr/>
+        </p:nvSpPr>
+        <p:spPr>
+          <a:xfrm>
+            <a:off x="8229600" y="3200400"/>
+            <a:ext cx="502920" cy="749808"/>
+          </a:xfrm>
+          <a:prstGeom prst="rect">
+            <a:avLst/>
+          </a:prstGeom>
+          <a:solidFill>
+            <a:srgbClr val="0A220A"/>
+          </a:solidFill>
+          <a:ln>
+            <a:noFill/>
+          </a:ln>
+        </p:spPr>
+        <p:style>
+          <a:lnRef idx="1">
+            <a:schemeClr val="accent1"/>
+          </a:lnRef>
+          <a:fillRef idx="3">
+            <a:schemeClr val="accent1"/>
+          </a:fillRef>
+          <a:effectRef idx="2">
+            <a:schemeClr val="accent1"/>
+          </a:effectRef>
+          <a:fontRef idx="minor">
+            <a:schemeClr val="lt1"/>
+          </a:fontRef>
+        </p:style>
+        <p:txBody>
+          <a:bodyPr rtlCol="0" anchor="ctr"/>
+          <a:lstStyle/>
+          <a:p>
+            <a:pPr algn="ctr"/>
+          </a:p>
+        </p:txBody>
+      </p:sp>
+      <p:sp>
+        <p:nvSpPr>
+          <p:cNvPr id="58" name="TextBox 57"/>
+          <p:cNvSpPr txBox="1"/>
+          <p:nvPr/>
+        </p:nvSpPr>
+        <p:spPr>
+          <a:xfrm>
+            <a:off x="8229600" y="3310128"/>
+            <a:ext cx="502920" cy="256032"/>
+          </a:xfrm>
+          <a:prstGeom prst="rect">
+            <a:avLst/>
+          </a:prstGeom>
+          <a:noFill/>
+        </p:spPr>
+        <p:txBody>
+          <a:bodyPr wrap="square">
+            <a:spAutoFit/>
+          </a:bodyPr>
+          <a:lstStyle/>
+          <a:p>
+            <a:pPr algn="ctr"/>
+            <a:r>
+              <a:rPr sz="800" b="1" i="0">
+                <a:solidFill>
+                  <a:srgbClr val="00AEEF"/>
+                </a:solidFill>
+                <a:latin typeface="Segoe UI"/>
+              </a:rPr>
+              <a:t>1864</a:t>
+            </a:r>
+          </a:p>
+        </p:txBody>
+      </p:sp>
+      <p:sp>
+        <p:nvSpPr>
+          <p:cNvPr id="59" name="TextBox 58"/>
+          <p:cNvSpPr txBox="1"/>
+          <p:nvPr/>
+        </p:nvSpPr>
+        <p:spPr>
+          <a:xfrm>
+            <a:off x="8823960" y="3246120"/>
+            <a:ext cx="2926080" cy="658368"/>
+          </a:xfrm>
+          <a:prstGeom prst="rect">
+            <a:avLst/>
+          </a:prstGeom>
+          <a:noFill/>
+        </p:spPr>
+        <p:txBody>
+          <a:bodyPr wrap="square">
+            <a:spAutoFit/>
+          </a:bodyPr>
+          <a:lstStyle/>
+          <a:p>
+            <a:pPr algn="l"/>
+            <a:r>
+              <a:rPr sz="900" b="0" i="0">
+                <a:solidFill>
+                  <a:srgbClr val="FFFFFF"/>
+                </a:solidFill>
+                <a:latin typeface="Segoe UI"/>
+              </a:rPr>
+              <a:t>Première Convention de Genève
+Droit humanitaire international — 12 États signataires</a:t>
+            </a:r>
+          </a:p>
+        </p:txBody>
+      </p:sp>
+      <p:sp>
+        <p:nvSpPr>
+          <p:cNvPr id="60" name="Rectangle 59"/>
+          <p:cNvSpPr/>
+          <p:nvPr/>
+        </p:nvSpPr>
+        <p:spPr>
+          <a:xfrm>
+            <a:off x="8229600" y="4023360"/>
+            <a:ext cx="502920" cy="749808"/>
+          </a:xfrm>
+          <a:prstGeom prst="rect">
+            <a:avLst/>
+          </a:prstGeom>
+          <a:solidFill>
+            <a:srgbClr val="0A220A"/>
+          </a:solidFill>
+          <a:ln>
+            <a:noFill/>
+          </a:ln>
+        </p:spPr>
+        <p:style>
+          <a:lnRef idx="1">
+            <a:schemeClr val="accent1"/>
+          </a:lnRef>
+          <a:fillRef idx="3">
+            <a:schemeClr val="accent1"/>
+          </a:fillRef>
+          <a:effectRef idx="2">
+            <a:schemeClr val="accent1"/>
+          </a:effectRef>
+          <a:fontRef idx="minor">
+            <a:schemeClr val="lt1"/>
+          </a:fontRef>
+        </p:style>
+        <p:txBody>
+          <a:bodyPr rtlCol="0" anchor="ctr"/>
+          <a:lstStyle/>
+          <a:p>
+            <a:pPr algn="ctr"/>
+          </a:p>
+        </p:txBody>
+      </p:sp>
+      <p:sp>
+        <p:nvSpPr>
+          <p:cNvPr id="61" name="TextBox 60"/>
+          <p:cNvSpPr txBox="1"/>
+          <p:nvPr/>
+        </p:nvSpPr>
+        <p:spPr>
+          <a:xfrm>
+            <a:off x="8229600" y="4133088"/>
+            <a:ext cx="502920" cy="256032"/>
+          </a:xfrm>
+          <a:prstGeom prst="rect">
+            <a:avLst/>
+          </a:prstGeom>
+          <a:noFill/>
+        </p:spPr>
+        <p:txBody>
+          <a:bodyPr wrap="square">
+            <a:spAutoFit/>
+          </a:bodyPr>
+          <a:lstStyle/>
+          <a:p>
+            <a:pPr algn="ctr"/>
+            <a:r>
+              <a:rPr sz="800" b="1" i="0">
+                <a:solidFill>
+                  <a:srgbClr val="FFFFFF"/>
+                </a:solidFill>
+                <a:latin typeface="Segoe UI"/>
+              </a:rPr>
+              <a:t>Drapeau</a:t>
+            </a:r>
+          </a:p>
+        </p:txBody>
+      </p:sp>
+      <p:sp>
+        <p:nvSpPr>
+          <p:cNvPr id="62" name="TextBox 61"/>
+          <p:cNvSpPr txBox="1"/>
+          <p:nvPr/>
+        </p:nvSpPr>
+        <p:spPr>
+          <a:xfrm>
+            <a:off x="8823960" y="4069080"/>
+            <a:ext cx="2926080" cy="658368"/>
+          </a:xfrm>
+          <a:prstGeom prst="rect">
+            <a:avLst/>
+          </a:prstGeom>
+          <a:noFill/>
+        </p:spPr>
+        <p:txBody>
+          <a:bodyPr wrap="square">
+            <a:spAutoFit/>
+          </a:bodyPr>
+          <a:lstStyle/>
+          <a:p>
+            <a:pPr algn="l"/>
+            <a:r>
+              <a:rPr sz="900" b="0" i="0">
+                <a:solidFill>
+                  <a:srgbClr val="FFFFFF"/>
+                </a:solidFill>
+                <a:latin typeface="Segoe UI"/>
+              </a:rPr>
+              <a:t>Drapeau suisse INVERSÉ
+🇨🇭 fond rouge → ✚ fond blanc
+En hommage à Dunant</a:t>
+            </a:r>
+          </a:p>
+        </p:txBody>
+      </p:sp>
+      <p:sp>
+        <p:nvSpPr>
+          <p:cNvPr id="63" name="Rectangle 62"/>
+          <p:cNvSpPr/>
+          <p:nvPr/>
+        </p:nvSpPr>
+        <p:spPr>
+          <a:xfrm>
+            <a:off x="8229600" y="4846320"/>
+            <a:ext cx="502920" cy="749808"/>
+          </a:xfrm>
+          <a:prstGeom prst="rect">
+            <a:avLst/>
+          </a:prstGeom>
+          <a:solidFill>
+            <a:srgbClr val="0A220A"/>
+          </a:solidFill>
+          <a:ln>
+            <a:noFill/>
+          </a:ln>
+        </p:spPr>
+        <p:style>
+          <a:lnRef idx="1">
+            <a:schemeClr val="accent1"/>
+          </a:lnRef>
+          <a:fillRef idx="3">
+            <a:schemeClr val="accent1"/>
+          </a:fillRef>
+          <a:effectRef idx="2">
+            <a:schemeClr val="accent1"/>
+          </a:effectRef>
+          <a:fontRef idx="minor">
+            <a:schemeClr val="lt1"/>
+          </a:fontRef>
+        </p:style>
+        <p:txBody>
+          <a:bodyPr rtlCol="0" anchor="ctr"/>
+          <a:lstStyle/>
+          <a:p>
+            <a:pPr algn="ctr"/>
+          </a:p>
+        </p:txBody>
+      </p:sp>
+      <p:sp>
+        <p:nvSpPr>
+          <p:cNvPr id="64" name="TextBox 63"/>
+          <p:cNvSpPr txBox="1"/>
+          <p:nvPr/>
+        </p:nvSpPr>
+        <p:spPr>
+          <a:xfrm>
+            <a:off x="8229600" y="4956048"/>
+            <a:ext cx="502920" cy="256032"/>
+          </a:xfrm>
+          <a:prstGeom prst="rect">
+            <a:avLst/>
+          </a:prstGeom>
+          <a:noFill/>
+        </p:spPr>
+        <p:txBody>
+          <a:bodyPr wrap="square">
+            <a:spAutoFit/>
+          </a:bodyPr>
+          <a:lstStyle/>
+          <a:p>
+            <a:pPr algn="ctr"/>
+            <a:r>
+              <a:rPr sz="800" b="1" i="0">
+                <a:solidFill>
+                  <a:srgbClr val="F7941D"/>
+                </a:solidFill>
+                <a:latin typeface="Segoe UI"/>
+              </a:rPr>
+              <a:t>1901</a:t>
+            </a:r>
+          </a:p>
+        </p:txBody>
+      </p:sp>
+      <p:sp>
+        <p:nvSpPr>
+          <p:cNvPr id="65" name="TextBox 64"/>
+          <p:cNvSpPr txBox="1"/>
+          <p:nvPr/>
+        </p:nvSpPr>
+        <p:spPr>
+          <a:xfrm>
+            <a:off x="8823960" y="4892040"/>
+            <a:ext cx="2926080" cy="658368"/>
+          </a:xfrm>
+          <a:prstGeom prst="rect">
+            <a:avLst/>
+          </a:prstGeom>
+          <a:noFill/>
+        </p:spPr>
+        <p:txBody>
+          <a:bodyPr wrap="square">
+            <a:spAutoFit/>
+          </a:bodyPr>
+          <a:lstStyle/>
+          <a:p>
+            <a:pPr algn="l"/>
+            <a:r>
+              <a:rPr sz="900" b="0" i="0">
+                <a:solidFill>
+                  <a:srgbClr val="FFFFFF"/>
+                </a:solidFill>
+                <a:latin typeface="Segoe UI"/>
+              </a:rPr>
+              <a:t>Nobel de la Paix — 1er prix jamais décerné
+Henry Dunant, 73 ans, mourait dans la pauvreté</a:t>
+            </a:r>
+          </a:p>
+        </p:txBody>
+      </p:sp>
+      <p:sp>
+        <p:nvSpPr>
+          <p:cNvPr id="66" name="Rectangle 65"/>
+          <p:cNvSpPr/>
+          <p:nvPr/>
+        </p:nvSpPr>
+        <p:spPr>
+          <a:xfrm>
+            <a:off x="274320" y="6053328"/>
+            <a:ext cx="11612880" cy="438912"/>
+          </a:xfrm>
+          <a:prstGeom prst="rect">
+            <a:avLst/>
+          </a:prstGeom>
+          <a:solidFill>
+            <a:srgbClr val="E74C3C"/>
+          </a:solidFill>
+          <a:ln>
+            <a:noFill/>
+          </a:ln>
+        </p:spPr>
+        <p:style>
+          <a:lnRef idx="1">
+            <a:schemeClr val="accent1"/>
+          </a:lnRef>
+          <a:fillRef idx="3">
+            <a:schemeClr val="accent1"/>
+          </a:fillRef>
+          <a:effectRef idx="2">
+            <a:schemeClr val="accent1"/>
+          </a:effectRef>
+          <a:fontRef idx="minor">
+            <a:schemeClr val="lt1"/>
+          </a:fontRef>
+        </p:style>
+        <p:txBody>
+          <a:bodyPr rtlCol="0" anchor="ctr"/>
+          <a:lstStyle/>
+          <a:p>
+            <a:pPr algn="ctr"/>
+          </a:p>
+        </p:txBody>
+      </p:sp>
+      <p:sp>
+        <p:nvSpPr>
+          <p:cNvPr id="67" name="TextBox 66"/>
+          <p:cNvSpPr txBox="1"/>
+          <p:nvPr/>
+        </p:nvSpPr>
+        <p:spPr>
+          <a:xfrm>
+            <a:off x="457200" y="6126480"/>
+            <a:ext cx="11247120" cy="292608"/>
+          </a:xfrm>
+          <a:prstGeom prst="rect">
+            <a:avLst/>
+          </a:prstGeom>
+          <a:noFill/>
+        </p:spPr>
+        <p:txBody>
+          <a:bodyPr wrap="square">
+            <a:spAutoFit/>
+          </a:bodyPr>
+          <a:lstStyle/>
+          <a:p>
+            <a:pPr algn="ctr"/>
+            <a:r>
+              <a:rPr sz="1000" b="1" i="0">
+                <a:solidFill>
+                  <a:srgbClr val="FFFFFF"/>
+                </a:solidFill>
+                <a:latin typeface="Segoe UI"/>
+              </a:rPr>
+              <a:t>LEÇON CLÉS : Un seul homme témoin d'une tragédie peut changer le droit international. La Croix-Rouge protège aujourd'hui 140+ millions de personnes dans 192 pays.</a:t>
+            </a:r>
+          </a:p>
+        </p:txBody>
+      </p:sp>
+    </p:spTree>
+  </p:cSld>
+  <p:clrMapOvr>
+    <a:masterClrMapping/>
+  </p:clrMapOvr>
+</p:sld>
+</file>
+
+<file path=ppt/slides/slide13.xml><?xml version="1.0" encoding="utf-8"?>
+<p:sld xmlns:a="http://schemas.openxmlformats.org/drawingml/2006/main" xmlns:p="http://schemas.openxmlformats.org/presentationml/2006/main" xmlns:r="http://schemas.openxmlformats.org/officeDocument/2006/relationships">
+  <p:cSld>
+    <p:spTree>
+      <p:nvGrpSpPr>
+        <p:cNvPr id="1" name=""/>
+        <p:cNvGrpSpPr/>
+        <p:nvPr/>
+      </p:nvGrpSpPr>
+      <p:grpSpPr/>
+      <p:sp>
+        <p:nvSpPr>
+          <p:cNvPr id="2" name="Rectangle 1"/>
+          <p:cNvSpPr/>
+          <p:nvPr/>
+        </p:nvSpPr>
+        <p:spPr>
+          <a:xfrm>
+            <a:off x="0" y="0"/>
+            <a:ext cx="12188952" cy="1234440"/>
+          </a:xfrm>
+          <a:prstGeom prst="rect">
+            <a:avLst/>
+          </a:prstGeom>
+          <a:solidFill>
+            <a:srgbClr val="003087"/>
+          </a:solidFill>
+          <a:ln>
+            <a:noFill/>
+          </a:ln>
+        </p:spPr>
+        <p:style>
+          <a:lnRef idx="1">
+            <a:schemeClr val="accent1"/>
+          </a:lnRef>
+          <a:fillRef idx="3">
+            <a:schemeClr val="accent1"/>
+          </a:fillRef>
+          <a:effectRef idx="2">
+            <a:schemeClr val="accent1"/>
+          </a:effectRef>
+          <a:fontRef idx="minor">
+            <a:schemeClr val="lt1"/>
+          </a:fontRef>
+        </p:style>
+        <p:txBody>
+          <a:bodyPr rtlCol="0" anchor="ctr"/>
+          <a:lstStyle/>
+          <a:p>
+            <a:pPr algn="ctr"/>
+          </a:p>
+        </p:txBody>
+      </p:sp>
+      <p:sp>
+        <p:nvSpPr>
+          <p:cNvPr id="3" name="Rectangle 2"/>
+          <p:cNvSpPr/>
+          <p:nvPr/>
+        </p:nvSpPr>
+        <p:spPr>
+          <a:xfrm>
+            <a:off x="0" y="0"/>
+            <a:ext cx="12188952" cy="54864"/>
+          </a:xfrm>
+          <a:prstGeom prst="rect">
+            <a:avLst/>
+          </a:prstGeom>
+          <a:solidFill>
+            <a:srgbClr val="0D9488"/>
+          </a:solidFill>
+          <a:ln>
+            <a:noFill/>
+          </a:ln>
+        </p:spPr>
+        <p:style>
+          <a:lnRef idx="1">
+            <a:schemeClr val="accent1"/>
+          </a:lnRef>
+          <a:fillRef idx="3">
+            <a:schemeClr val="accent1"/>
+          </a:fillRef>
+          <a:effectRef idx="2">
+            <a:schemeClr val="accent1"/>
+          </a:effectRef>
+          <a:fontRef idx="minor">
+            <a:schemeClr val="lt1"/>
+          </a:fontRef>
+        </p:style>
+        <p:txBody>
+          <a:bodyPr rtlCol="0" anchor="ctr"/>
+          <a:lstStyle/>
+          <a:p>
+            <a:pPr algn="ctr"/>
+          </a:p>
+        </p:txBody>
+      </p:sp>
+      <p:sp>
+        <p:nvSpPr>
+          <p:cNvPr id="4" name="TextBox 3"/>
+          <p:cNvSpPr txBox="1"/>
+          <p:nvPr/>
+        </p:nvSpPr>
+        <p:spPr>
+          <a:xfrm>
+            <a:off x="365760" y="91440"/>
+            <a:ext cx="11430000" cy="530352"/>
+          </a:xfrm>
+          <a:prstGeom prst="rect">
+            <a:avLst/>
+          </a:prstGeom>
+          <a:noFill/>
+        </p:spPr>
+        <p:txBody>
+          <a:bodyPr wrap="square">
+            <a:spAutoFit/>
+          </a:bodyPr>
+          <a:lstStyle/>
+          <a:p>
+            <a:pPr algn="l"/>
+            <a:r>
+              <a:rPr sz="2200" b="1" i="0">
+                <a:solidFill>
+                  <a:srgbClr val="FFFFFF"/>
+                </a:solidFill>
+                <a:latin typeface="Segoe UI"/>
+              </a:rPr>
+              <a:t>→  ACTEURS CLÉS &amp; CONTRÔLE DU SECTEUR</a:t>
+            </a:r>
+          </a:p>
+        </p:txBody>
+      </p:sp>
+      <p:sp>
+        <p:nvSpPr>
+          <p:cNvPr id="5" name="TextBox 4"/>
+          <p:cNvSpPr txBox="1"/>
+          <p:nvPr/>
+        </p:nvSpPr>
+        <p:spPr>
+          <a:xfrm>
+            <a:off x="365760" y="658368"/>
+            <a:ext cx="11430000" cy="402336"/>
+          </a:xfrm>
+          <a:prstGeom prst="rect">
+            <a:avLst/>
+          </a:prstGeom>
+          <a:noFill/>
+        </p:spPr>
+        <p:txBody>
+          <a:bodyPr wrap="square">
+            <a:spAutoFit/>
+          </a:bodyPr>
+          <a:lstStyle/>
+          <a:p>
+            <a:pPr algn="l"/>
+            <a:r>
+              <a:rPr sz="1200" b="0" i="1">
+                <a:solidFill>
+                  <a:srgbClr val="00AEEF"/>
+                </a:solidFill>
+                <a:latin typeface="Segoe UI"/>
+              </a:rPr>
+              <a:t>Le Comité de la Charte, le CICR et l'engagement exclusif de Fidelis</a:t>
+            </a:r>
+          </a:p>
+        </p:txBody>
+      </p:sp>
+      <p:sp>
+        <p:nvSpPr>
+          <p:cNvPr id="6" name="Rectangle 5"/>
+          <p:cNvSpPr/>
+          <p:nvPr/>
+        </p:nvSpPr>
+        <p:spPr>
+          <a:xfrm>
+            <a:off x="0" y="6492240"/>
+            <a:ext cx="12188952" cy="365760"/>
+          </a:xfrm>
+          <a:prstGeom prst="rect">
+            <a:avLst/>
+          </a:prstGeom>
+          <a:solidFill>
+            <a:srgbClr val="003087"/>
+          </a:solidFill>
+          <a:ln>
+            <a:noFill/>
+          </a:ln>
+        </p:spPr>
+        <p:style>
+          <a:lnRef idx="1">
+            <a:schemeClr val="accent1"/>
+          </a:lnRef>
+          <a:fillRef idx="3">
+            <a:schemeClr val="accent1"/>
+          </a:fillRef>
+          <a:effectRef idx="2">
+            <a:schemeClr val="accent1"/>
+          </a:effectRef>
+          <a:fontRef idx="minor">
+            <a:schemeClr val="lt1"/>
+          </a:fontRef>
+        </p:style>
+        <p:txBody>
+          <a:bodyPr rtlCol="0" anchor="ctr"/>
+          <a:lstStyle/>
+          <a:p>
+            <a:pPr algn="ctr"/>
+          </a:p>
+        </p:txBody>
+      </p:sp>
+      <p:sp>
+        <p:nvSpPr>
+          <p:cNvPr id="7" name="TextBox 6"/>
+          <p:cNvSpPr txBox="1"/>
+          <p:nvPr/>
+        </p:nvSpPr>
+        <p:spPr>
+          <a:xfrm>
+            <a:off x="274320" y="6510528"/>
+            <a:ext cx="11640312" cy="310896"/>
+          </a:xfrm>
+          <a:prstGeom prst="rect">
+            <a:avLst/>
+          </a:prstGeom>
+          <a:noFill/>
+        </p:spPr>
+        <p:txBody>
+          <a:bodyPr wrap="square">
+            <a:spAutoFit/>
+          </a:bodyPr>
+          <a:lstStyle/>
+          <a:p>
+            <a:pPr algn="ctr"/>
+            <a:r>
+              <a:rPr sz="900" b="0" i="0">
+                <a:solidFill>
+                  <a:srgbClr val="AABBDD"/>
+                </a:solidFill>
+                <a:latin typeface="Segoe UI"/>
+              </a:rPr>
+              <a:t>J2 FIM — Matinée  |  Fidelis × SHY Performance  |  Le Monde Associatif &amp; Humanitaire</a:t>
+            </a:r>
+          </a:p>
+        </p:txBody>
+      </p:sp>
+      <p:sp>
+        <p:nvSpPr>
+          <p:cNvPr id="8" name="Rectangle 7"/>
+          <p:cNvSpPr/>
+          <p:nvPr/>
+        </p:nvSpPr>
+        <p:spPr>
+          <a:xfrm>
+            <a:off x="320040" y="1371600"/>
+            <a:ext cx="5394960" cy="2331720"/>
+          </a:xfrm>
+          <a:prstGeom prst="rect">
+            <a:avLst/>
+          </a:prstGeom>
+          <a:solidFill>
+            <a:srgbClr val="E8F0FB"/>
+          </a:solidFill>
+          <a:ln w="19050">
+            <a:solidFill>
+              <a:srgbClr val="0057B8"/>
+            </a:solidFill>
+          </a:ln>
+        </p:spPr>
+        <p:style>
+          <a:lnRef idx="1">
+            <a:schemeClr val="accent1"/>
+          </a:lnRef>
+          <a:fillRef idx="3">
+            <a:schemeClr val="accent1"/>
+          </a:fillRef>
+          <a:effectRef idx="2">
+            <a:schemeClr val="accent1"/>
+          </a:effectRef>
+          <a:fontRef idx="minor">
+            <a:schemeClr val="lt1"/>
+          </a:fontRef>
+        </p:style>
+        <p:txBody>
+          <a:bodyPr rtlCol="0" anchor="ctr"/>
+          <a:lstStyle/>
+          <a:p>
+            <a:pPr algn="ctr"/>
+          </a:p>
+        </p:txBody>
+      </p:sp>
+      <p:sp>
+        <p:nvSpPr>
+          <p:cNvPr id="9" name="Rectangle 8"/>
+          <p:cNvSpPr/>
+          <p:nvPr/>
+        </p:nvSpPr>
+        <p:spPr>
+          <a:xfrm>
+            <a:off x="320040" y="1371600"/>
+            <a:ext cx="5394960" cy="45720"/>
+          </a:xfrm>
+          <a:prstGeom prst="rect">
+            <a:avLst/>
+          </a:prstGeom>
+          <a:solidFill>
+            <a:srgbClr val="0057B8"/>
+          </a:solidFill>
+          <a:ln>
+            <a:noFill/>
+          </a:ln>
+        </p:spPr>
+        <p:style>
+          <a:lnRef idx="1">
+            <a:schemeClr val="accent1"/>
+          </a:lnRef>
+          <a:fillRef idx="3">
+            <a:schemeClr val="accent1"/>
+          </a:fillRef>
+          <a:effectRef idx="2">
+            <a:schemeClr val="accent1"/>
+          </a:effectRef>
+          <a:fontRef idx="minor">
+            <a:schemeClr val="lt1"/>
+          </a:fontRef>
+        </p:style>
+        <p:txBody>
+          <a:bodyPr rtlCol="0" anchor="ctr"/>
+          <a:lstStyle/>
+          <a:p>
+            <a:pPr algn="ctr"/>
+          </a:p>
+        </p:txBody>
+      </p:sp>
+      <p:sp>
+        <p:nvSpPr>
+          <p:cNvPr id="10" name="TextBox 9"/>
+          <p:cNvSpPr txBox="1"/>
+          <p:nvPr/>
+        </p:nvSpPr>
+        <p:spPr>
+          <a:xfrm>
+            <a:off x="502920" y="1481328"/>
+            <a:ext cx="5029200" cy="274320"/>
+          </a:xfrm>
+          <a:prstGeom prst="rect">
+            <a:avLst/>
+          </a:prstGeom>
+          <a:noFill/>
+        </p:spPr>
+        <p:txBody>
+          <a:bodyPr wrap="square">
+            <a:spAutoFit/>
+          </a:bodyPr>
+          <a:lstStyle/>
+          <a:p>
+            <a:pPr algn="l"/>
+            <a:r>
+              <a:rPr sz="1200" b="1" i="0">
+                <a:solidFill>
+                  <a:srgbClr val="003087"/>
+                </a:solidFill>
+                <a:latin typeface="Segoe UI"/>
+              </a:rPr>
+              <a:t>🏛  COMITÉ DE LA CHARTE DU DON EN CONFIANCE</a:t>
+            </a:r>
+          </a:p>
+        </p:txBody>
+      </p:sp>
+      <p:sp>
+        <p:nvSpPr>
+          <p:cNvPr id="11" name="TextBox 10"/>
+          <p:cNvSpPr txBox="1"/>
+          <p:nvPr/>
+        </p:nvSpPr>
+        <p:spPr>
+          <a:xfrm>
+            <a:off x="502920" y="1828800"/>
+            <a:ext cx="5029200" cy="1691640"/>
+          </a:xfrm>
+          <a:prstGeom prst="rect">
+            <a:avLst/>
+          </a:prstGeom>
+          <a:noFill/>
+        </p:spPr>
+        <p:txBody>
+          <a:bodyPr wrap="square">
+            <a:spAutoFit/>
+          </a:bodyPr>
+          <a:lstStyle/>
+          <a:p>
+            <a:pPr algn="l"/>
+            <a:r>
+              <a:rPr sz="1000" b="0" i="0">
+                <a:solidFill>
+                  <a:srgbClr val="555555"/>
+                </a:solidFill>
+                <a:latin typeface="Segoe UI"/>
+              </a:rPr>
+              <a:t>Créé en 1989, renforcé après l'Affaire ARC en 1996.
+Mission : renforcer le contrôle de l'État sur les associations collectant des dons. Audit obligatoire des comptes, publication annuelle, transparence totale sur l'utilisation des fonds.
+Label « Don en Confiance » : garantie pour le donateur que l'association est sérieuse et contrôlée. UNICEF France en est membre — c'est votre argument de légitimité.</a:t>
+            </a:r>
+          </a:p>
+        </p:txBody>
+      </p:sp>
+      <p:sp>
+        <p:nvSpPr>
+          <p:cNvPr id="12" name="Rectangle 11"/>
+          <p:cNvSpPr/>
+          <p:nvPr/>
+        </p:nvSpPr>
+        <p:spPr>
+          <a:xfrm>
+            <a:off x="5989320" y="1371600"/>
+            <a:ext cx="5852160" cy="2331720"/>
+          </a:xfrm>
+          <a:prstGeom prst="rect">
+            <a:avLst/>
+          </a:prstGeom>
+          <a:solidFill>
+            <a:srgbClr val="FDF0EF"/>
+          </a:solidFill>
+          <a:ln w="19050">
+            <a:solidFill>
+              <a:srgbClr val="E74C3C"/>
+            </a:solidFill>
+          </a:ln>
+        </p:spPr>
+        <p:style>
+          <a:lnRef idx="1">
+            <a:schemeClr val="accent1"/>
+          </a:lnRef>
+          <a:fillRef idx="3">
+            <a:schemeClr val="accent1"/>
+          </a:fillRef>
+          <a:effectRef idx="2">
+            <a:schemeClr val="accent1"/>
+          </a:effectRef>
+          <a:fontRef idx="minor">
+            <a:schemeClr val="lt1"/>
+          </a:fontRef>
+        </p:style>
+        <p:txBody>
+          <a:bodyPr rtlCol="0" anchor="ctr"/>
+          <a:lstStyle/>
+          <a:p>
+            <a:pPr algn="ctr"/>
+          </a:p>
+        </p:txBody>
+      </p:sp>
+      <p:sp>
+        <p:nvSpPr>
+          <p:cNvPr id="13" name="Rectangle 12"/>
+          <p:cNvSpPr/>
+          <p:nvPr/>
+        </p:nvSpPr>
+        <p:spPr>
+          <a:xfrm>
+            <a:off x="5989320" y="1371600"/>
+            <a:ext cx="5852160" cy="45720"/>
+          </a:xfrm>
+          <a:prstGeom prst="rect">
+            <a:avLst/>
+          </a:prstGeom>
+          <a:solidFill>
+            <a:srgbClr val="E74C3C"/>
+          </a:solidFill>
+          <a:ln>
+            <a:noFill/>
+          </a:ln>
+        </p:spPr>
+        <p:style>
+          <a:lnRef idx="1">
+            <a:schemeClr val="accent1"/>
+          </a:lnRef>
+          <a:fillRef idx="3">
+            <a:schemeClr val="accent1"/>
+          </a:fillRef>
+          <a:effectRef idx="2">
+            <a:schemeClr val="accent1"/>
+          </a:effectRef>
+          <a:fontRef idx="minor">
+            <a:schemeClr val="lt1"/>
+          </a:fontRef>
+        </p:style>
+        <p:txBody>
+          <a:bodyPr rtlCol="0" anchor="ctr"/>
+          <a:lstStyle/>
+          <a:p>
+            <a:pPr algn="ctr"/>
+          </a:p>
+        </p:txBody>
+      </p:sp>
+      <p:sp>
+        <p:nvSpPr>
+          <p:cNvPr id="14" name="TextBox 13"/>
+          <p:cNvSpPr txBox="1"/>
+          <p:nvPr/>
+        </p:nvSpPr>
+        <p:spPr>
+          <a:xfrm>
+            <a:off x="6172200" y="1481328"/>
+            <a:ext cx="5486400" cy="274320"/>
+          </a:xfrm>
+          <a:prstGeom prst="rect">
+            <a:avLst/>
+          </a:prstGeom>
+          <a:noFill/>
+        </p:spPr>
+        <p:txBody>
+          <a:bodyPr wrap="square">
+            <a:spAutoFit/>
+          </a:bodyPr>
+          <a:lstStyle/>
+          <a:p>
+            <a:pPr algn="l"/>
+            <a:r>
+              <a:rPr sz="1200" b="1" i="0">
+                <a:solidFill>
+                  <a:srgbClr val="E74C3C"/>
+                </a:solidFill>
+                <a:latin typeface="Segoe UI"/>
+              </a:rPr>
+              <a:t>✚  CICR — COMITÉ INTERNATIONAL DE LA CROIX-ROUGE</a:t>
+            </a:r>
+          </a:p>
+        </p:txBody>
+      </p:sp>
+      <p:sp>
+        <p:nvSpPr>
+          <p:cNvPr id="15" name="TextBox 14"/>
+          <p:cNvSpPr txBox="1"/>
+          <p:nvPr/>
+        </p:nvSpPr>
+        <p:spPr>
+          <a:xfrm>
+            <a:off x="6172200" y="1828800"/>
+            <a:ext cx="5486400" cy="1691640"/>
+          </a:xfrm>
+          <a:prstGeom prst="rect">
+            <a:avLst/>
+          </a:prstGeom>
+          <a:noFill/>
+        </p:spPr>
+        <p:txBody>
+          <a:bodyPr wrap="square">
+            <a:spAutoFit/>
+          </a:bodyPr>
+          <a:lstStyle/>
+          <a:p>
+            <a:pPr algn="l"/>
+            <a:r>
+              <a:rPr sz="1000" b="0" i="0">
+                <a:solidFill>
+                  <a:srgbClr val="555555"/>
+                </a:solidFill>
+                <a:latin typeface="Segoe UI"/>
+              </a:rPr>
+              <a:t>Fondé en 1863 à Genève par Henry Dunant — organisation distincte de la Croix-Rouge nationale.
+Rôle spécifique : agit EXCLUSIVEMENT en zones de CONFLIT armé.
+• Protection des prisonniers de guerre (Conventions de Genève)
+• Échanges d'otages et visites de détenus
+• Aide humanitaire aux civils en zones de guerre
+• 192 pays — 20 000 collaborateurs sur le terrain</a:t>
+            </a:r>
+          </a:p>
+        </p:txBody>
+      </p:sp>
+      <p:sp>
+        <p:nvSpPr>
+          <p:cNvPr id="16" name="Rectangle 15"/>
+          <p:cNvSpPr/>
+          <p:nvPr/>
+        </p:nvSpPr>
+        <p:spPr>
+          <a:xfrm>
+            <a:off x="320040" y="3840480"/>
+            <a:ext cx="11521440" cy="1325880"/>
+          </a:xfrm>
+          <a:prstGeom prst="rect">
+            <a:avLst/>
+          </a:prstGeom>
+          <a:solidFill>
+            <a:srgbClr val="0A1628"/>
+          </a:solidFill>
+          <a:ln w="19050">
+            <a:solidFill>
+              <a:srgbClr val="F7941D"/>
+            </a:solidFill>
+          </a:ln>
+        </p:spPr>
+        <p:style>
+          <a:lnRef idx="1">
+            <a:schemeClr val="accent1"/>
+          </a:lnRef>
+          <a:fillRef idx="3">
+            <a:schemeClr val="accent1"/>
+          </a:fillRef>
+          <a:effectRef idx="2">
+            <a:schemeClr val="accent1"/>
+          </a:effectRef>
+          <a:fontRef idx="minor">
+            <a:schemeClr val="lt1"/>
+          </a:fontRef>
+        </p:style>
+        <p:txBody>
+          <a:bodyPr rtlCol="0" anchor="ctr"/>
+          <a:lstStyle/>
+          <a:p>
+            <a:pPr algn="ctr"/>
+          </a:p>
+        </p:txBody>
+      </p:sp>
+      <p:sp>
+        <p:nvSpPr>
+          <p:cNvPr id="17" name="Rectangle 16"/>
+          <p:cNvSpPr/>
+          <p:nvPr/>
+        </p:nvSpPr>
+        <p:spPr>
+          <a:xfrm>
+            <a:off x="320040" y="3840480"/>
+            <a:ext cx="11521440" cy="45720"/>
+          </a:xfrm>
+          <a:prstGeom prst="rect">
+            <a:avLst/>
+          </a:prstGeom>
+          <a:solidFill>
+            <a:srgbClr val="F7941D"/>
+          </a:solidFill>
+          <a:ln>
+            <a:noFill/>
+          </a:ln>
+        </p:spPr>
+        <p:style>
+          <a:lnRef idx="1">
+            <a:schemeClr val="accent1"/>
+          </a:lnRef>
+          <a:fillRef idx="3">
+            <a:schemeClr val="accent1"/>
+          </a:fillRef>
+          <a:effectRef idx="2">
+            <a:schemeClr val="accent1"/>
+          </a:effectRef>
+          <a:fontRef idx="minor">
+            <a:schemeClr val="lt1"/>
+          </a:fontRef>
+        </p:style>
+        <p:txBody>
+          <a:bodyPr rtlCol="0" anchor="ctr"/>
+          <a:lstStyle/>
+          <a:p>
+            <a:pPr algn="ctr"/>
+          </a:p>
+        </p:txBody>
+      </p:sp>
+      <p:sp>
+        <p:nvSpPr>
+          <p:cNvPr id="18" name="TextBox 17"/>
+          <p:cNvSpPr txBox="1"/>
+          <p:nvPr/>
+        </p:nvSpPr>
+        <p:spPr>
+          <a:xfrm>
+            <a:off x="548640" y="3950208"/>
+            <a:ext cx="10972800" cy="274320"/>
+          </a:xfrm>
+          <a:prstGeom prst="rect">
+            <a:avLst/>
+          </a:prstGeom>
+          <a:noFill/>
+        </p:spPr>
+        <p:txBody>
+          <a:bodyPr wrap="square">
+            <a:spAutoFit/>
+          </a:bodyPr>
+          <a:lstStyle/>
+          <a:p>
+            <a:pPr algn="l"/>
+            <a:r>
+              <a:rPr sz="1300" b="1" i="0">
+                <a:solidFill>
+                  <a:srgbClr val="F7941D"/>
+                </a:solidFill>
+                <a:latin typeface="Segoe UI"/>
+              </a:rPr>
+              <a:t>FIDELIS — ENGAGEMENT EXCLUSIF ASSOCIATIONS RECONNUES D'UTILITÉ PUBLIQUE (RUP)</a:t>
+            </a:r>
+          </a:p>
+        </p:txBody>
+      </p:sp>
+      <p:sp>
+        <p:nvSpPr>
+          <p:cNvPr id="19" name="TextBox 18"/>
+          <p:cNvSpPr txBox="1"/>
+          <p:nvPr/>
+        </p:nvSpPr>
+        <p:spPr>
+          <a:xfrm>
+            <a:off x="548640" y="4297680"/>
+            <a:ext cx="10972800" cy="749808"/>
+          </a:xfrm>
+          <a:prstGeom prst="rect">
+            <a:avLst/>
+          </a:prstGeom>
+          <a:noFill/>
+        </p:spPr>
+        <p:txBody>
+          <a:bodyPr wrap="square">
+            <a:spAutoFit/>
+          </a:bodyPr>
+          <a:lstStyle/>
+          <a:p>
+            <a:pPr algn="l"/>
+            <a:r>
+              <a:rPr sz="1100" b="0" i="0">
+                <a:solidFill>
+                  <a:srgbClr val="FFFFFF"/>
+                </a:solidFill>
+                <a:latin typeface="Segoe UI"/>
+              </a:rPr>
+              <a:t>Fidelis travaille EXCLUSIVEMENT avec des associations Reconnues d'Utilité Publique (RUP) par décret d'État. Cela garantit : contrôle de l'État renforcé, comptes certifiés, mission d'intérêt général prouvée. Pour le fundraiser : votre démarche est 100% légitime — vous représentez des causes auditées, transparentes, reconnues.</a:t>
+            </a:r>
+          </a:p>
+        </p:txBody>
+      </p:sp>
+      <p:sp>
+        <p:nvSpPr>
+          <p:cNvPr id="20" name="Rectangle 19"/>
+          <p:cNvSpPr/>
+          <p:nvPr/>
+        </p:nvSpPr>
+        <p:spPr>
+          <a:xfrm>
+            <a:off x="320040" y="5321808"/>
+            <a:ext cx="11521440" cy="1170432"/>
+          </a:xfrm>
+          <a:prstGeom prst="rect">
+            <a:avLst/>
+          </a:prstGeom>
+          <a:solidFill>
+            <a:srgbClr val="FEFDE8"/>
+          </a:solidFill>
+          <a:ln w="19050">
+            <a:solidFill>
+              <a:srgbClr val="F1C40F"/>
+            </a:solidFill>
+          </a:ln>
+        </p:spPr>
+        <p:style>
+          <a:lnRef idx="1">
+            <a:schemeClr val="accent1"/>
+          </a:lnRef>
+          <a:fillRef idx="3">
+            <a:schemeClr val="accent1"/>
+          </a:fillRef>
+          <a:effectRef idx="2">
+            <a:schemeClr val="accent1"/>
+          </a:effectRef>
+          <a:fontRef idx="minor">
+            <a:schemeClr val="lt1"/>
+          </a:fontRef>
+        </p:style>
+        <p:txBody>
+          <a:bodyPr rtlCol="0" anchor="ctr"/>
+          <a:lstStyle/>
+          <a:p>
+            <a:pPr algn="ctr"/>
+          </a:p>
+        </p:txBody>
+      </p:sp>
+      <p:sp>
+        <p:nvSpPr>
+          <p:cNvPr id="21" name="Rectangle 20"/>
+          <p:cNvSpPr/>
+          <p:nvPr/>
+        </p:nvSpPr>
+        <p:spPr>
+          <a:xfrm>
+            <a:off x="320040" y="5321808"/>
+            <a:ext cx="11521440" cy="36576"/>
+          </a:xfrm>
+          <a:prstGeom prst="rect">
+            <a:avLst/>
+          </a:prstGeom>
+          <a:solidFill>
+            <a:srgbClr val="F1C40F"/>
+          </a:solidFill>
+          <a:ln>
+            <a:noFill/>
+          </a:ln>
+        </p:spPr>
+        <p:style>
+          <a:lnRef idx="1">
+            <a:schemeClr val="accent1"/>
+          </a:lnRef>
+          <a:fillRef idx="3">
+            <a:schemeClr val="accent1"/>
+          </a:fillRef>
+          <a:effectRef idx="2">
+            <a:schemeClr val="accent1"/>
+          </a:effectRef>
+          <a:fontRef idx="minor">
+            <a:schemeClr val="lt1"/>
+          </a:fontRef>
+        </p:style>
+        <p:txBody>
+          <a:bodyPr rtlCol="0" anchor="ctr"/>
+          <a:lstStyle/>
+          <a:p>
+            <a:pPr algn="ctr"/>
+          </a:p>
+        </p:txBody>
+      </p:sp>
+      <p:sp>
+        <p:nvSpPr>
+          <p:cNvPr id="22" name="TextBox 21"/>
+          <p:cNvSpPr txBox="1"/>
+          <p:nvPr/>
+        </p:nvSpPr>
+        <p:spPr>
+          <a:xfrm>
+            <a:off x="548640" y="5413248"/>
+            <a:ext cx="10972800" cy="274320"/>
+          </a:xfrm>
+          <a:prstGeom prst="rect">
+            <a:avLst/>
+          </a:prstGeom>
+          <a:noFill/>
+        </p:spPr>
+        <p:txBody>
+          <a:bodyPr wrap="square">
+            <a:spAutoFit/>
+          </a:bodyPr>
+          <a:lstStyle/>
+          <a:p>
+            <a:pPr algn="l"/>
+            <a:r>
+              <a:rPr sz="1100" b="1" i="0">
+                <a:solidFill>
+                  <a:srgbClr val="003087"/>
+                </a:solidFill>
+                <a:latin typeface="Segoe UI"/>
+              </a:rPr>
+              <a:t>⚡  PARTICULIERS &amp; PROFESSIONNELS — RÈGLE FONDAMENTALE</a:t>
+            </a:r>
+          </a:p>
+        </p:txBody>
+      </p:sp>
+      <p:sp>
+        <p:nvSpPr>
+          <p:cNvPr id="23" name="TextBox 22"/>
+          <p:cNvSpPr txBox="1"/>
+          <p:nvPr/>
+        </p:nvSpPr>
+        <p:spPr>
+          <a:xfrm>
+            <a:off x="548640" y="5760720"/>
+            <a:ext cx="10972800" cy="658368"/>
+          </a:xfrm>
+          <a:prstGeom prst="rect">
+            <a:avLst/>
+          </a:prstGeom>
+          <a:noFill/>
+        </p:spPr>
+        <p:txBody>
+          <a:bodyPr wrap="square">
+            <a:spAutoFit/>
+          </a:bodyPr>
+          <a:lstStyle/>
+          <a:p>
+            <a:pPr algn="l"/>
+            <a:r>
+              <a:rPr sz="1000" b="0" i="0">
+                <a:solidFill>
+                  <a:srgbClr val="555555"/>
+                </a:solidFill>
+                <a:latin typeface="Segoe UI"/>
+              </a:rPr>
+              <a:t>Lors de vos appels, vous pouvez tomber sur un PARTICULIER ou un PROFESSIONNEL (entreprise, cabinet, commerce). Les dons se font UNIQUEMENT par des particuliers — jamais au nom d'une entreprise. Si vous atteignez un professionnel : restez courtois, demandez si vous pouvez rappeler sur un numéro personnel. Ne qualifiez PAS une fiche professionnel comme refus — qualifiez : Absent / Rappel.</a:t>
+            </a:r>
+          </a:p>
+        </p:txBody>
+      </p:sp>
+    </p:spTree>
+  </p:cSld>
+  <p:clrMapOvr>
+    <a:masterClrMapping/>
+  </p:clrMapOvr>
+</p:sld>
+</file>
+
+<file path=ppt/slides/slide14.xml><?xml version="1.0" encoding="utf-8"?>
+<p:sld xmlns:a="http://schemas.openxmlformats.org/drawingml/2006/main" xmlns:p="http://schemas.openxmlformats.org/presentationml/2006/main" xmlns:r="http://schemas.openxmlformats.org/officeDocument/2006/relationships">
+  <p:cSld>
+    <p:spTree>
+      <p:nvGrpSpPr>
+        <p:cNvPr id="1" name=""/>
+        <p:cNvGrpSpPr/>
+        <p:nvPr/>
+      </p:nvGrpSpPr>
+      <p:grpSpPr/>
+      <p:sp>
+        <p:nvSpPr>
+          <p:cNvPr id="2" name="Rectangle 1"/>
+          <p:cNvSpPr/>
+          <p:nvPr/>
+        </p:nvSpPr>
+        <p:spPr>
+          <a:xfrm>
+            <a:off x="0" y="0"/>
+            <a:ext cx="12188952" cy="6858000"/>
+          </a:xfrm>
+          <a:prstGeom prst="rect">
+            <a:avLst/>
+          </a:prstGeom>
+          <a:solidFill>
+            <a:srgbClr val="FFFFFF"/>
+          </a:solidFill>
+          <a:ln>
+            <a:noFill/>
+          </a:ln>
+        </p:spPr>
+        <p:style>
+          <a:lnRef idx="1">
+            <a:schemeClr val="accent1"/>
+          </a:lnRef>
+          <a:fillRef idx="3">
+            <a:schemeClr val="accent1"/>
+          </a:fillRef>
+          <a:effectRef idx="2">
+            <a:schemeClr val="accent1"/>
+          </a:effectRef>
+          <a:fontRef idx="minor">
+            <a:schemeClr val="lt1"/>
+          </a:fontRef>
+        </p:style>
+        <p:txBody>
+          <a:bodyPr rtlCol="0" anchor="ctr"/>
+          <a:lstStyle/>
+          <a:p>
+            <a:pPr algn="ctr"/>
+          </a:p>
+        </p:txBody>
+      </p:sp>
+      <p:sp>
+        <p:nvSpPr>
+          <p:cNvPr id="3" name="Rectangle 2"/>
+          <p:cNvSpPr/>
+          <p:nvPr/>
+        </p:nvSpPr>
+        <p:spPr>
+          <a:xfrm>
+            <a:off x="0" y="0"/>
+            <a:ext cx="12188952" cy="1234440"/>
+          </a:xfrm>
+          <a:prstGeom prst="rect">
+            <a:avLst/>
+          </a:prstGeom>
+          <a:solidFill>
+            <a:srgbClr val="E74C3C"/>
+          </a:solidFill>
+          <a:ln>
+            <a:noFill/>
+          </a:ln>
+        </p:spPr>
+        <p:style>
+          <a:lnRef idx="1">
+            <a:schemeClr val="accent1"/>
+          </a:lnRef>
+          <a:fillRef idx="3">
+            <a:schemeClr val="accent1"/>
+          </a:fillRef>
+          <a:effectRef idx="2">
+            <a:schemeClr val="accent1"/>
+          </a:effectRef>
+          <a:fontRef idx="minor">
+            <a:schemeClr val="lt1"/>
+          </a:fontRef>
+        </p:style>
+        <p:txBody>
+          <a:bodyPr rtlCol="0" anchor="ctr"/>
+          <a:lstStyle/>
+          <a:p>
+            <a:pPr algn="ctr"/>
+          </a:p>
+        </p:txBody>
+      </p:sp>
+      <p:sp>
+        <p:nvSpPr>
+          <p:cNvPr id="4" name="Rectangle 3"/>
+          <p:cNvSpPr/>
+          <p:nvPr/>
+        </p:nvSpPr>
+        <p:spPr>
+          <a:xfrm>
+            <a:off x="0" y="0"/>
+            <a:ext cx="12188952" cy="54864"/>
+          </a:xfrm>
+          <a:prstGeom prst="rect">
+            <a:avLst/>
+          </a:prstGeom>
+          <a:solidFill>
+            <a:srgbClr val="F7941D"/>
+          </a:solidFill>
+          <a:ln>
+            <a:noFill/>
+          </a:ln>
+        </p:spPr>
+        <p:style>
+          <a:lnRef idx="1">
+            <a:schemeClr val="accent1"/>
+          </a:lnRef>
+          <a:fillRef idx="3">
+            <a:schemeClr val="accent1"/>
+          </a:fillRef>
+          <a:effectRef idx="2">
+            <a:schemeClr val="accent1"/>
+          </a:effectRef>
+          <a:fontRef idx="minor">
+            <a:schemeClr val="lt1"/>
+          </a:fontRef>
+        </p:style>
+        <p:txBody>
+          <a:bodyPr rtlCol="0" anchor="ctr"/>
+          <a:lstStyle/>
+          <a:p>
+            <a:pPr algn="ctr"/>
+          </a:p>
+        </p:txBody>
+      </p:sp>
+      <p:sp>
+        <p:nvSpPr>
+          <p:cNvPr id="5" name="TextBox 4"/>
+          <p:cNvSpPr txBox="1"/>
+          <p:nvPr/>
+        </p:nvSpPr>
+        <p:spPr>
+          <a:xfrm>
+            <a:off x="365760" y="91440"/>
+            <a:ext cx="11430000" cy="530352"/>
+          </a:xfrm>
+          <a:prstGeom prst="rect">
+            <a:avLst/>
+          </a:prstGeom>
+          <a:noFill/>
+        </p:spPr>
+        <p:txBody>
+          <a:bodyPr wrap="square">
+            <a:spAutoFit/>
+          </a:bodyPr>
+          <a:lstStyle/>
+          <a:p>
+            <a:pPr algn="l"/>
+            <a:r>
+              <a:rPr sz="2200" b="1" i="0">
+                <a:solidFill>
+                  <a:srgbClr val="FFFFFF"/>
+                </a:solidFill>
+                <a:latin typeface="Segoe UI"/>
+              </a:rPr>
+              <a:t>LA QUALIFICATION — ENJEU CRITIQUE</a:t>
+            </a:r>
+          </a:p>
+        </p:txBody>
+      </p:sp>
+      <p:sp>
+        <p:nvSpPr>
+          <p:cNvPr id="6" name="TextBox 5"/>
+          <p:cNvSpPr txBox="1"/>
+          <p:nvPr/>
+        </p:nvSpPr>
+        <p:spPr>
+          <a:xfrm>
+            <a:off x="365760" y="658368"/>
+            <a:ext cx="11430000" cy="402336"/>
+          </a:xfrm>
+          <a:prstGeom prst="rect">
+            <a:avLst/>
+          </a:prstGeom>
+          <a:noFill/>
+        </p:spPr>
+        <p:txBody>
+          <a:bodyPr wrap="square">
+            <a:spAutoFit/>
+          </a:bodyPr>
+          <a:lstStyle/>
+          <a:p>
+            <a:pPr algn="l"/>
+            <a:r>
+              <a:rPr sz="1200" b="0" i="1">
+                <a:solidFill>
+                  <a:srgbClr val="FFDDDD"/>
+                </a:solidFill>
+                <a:latin typeface="Segoe UI"/>
+              </a:rPr>
+              <a:t>50 % de la qualité de travail Fidelis repose sur une qualification CONFORME</a:t>
+            </a:r>
+          </a:p>
+        </p:txBody>
+      </p:sp>
+      <p:sp>
+        <p:nvSpPr>
+          <p:cNvPr id="7" name="Rectangle 6"/>
+          <p:cNvSpPr/>
+          <p:nvPr/>
+        </p:nvSpPr>
+        <p:spPr>
+          <a:xfrm>
+            <a:off x="0" y="6492240"/>
+            <a:ext cx="12188952" cy="365760"/>
+          </a:xfrm>
+          <a:prstGeom prst="rect">
+            <a:avLst/>
+          </a:prstGeom>
+          <a:solidFill>
+            <a:srgbClr val="003087"/>
+          </a:solidFill>
+          <a:ln>
+            <a:noFill/>
+          </a:ln>
+        </p:spPr>
+        <p:style>
+          <a:lnRef idx="1">
+            <a:schemeClr val="accent1"/>
+          </a:lnRef>
+          <a:fillRef idx="3">
+            <a:schemeClr val="accent1"/>
+          </a:fillRef>
+          <a:effectRef idx="2">
+            <a:schemeClr val="accent1"/>
+          </a:effectRef>
+          <a:fontRef idx="minor">
+            <a:schemeClr val="lt1"/>
+          </a:fontRef>
+        </p:style>
+        <p:txBody>
+          <a:bodyPr rtlCol="0" anchor="ctr"/>
+          <a:lstStyle/>
+          <a:p>
+            <a:pPr algn="ctr"/>
+          </a:p>
+        </p:txBody>
+      </p:sp>
+      <p:sp>
+        <p:nvSpPr>
+          <p:cNvPr id="8" name="TextBox 7"/>
+          <p:cNvSpPr txBox="1"/>
+          <p:nvPr/>
+        </p:nvSpPr>
+        <p:spPr>
+          <a:xfrm>
+            <a:off x="274320" y="6510528"/>
+            <a:ext cx="11640312" cy="310896"/>
+          </a:xfrm>
+          <a:prstGeom prst="rect">
+            <a:avLst/>
+          </a:prstGeom>
+          <a:noFill/>
+        </p:spPr>
+        <p:txBody>
+          <a:bodyPr wrap="square">
+            <a:spAutoFit/>
+          </a:bodyPr>
+          <a:lstStyle/>
+          <a:p>
+            <a:pPr algn="ctr"/>
+            <a:r>
+              <a:rPr sz="900" b="0" i="0">
+                <a:solidFill>
+                  <a:srgbClr val="AABBDD"/>
+                </a:solidFill>
+                <a:latin typeface="Segoe UI"/>
+              </a:rPr>
+              <a:t>J2 FIM — Matinée  |  Fidelis × SHY Performance  |  Le Monde Associatif &amp; Humanitaire</a:t>
+            </a:r>
+          </a:p>
+        </p:txBody>
+      </p:sp>
+      <p:sp>
+        <p:nvSpPr>
+          <p:cNvPr id="9" name="Rectangle 8"/>
+          <p:cNvSpPr/>
+          <p:nvPr/>
+        </p:nvSpPr>
+        <p:spPr>
+          <a:xfrm>
+            <a:off x="320040" y="1371600"/>
+            <a:ext cx="5394960" cy="2212848"/>
+          </a:xfrm>
+          <a:prstGeom prst="rect">
+            <a:avLst/>
+          </a:prstGeom>
+          <a:solidFill>
+            <a:srgbClr val="0A1628"/>
+          </a:solidFill>
+          <a:ln w="19050">
+            <a:solidFill>
+              <a:srgbClr val="E74C3C"/>
+            </a:solidFill>
+          </a:ln>
+        </p:spPr>
+        <p:style>
+          <a:lnRef idx="1">
+            <a:schemeClr val="accent1"/>
+          </a:lnRef>
+          <a:fillRef idx="3">
+            <a:schemeClr val="accent1"/>
+          </a:fillRef>
+          <a:effectRef idx="2">
+            <a:schemeClr val="accent1"/>
+          </a:effectRef>
+          <a:fontRef idx="minor">
+            <a:schemeClr val="lt1"/>
+          </a:fontRef>
+        </p:style>
+        <p:txBody>
+          <a:bodyPr rtlCol="0" anchor="ctr"/>
+          <a:lstStyle/>
+          <a:p>
+            <a:pPr algn="ctr"/>
+          </a:p>
+        </p:txBody>
+      </p:sp>
+      <p:sp>
+        <p:nvSpPr>
+          <p:cNvPr id="10" name="Rectangle 9"/>
+          <p:cNvSpPr/>
+          <p:nvPr/>
+        </p:nvSpPr>
+        <p:spPr>
+          <a:xfrm>
+            <a:off x="320040" y="1371600"/>
+            <a:ext cx="5394960" cy="45720"/>
+          </a:xfrm>
+          <a:prstGeom prst="rect">
+            <a:avLst/>
+          </a:prstGeom>
+          <a:solidFill>
+            <a:srgbClr val="E74C3C"/>
+          </a:solidFill>
+          <a:ln>
+            <a:noFill/>
+          </a:ln>
+        </p:spPr>
+        <p:style>
+          <a:lnRef idx="1">
+            <a:schemeClr val="accent1"/>
+          </a:lnRef>
+          <a:fillRef idx="3">
+            <a:schemeClr val="accent1"/>
+          </a:fillRef>
+          <a:effectRef idx="2">
+            <a:schemeClr val="accent1"/>
+          </a:effectRef>
+          <a:fontRef idx="minor">
+            <a:schemeClr val="lt1"/>
+          </a:fontRef>
+        </p:style>
+        <p:txBody>
+          <a:bodyPr rtlCol="0" anchor="ctr"/>
+          <a:lstStyle/>
+          <a:p>
+            <a:pPr algn="ctr"/>
+          </a:p>
+        </p:txBody>
+      </p:sp>
+      <p:sp>
+        <p:nvSpPr>
+          <p:cNvPr id="11" name="TextBox 10"/>
+          <p:cNvSpPr txBox="1"/>
+          <p:nvPr/>
+        </p:nvSpPr>
+        <p:spPr>
+          <a:xfrm>
+            <a:off x="502920" y="1481328"/>
+            <a:ext cx="5029200" cy="274320"/>
+          </a:xfrm>
+          <a:prstGeom prst="rect">
+            <a:avLst/>
+          </a:prstGeom>
+          <a:noFill/>
+        </p:spPr>
+        <p:txBody>
+          <a:bodyPr wrap="square">
+            <a:spAutoFit/>
+          </a:bodyPr>
+          <a:lstStyle/>
+          <a:p>
+            <a:pPr algn="l"/>
+            <a:r>
+              <a:rPr sz="1200" b="1" i="0">
+                <a:solidFill>
+                  <a:srgbClr val="E74C3C"/>
+                </a:solidFill>
+                <a:latin typeface="Segoe UI"/>
+              </a:rPr>
+              <a:t>⚠  IMPACT D'UNE FAUSSE QUALIFICATION</a:t>
+            </a:r>
+          </a:p>
+        </p:txBody>
+      </p:sp>
+      <p:sp>
+        <p:nvSpPr>
+          <p:cNvPr id="12" name="TextBox 11"/>
+          <p:cNvSpPr txBox="1"/>
+          <p:nvPr/>
+        </p:nvSpPr>
+        <p:spPr>
+          <a:xfrm>
+            <a:off x="502920" y="1828800"/>
+            <a:ext cx="5029200" cy="1600200"/>
+          </a:xfrm>
+          <a:prstGeom prst="rect">
+            <a:avLst/>
+          </a:prstGeom>
+          <a:noFill/>
+        </p:spPr>
+        <p:txBody>
+          <a:bodyPr wrap="square">
+            <a:spAutoFit/>
+          </a:bodyPr>
+          <a:lstStyle/>
+          <a:p>
+            <a:pPr algn="l"/>
+            <a:r>
+              <a:rPr sz="1000" b="0" i="0">
+                <a:solidFill>
+                  <a:srgbClr val="FFFFFF"/>
+                </a:solidFill>
+                <a:latin typeface="Segoe UI"/>
+              </a:rPr>
+              <a:t>Une qualification erronée entraîne un impact FINANCIER DIRECT sur Fidelis.
+• Refus argumenté / Refus de répondre = NON CONTACTÉ pendant 4 mois
+• Peut être affecté à d'autres associations — mais PAS UNICEF
+• SHY Performance + Nescall reçoivent chacun 300 000 à 400 000 fiches/mois
+• Une fiche mal qualifiée = un contact perdu, une opportunité manquée</a:t>
+            </a:r>
+          </a:p>
+        </p:txBody>
+      </p:sp>
+      <p:sp>
+        <p:nvSpPr>
+          <p:cNvPr id="13" name="Rectangle 12"/>
+          <p:cNvSpPr/>
+          <p:nvPr/>
+        </p:nvSpPr>
+        <p:spPr>
+          <a:xfrm>
+            <a:off x="5989320" y="1371600"/>
+            <a:ext cx="5852160" cy="2212848"/>
+          </a:xfrm>
+          <a:prstGeom prst="rect">
+            <a:avLst/>
+          </a:prstGeom>
+          <a:solidFill>
+            <a:srgbClr val="E8F0FB"/>
+          </a:solidFill>
+          <a:ln w="12700">
+            <a:solidFill>
+              <a:srgbClr val="0057B8"/>
+            </a:solidFill>
+          </a:ln>
+        </p:spPr>
+        <p:style>
+          <a:lnRef idx="1">
+            <a:schemeClr val="accent1"/>
+          </a:lnRef>
+          <a:fillRef idx="3">
+            <a:schemeClr val="accent1"/>
+          </a:fillRef>
+          <a:effectRef idx="2">
+            <a:schemeClr val="accent1"/>
+          </a:effectRef>
+          <a:fontRef idx="minor">
+            <a:schemeClr val="lt1"/>
+          </a:fontRef>
+        </p:style>
+        <p:txBody>
+          <a:bodyPr rtlCol="0" anchor="ctr"/>
+          <a:lstStyle/>
+          <a:p>
+            <a:pPr algn="ctr"/>
+          </a:p>
+        </p:txBody>
+      </p:sp>
+      <p:sp>
+        <p:nvSpPr>
+          <p:cNvPr id="14" name="Rectangle 13"/>
+          <p:cNvSpPr/>
+          <p:nvPr/>
+        </p:nvSpPr>
+        <p:spPr>
+          <a:xfrm>
+            <a:off x="5989320" y="1371600"/>
+            <a:ext cx="5852160" cy="45720"/>
+          </a:xfrm>
+          <a:prstGeom prst="rect">
+            <a:avLst/>
+          </a:prstGeom>
+          <a:solidFill>
+            <a:srgbClr val="0057B8"/>
+          </a:solidFill>
+          <a:ln>
+            <a:noFill/>
+          </a:ln>
+        </p:spPr>
+        <p:style>
+          <a:lnRef idx="1">
+            <a:schemeClr val="accent1"/>
+          </a:lnRef>
+          <a:fillRef idx="3">
+            <a:schemeClr val="accent1"/>
+          </a:fillRef>
+          <a:effectRef idx="2">
+            <a:schemeClr val="accent1"/>
+          </a:effectRef>
+          <a:fontRef idx="minor">
+            <a:schemeClr val="lt1"/>
+          </a:fontRef>
+        </p:style>
+        <p:txBody>
+          <a:bodyPr rtlCol="0" anchor="ctr"/>
+          <a:lstStyle/>
+          <a:p>
+            <a:pPr algn="ctr"/>
+          </a:p>
+        </p:txBody>
+      </p:sp>
+      <p:sp>
+        <p:nvSpPr>
+          <p:cNvPr id="15" name="TextBox 14"/>
+          <p:cNvSpPr txBox="1"/>
+          <p:nvPr/>
+        </p:nvSpPr>
+        <p:spPr>
+          <a:xfrm>
+            <a:off x="6172200" y="1481328"/>
+            <a:ext cx="5486400" cy="274320"/>
+          </a:xfrm>
+          <a:prstGeom prst="rect">
+            <a:avLst/>
+          </a:prstGeom>
+          <a:noFill/>
+        </p:spPr>
+        <p:txBody>
+          <a:bodyPr wrap="square">
+            <a:spAutoFit/>
+          </a:bodyPr>
+          <a:lstStyle/>
+          <a:p>
+            <a:pPr algn="l"/>
+            <a:r>
+              <a:rPr sz="1200" b="1" i="0">
+                <a:solidFill>
+                  <a:srgbClr val="003087"/>
+                </a:solidFill>
+                <a:latin typeface="Segoe UI"/>
+              </a:rPr>
+              <a:t>📊  VOLUMES — EXPLOITATION DES FICHES</a:t>
+            </a:r>
+          </a:p>
+        </p:txBody>
+      </p:sp>
+      <p:sp>
+        <p:nvSpPr>
+          <p:cNvPr id="16" name="Rectangle 15"/>
+          <p:cNvSpPr/>
+          <p:nvPr/>
+        </p:nvSpPr>
+        <p:spPr>
+          <a:xfrm>
+            <a:off x="6080760" y="1847088"/>
+            <a:ext cx="54864" cy="457200"/>
+          </a:xfrm>
+          <a:prstGeom prst="rect">
+            <a:avLst/>
+          </a:prstGeom>
+          <a:solidFill>
+            <a:srgbClr val="0057B8"/>
+          </a:solidFill>
+          <a:ln>
+            <a:noFill/>
+          </a:ln>
+        </p:spPr>
+        <p:style>
+          <a:lnRef idx="1">
+            <a:schemeClr val="accent1"/>
+          </a:lnRef>
+          <a:fillRef idx="3">
+            <a:schemeClr val="accent1"/>
+          </a:fillRef>
+          <a:effectRef idx="2">
+            <a:schemeClr val="accent1"/>
+          </a:effectRef>
+          <a:fontRef idx="minor">
+            <a:schemeClr val="lt1"/>
+          </a:fontRef>
+        </p:style>
+        <p:txBody>
+          <a:bodyPr rtlCol="0" anchor="ctr"/>
+          <a:lstStyle/>
+          <a:p>
+            <a:pPr algn="ctr"/>
+          </a:p>
+        </p:txBody>
+      </p:sp>
+      <p:sp>
+        <p:nvSpPr>
+          <p:cNvPr id="17" name="TextBox 16"/>
+          <p:cNvSpPr txBox="1"/>
+          <p:nvPr/>
+        </p:nvSpPr>
+        <p:spPr>
+          <a:xfrm>
+            <a:off x="6263640" y="1874520"/>
+            <a:ext cx="2286000" cy="219456"/>
+          </a:xfrm>
+          <a:prstGeom prst="rect">
+            <a:avLst/>
+          </a:prstGeom>
+          <a:noFill/>
+        </p:spPr>
+        <p:txBody>
+          <a:bodyPr wrap="square">
+            <a:spAutoFit/>
+          </a:bodyPr>
+          <a:lstStyle/>
+          <a:p>
+            <a:pPr algn="l"/>
+            <a:r>
+              <a:rPr sz="1000" b="1" i="0">
+                <a:solidFill>
+                  <a:srgbClr val="003087"/>
+                </a:solidFill>
+                <a:latin typeface="Segoe UI"/>
+              </a:rPr>
+              <a:t>SHY Performance</a:t>
+            </a:r>
+          </a:p>
+        </p:txBody>
+      </p:sp>
+      <p:sp>
+        <p:nvSpPr>
+          <p:cNvPr id="18" name="TextBox 17"/>
+          <p:cNvSpPr txBox="1"/>
+          <p:nvPr/>
+        </p:nvSpPr>
+        <p:spPr>
+          <a:xfrm>
+            <a:off x="6263640" y="2103120"/>
+            <a:ext cx="5303520" cy="201168"/>
+          </a:xfrm>
+          <a:prstGeom prst="rect">
+            <a:avLst/>
+          </a:prstGeom>
+          <a:noFill/>
+        </p:spPr>
+        <p:txBody>
+          <a:bodyPr wrap="square">
+            <a:spAutoFit/>
+          </a:bodyPr>
+          <a:lstStyle/>
+          <a:p>
+            <a:pPr algn="l"/>
+            <a:r>
+              <a:rPr sz="1000" b="0" i="1">
+                <a:solidFill>
+                  <a:srgbClr val="555555"/>
+                </a:solidFill>
+                <a:latin typeface="Segoe UI"/>
+              </a:rPr>
+              <a:t>300 000 – 400 000 fiches / mois</a:t>
+            </a:r>
+          </a:p>
+        </p:txBody>
+      </p:sp>
+      <p:sp>
+        <p:nvSpPr>
+          <p:cNvPr id="19" name="Rectangle 18"/>
+          <p:cNvSpPr/>
+          <p:nvPr/>
+        </p:nvSpPr>
+        <p:spPr>
+          <a:xfrm>
+            <a:off x="6080760" y="2322576"/>
+            <a:ext cx="54864" cy="457200"/>
+          </a:xfrm>
+          <a:prstGeom prst="rect">
+            <a:avLst/>
+          </a:prstGeom>
+          <a:solidFill>
+            <a:srgbClr val="0D9488"/>
+          </a:solidFill>
+          <a:ln>
+            <a:noFill/>
+          </a:ln>
+        </p:spPr>
+        <p:style>
+          <a:lnRef idx="1">
+            <a:schemeClr val="accent1"/>
+          </a:lnRef>
+          <a:fillRef idx="3">
+            <a:schemeClr val="accent1"/>
+          </a:fillRef>
+          <a:effectRef idx="2">
+            <a:schemeClr val="accent1"/>
+          </a:effectRef>
+          <a:fontRef idx="minor">
+            <a:schemeClr val="lt1"/>
+          </a:fontRef>
+        </p:style>
+        <p:txBody>
+          <a:bodyPr rtlCol="0" anchor="ctr"/>
+          <a:lstStyle/>
+          <a:p>
+            <a:pPr algn="ctr"/>
+          </a:p>
+        </p:txBody>
+      </p:sp>
+      <p:sp>
+        <p:nvSpPr>
+          <p:cNvPr id="20" name="TextBox 19"/>
+          <p:cNvSpPr txBox="1"/>
+          <p:nvPr/>
+        </p:nvSpPr>
+        <p:spPr>
+          <a:xfrm>
+            <a:off x="6263640" y="2350008"/>
+            <a:ext cx="2286000" cy="219456"/>
+          </a:xfrm>
+          <a:prstGeom prst="rect">
+            <a:avLst/>
+          </a:prstGeom>
+          <a:noFill/>
+        </p:spPr>
+        <p:txBody>
+          <a:bodyPr wrap="square">
+            <a:spAutoFit/>
+          </a:bodyPr>
+          <a:lstStyle/>
+          <a:p>
+            <a:pPr algn="l"/>
+            <a:r>
+              <a:rPr sz="1000" b="1" i="0">
+                <a:solidFill>
+                  <a:srgbClr val="003087"/>
+                </a:solidFill>
+                <a:latin typeface="Segoe UI"/>
+              </a:rPr>
+              <a:t>Nescall</a:t>
+            </a:r>
+          </a:p>
+        </p:txBody>
+      </p:sp>
+      <p:sp>
+        <p:nvSpPr>
+          <p:cNvPr id="21" name="TextBox 20"/>
+          <p:cNvSpPr txBox="1"/>
+          <p:nvPr/>
+        </p:nvSpPr>
+        <p:spPr>
+          <a:xfrm>
+            <a:off x="6263640" y="2578608"/>
+            <a:ext cx="5303520" cy="201168"/>
+          </a:xfrm>
+          <a:prstGeom prst="rect">
+            <a:avLst/>
+          </a:prstGeom>
+          <a:noFill/>
+        </p:spPr>
+        <p:txBody>
+          <a:bodyPr wrap="square">
+            <a:spAutoFit/>
+          </a:bodyPr>
+          <a:lstStyle/>
+          <a:p>
+            <a:pPr algn="l"/>
+            <a:r>
+              <a:rPr sz="1000" b="0" i="1">
+                <a:solidFill>
+                  <a:srgbClr val="555555"/>
+                </a:solidFill>
+                <a:latin typeface="Segoe UI"/>
+              </a:rPr>
+              <a:t>300 000 – 400 000 fiches / mois</a:t>
+            </a:r>
+          </a:p>
+        </p:txBody>
+      </p:sp>
+      <p:sp>
+        <p:nvSpPr>
+          <p:cNvPr id="22" name="Rectangle 21"/>
+          <p:cNvSpPr/>
+          <p:nvPr/>
+        </p:nvSpPr>
+        <p:spPr>
+          <a:xfrm>
+            <a:off x="6080760" y="2798064"/>
+            <a:ext cx="54864" cy="457200"/>
+          </a:xfrm>
+          <a:prstGeom prst="rect">
+            <a:avLst/>
+          </a:prstGeom>
+          <a:solidFill>
+            <a:srgbClr val="F7941D"/>
+          </a:solidFill>
+          <a:ln>
+            <a:noFill/>
+          </a:ln>
+        </p:spPr>
+        <p:style>
+          <a:lnRef idx="1">
+            <a:schemeClr val="accent1"/>
+          </a:lnRef>
+          <a:fillRef idx="3">
+            <a:schemeClr val="accent1"/>
+          </a:fillRef>
+          <a:effectRef idx="2">
+            <a:schemeClr val="accent1"/>
+          </a:effectRef>
+          <a:fontRef idx="minor">
+            <a:schemeClr val="lt1"/>
+          </a:fontRef>
+        </p:style>
+        <p:txBody>
+          <a:bodyPr rtlCol="0" anchor="ctr"/>
+          <a:lstStyle/>
+          <a:p>
+            <a:pPr algn="ctr"/>
+          </a:p>
+        </p:txBody>
+      </p:sp>
+      <p:sp>
+        <p:nvSpPr>
+          <p:cNvPr id="23" name="TextBox 22"/>
+          <p:cNvSpPr txBox="1"/>
+          <p:nvPr/>
+        </p:nvSpPr>
+        <p:spPr>
+          <a:xfrm>
+            <a:off x="6263640" y="2825496"/>
+            <a:ext cx="2286000" cy="219456"/>
+          </a:xfrm>
+          <a:prstGeom prst="rect">
+            <a:avLst/>
+          </a:prstGeom>
+          <a:noFill/>
+        </p:spPr>
+        <p:txBody>
+          <a:bodyPr wrap="square">
+            <a:spAutoFit/>
+          </a:bodyPr>
+          <a:lstStyle/>
+          <a:p>
+            <a:pPr algn="l"/>
+            <a:r>
+              <a:rPr sz="1000" b="1" i="0">
+                <a:solidFill>
+                  <a:srgbClr val="003087"/>
+                </a:solidFill>
+                <a:latin typeface="Segoe UI"/>
+              </a:rPr>
+              <a:t>Total marché</a:t>
+            </a:r>
+          </a:p>
+        </p:txBody>
+      </p:sp>
+      <p:sp>
+        <p:nvSpPr>
+          <p:cNvPr id="24" name="TextBox 23"/>
+          <p:cNvSpPr txBox="1"/>
+          <p:nvPr/>
+        </p:nvSpPr>
+        <p:spPr>
+          <a:xfrm>
+            <a:off x="6263640" y="3054096"/>
+            <a:ext cx="5303520" cy="201168"/>
+          </a:xfrm>
+          <a:prstGeom prst="rect">
+            <a:avLst/>
+          </a:prstGeom>
+          <a:noFill/>
+        </p:spPr>
+        <p:txBody>
+          <a:bodyPr wrap="square">
+            <a:spAutoFit/>
+          </a:bodyPr>
+          <a:lstStyle/>
+          <a:p>
+            <a:pPr algn="l"/>
+            <a:r>
+              <a:rPr sz="1000" b="0" i="1">
+                <a:solidFill>
+                  <a:srgbClr val="555555"/>
+                </a:solidFill>
+                <a:latin typeface="Segoe UI"/>
+              </a:rPr>
+              <a:t>600 000 à 800 000 contacts / mois</a:t>
+            </a:r>
+          </a:p>
+        </p:txBody>
+      </p:sp>
+      <p:sp>
+        <p:nvSpPr>
+          <p:cNvPr id="25" name="Rectangle 24"/>
+          <p:cNvSpPr/>
+          <p:nvPr/>
+        </p:nvSpPr>
+        <p:spPr>
+          <a:xfrm>
+            <a:off x="6080760" y="3273552"/>
+            <a:ext cx="54864" cy="457200"/>
+          </a:xfrm>
+          <a:prstGeom prst="rect">
+            <a:avLst/>
+          </a:prstGeom>
+          <a:solidFill>
+            <a:srgbClr val="E74C3C"/>
+          </a:solidFill>
+          <a:ln>
+            <a:noFill/>
+          </a:ln>
+        </p:spPr>
+        <p:style>
+          <a:lnRef idx="1">
+            <a:schemeClr val="accent1"/>
+          </a:lnRef>
+          <a:fillRef idx="3">
+            <a:schemeClr val="accent1"/>
+          </a:fillRef>
+          <a:effectRef idx="2">
+            <a:schemeClr val="accent1"/>
+          </a:effectRef>
+          <a:fontRef idx="minor">
+            <a:schemeClr val="lt1"/>
+          </a:fontRef>
+        </p:style>
+        <p:txBody>
+          <a:bodyPr rtlCol="0" anchor="ctr"/>
+          <a:lstStyle/>
+          <a:p>
+            <a:pPr algn="ctr"/>
+          </a:p>
+        </p:txBody>
+      </p:sp>
+      <p:sp>
+        <p:nvSpPr>
+          <p:cNvPr id="26" name="TextBox 25"/>
+          <p:cNvSpPr txBox="1"/>
+          <p:nvPr/>
+        </p:nvSpPr>
+        <p:spPr>
+          <a:xfrm>
+            <a:off x="6263640" y="3300984"/>
+            <a:ext cx="2286000" cy="219456"/>
+          </a:xfrm>
+          <a:prstGeom prst="rect">
+            <a:avLst/>
+          </a:prstGeom>
+          <a:noFill/>
+        </p:spPr>
+        <p:txBody>
+          <a:bodyPr wrap="square">
+            <a:spAutoFit/>
+          </a:bodyPr>
+          <a:lstStyle/>
+          <a:p>
+            <a:pPr algn="l"/>
+            <a:r>
+              <a:rPr sz="1000" b="1" i="0">
+                <a:solidFill>
+                  <a:srgbClr val="003087"/>
+                </a:solidFill>
+                <a:latin typeface="Segoe UI"/>
+              </a:rPr>
+              <a:t>Exclusion UNICEF</a:t>
+            </a:r>
+          </a:p>
+        </p:txBody>
+      </p:sp>
+      <p:sp>
+        <p:nvSpPr>
+          <p:cNvPr id="27" name="TextBox 26"/>
+          <p:cNvSpPr txBox="1"/>
+          <p:nvPr/>
+        </p:nvSpPr>
+        <p:spPr>
+          <a:xfrm>
+            <a:off x="6263640" y="3529584"/>
+            <a:ext cx="5303520" cy="201168"/>
+          </a:xfrm>
+          <a:prstGeom prst="rect">
+            <a:avLst/>
+          </a:prstGeom>
+          <a:noFill/>
+        </p:spPr>
+        <p:txBody>
+          <a:bodyPr wrap="square">
+            <a:spAutoFit/>
+          </a:bodyPr>
+          <a:lstStyle/>
+          <a:p>
+            <a:pPr algn="l"/>
+            <a:r>
+              <a:rPr sz="1000" b="0" i="1">
+                <a:solidFill>
+                  <a:srgbClr val="555555"/>
+                </a:solidFill>
+                <a:latin typeface="Segoe UI"/>
+              </a:rPr>
+              <a:t>4 mois si refus argumenté / sans réponse</a:t>
+            </a:r>
+          </a:p>
+        </p:txBody>
+      </p:sp>
+      <p:sp>
+        <p:nvSpPr>
+          <p:cNvPr id="28" name="Rectangle 27"/>
+          <p:cNvSpPr/>
+          <p:nvPr/>
+        </p:nvSpPr>
+        <p:spPr>
+          <a:xfrm>
+            <a:off x="320040" y="3703320"/>
+            <a:ext cx="11521440" cy="347472"/>
+          </a:xfrm>
+          <a:prstGeom prst="rect">
+            <a:avLst/>
+          </a:prstGeom>
+          <a:solidFill>
+            <a:srgbClr val="E74C3C"/>
+          </a:solidFill>
+          <a:ln>
+            <a:noFill/>
+          </a:ln>
+        </p:spPr>
+        <p:style>
+          <a:lnRef idx="1">
+            <a:schemeClr val="accent1"/>
+          </a:lnRef>
+          <a:fillRef idx="3">
+            <a:schemeClr val="accent1"/>
+          </a:fillRef>
+          <a:effectRef idx="2">
+            <a:schemeClr val="accent1"/>
+          </a:effectRef>
+          <a:fontRef idx="minor">
+            <a:schemeClr val="lt1"/>
+          </a:fontRef>
+        </p:style>
+        <p:txBody>
+          <a:bodyPr rtlCol="0" anchor="ctr"/>
+          <a:lstStyle/>
+          <a:p>
+            <a:pPr algn="ctr"/>
+          </a:p>
+        </p:txBody>
+      </p:sp>
+      <p:sp>
+        <p:nvSpPr>
+          <p:cNvPr id="29" name="TextBox 28"/>
+          <p:cNvSpPr txBox="1"/>
+          <p:nvPr/>
+        </p:nvSpPr>
+        <p:spPr>
+          <a:xfrm>
+            <a:off x="502920" y="3776472"/>
+            <a:ext cx="10972800" cy="219456"/>
+          </a:xfrm>
+          <a:prstGeom prst="rect">
+            <a:avLst/>
+          </a:prstGeom>
+          <a:noFill/>
+        </p:spPr>
+        <p:txBody>
+          <a:bodyPr wrap="square">
+            <a:spAutoFit/>
+          </a:bodyPr>
+          <a:lstStyle/>
+          <a:p>
+            <a:pPr algn="ctr"/>
+            <a:r>
+              <a:rPr sz="1100" b="1" i="0">
+                <a:solidFill>
+                  <a:srgbClr val="FFFFFF"/>
+                </a:solidFill>
+                <a:latin typeface="Segoe UI"/>
+              </a:rPr>
+              <a:t>RÈGLE D'OR : TABLEAU DES QUALIFICATIONS OBLIGATOIRES</a:t>
+            </a:r>
+          </a:p>
+        </p:txBody>
+      </p:sp>
+      <p:sp>
+        <p:nvSpPr>
+          <p:cNvPr id="30" name="Rectangle 29"/>
+          <p:cNvSpPr/>
+          <p:nvPr/>
+        </p:nvSpPr>
+        <p:spPr>
+          <a:xfrm>
+            <a:off x="320040" y="4133087"/>
+            <a:ext cx="11521440" cy="384048"/>
+          </a:xfrm>
+          <a:prstGeom prst="rect">
+            <a:avLst/>
+          </a:prstGeom>
+          <a:solidFill>
+            <a:srgbClr val="EAFAF1"/>
+          </a:solidFill>
+          <a:ln w="6350">
+            <a:solidFill>
+              <a:srgbClr val="DCE3F0"/>
+            </a:solidFill>
+          </a:ln>
+        </p:spPr>
+        <p:style>
+          <a:lnRef idx="1">
+            <a:schemeClr val="accent1"/>
+          </a:lnRef>
+          <a:fillRef idx="3">
+            <a:schemeClr val="accent1"/>
+          </a:fillRef>
+          <a:effectRef idx="2">
+            <a:schemeClr val="accent1"/>
+          </a:effectRef>
+          <a:fontRef idx="minor">
+            <a:schemeClr val="lt1"/>
+          </a:fontRef>
+        </p:style>
+        <p:txBody>
+          <a:bodyPr rtlCol="0" anchor="ctr"/>
+          <a:lstStyle/>
+          <a:p>
+            <a:pPr algn="ctr"/>
+          </a:p>
+        </p:txBody>
+      </p:sp>
+      <p:sp>
+        <p:nvSpPr>
+          <p:cNvPr id="31" name="Rectangle 30"/>
+          <p:cNvSpPr/>
+          <p:nvPr/>
+        </p:nvSpPr>
+        <p:spPr>
+          <a:xfrm>
+            <a:off x="320040" y="4133087"/>
+            <a:ext cx="54864" cy="384048"/>
+          </a:xfrm>
+          <a:prstGeom prst="rect">
+            <a:avLst/>
+          </a:prstGeom>
+          <a:solidFill>
+            <a:srgbClr val="27AE60"/>
+          </a:solidFill>
+          <a:ln>
+            <a:noFill/>
+          </a:ln>
+        </p:spPr>
+        <p:style>
+          <a:lnRef idx="1">
+            <a:schemeClr val="accent1"/>
+          </a:lnRef>
+          <a:fillRef idx="3">
+            <a:schemeClr val="accent1"/>
+          </a:fillRef>
+          <a:effectRef idx="2">
+            <a:schemeClr val="accent1"/>
+          </a:effectRef>
+          <a:fontRef idx="minor">
+            <a:schemeClr val="lt1"/>
+          </a:fontRef>
+        </p:style>
+        <p:txBody>
+          <a:bodyPr rtlCol="0" anchor="ctr"/>
+          <a:lstStyle/>
+          <a:p>
+            <a:pPr algn="ctr"/>
+          </a:p>
+        </p:txBody>
+      </p:sp>
+      <p:sp>
+        <p:nvSpPr>
+          <p:cNvPr id="32" name="TextBox 31"/>
+          <p:cNvSpPr txBox="1"/>
+          <p:nvPr/>
+        </p:nvSpPr>
+        <p:spPr>
+          <a:xfrm>
+            <a:off x="502920" y="4206239"/>
+            <a:ext cx="4114800" cy="256032"/>
+          </a:xfrm>
+          <a:prstGeom prst="rect">
+            <a:avLst/>
+          </a:prstGeom>
+          <a:noFill/>
+        </p:spPr>
+        <p:txBody>
+          <a:bodyPr wrap="square">
+            <a:spAutoFit/>
+          </a:bodyPr>
+          <a:lstStyle/>
+          <a:p>
+            <a:pPr algn="l"/>
+            <a:r>
+              <a:rPr sz="1000" b="1" i="0">
+                <a:solidFill>
+                  <a:srgbClr val="003087"/>
+                </a:solidFill>
+                <a:latin typeface="Segoe UI"/>
+              </a:rPr>
+              <a:t>✅  PEL — Prélèvement En Ligne</a:t>
+            </a:r>
+          </a:p>
+        </p:txBody>
+      </p:sp>
+      <p:sp>
+        <p:nvSpPr>
+          <p:cNvPr id="33" name="TextBox 32"/>
+          <p:cNvSpPr txBox="1"/>
+          <p:nvPr/>
+        </p:nvSpPr>
+        <p:spPr>
+          <a:xfrm>
+            <a:off x="4709160" y="4206239"/>
+            <a:ext cx="6949440" cy="256032"/>
+          </a:xfrm>
+          <a:prstGeom prst="rect">
+            <a:avLst/>
+          </a:prstGeom>
+          <a:noFill/>
+        </p:spPr>
+        <p:txBody>
+          <a:bodyPr wrap="square">
+            <a:spAutoFit/>
+          </a:bodyPr>
+          <a:lstStyle/>
+          <a:p>
+            <a:pPr algn="l"/>
+            <a:r>
+              <a:rPr sz="1000" b="0" i="0">
+                <a:solidFill>
+                  <a:srgbClr val="555555"/>
+                </a:solidFill>
+                <a:latin typeface="Segoe UI"/>
+              </a:rPr>
+              <a:t>Donateur accepte le prélèvement automatique — mission accomplie</a:t>
+            </a:r>
+          </a:p>
+        </p:txBody>
+      </p:sp>
+      <p:sp>
+        <p:nvSpPr>
+          <p:cNvPr id="34" name="Rectangle 33"/>
+          <p:cNvSpPr/>
+          <p:nvPr/>
+        </p:nvSpPr>
+        <p:spPr>
+          <a:xfrm>
+            <a:off x="320040" y="4526279"/>
+            <a:ext cx="11521440" cy="384048"/>
+          </a:xfrm>
+          <a:prstGeom prst="rect">
+            <a:avLst/>
+          </a:prstGeom>
+          <a:solidFill>
+            <a:srgbClr val="EAFAF1"/>
+          </a:solidFill>
+          <a:ln w="6350">
+            <a:solidFill>
+              <a:srgbClr val="DCE3F0"/>
+            </a:solidFill>
+          </a:ln>
+        </p:spPr>
+        <p:style>
+          <a:lnRef idx="1">
+            <a:schemeClr val="accent1"/>
+          </a:lnRef>
+          <a:fillRef idx="3">
+            <a:schemeClr val="accent1"/>
+          </a:fillRef>
+          <a:effectRef idx="2">
+            <a:schemeClr val="accent1"/>
+          </a:effectRef>
+          <a:fontRef idx="minor">
+            <a:schemeClr val="lt1"/>
+          </a:fontRef>
+        </p:style>
+        <p:txBody>
+          <a:bodyPr rtlCol="0" anchor="ctr"/>
+          <a:lstStyle/>
+          <a:p>
+            <a:pPr algn="ctr"/>
+          </a:p>
+        </p:txBody>
+      </p:sp>
+      <p:sp>
+        <p:nvSpPr>
+          <p:cNvPr id="35" name="Rectangle 34"/>
+          <p:cNvSpPr/>
+          <p:nvPr/>
+        </p:nvSpPr>
+        <p:spPr>
+          <a:xfrm>
+            <a:off x="320040" y="4526279"/>
+            <a:ext cx="54864" cy="384048"/>
+          </a:xfrm>
+          <a:prstGeom prst="rect">
+            <a:avLst/>
+          </a:prstGeom>
+          <a:solidFill>
+            <a:srgbClr val="27AE60"/>
+          </a:solidFill>
+          <a:ln>
+            <a:noFill/>
+          </a:ln>
+        </p:spPr>
+        <p:style>
+          <a:lnRef idx="1">
+            <a:schemeClr val="accent1"/>
+          </a:lnRef>
+          <a:fillRef idx="3">
+            <a:schemeClr val="accent1"/>
+          </a:fillRef>
+          <a:effectRef idx="2">
+            <a:schemeClr val="accent1"/>
+          </a:effectRef>
+          <a:fontRef idx="minor">
+            <a:schemeClr val="lt1"/>
+          </a:fontRef>
+        </p:style>
+        <p:txBody>
+          <a:bodyPr rtlCol="0" anchor="ctr"/>
+          <a:lstStyle/>
+          <a:p>
+            <a:pPr algn="ctr"/>
+          </a:p>
+        </p:txBody>
+      </p:sp>
+      <p:sp>
+        <p:nvSpPr>
+          <p:cNvPr id="36" name="TextBox 35"/>
+          <p:cNvSpPr txBox="1"/>
+          <p:nvPr/>
+        </p:nvSpPr>
+        <p:spPr>
+          <a:xfrm>
+            <a:off x="502920" y="4599431"/>
+            <a:ext cx="4114800" cy="256032"/>
+          </a:xfrm>
+          <a:prstGeom prst="rect">
+            <a:avLst/>
+          </a:prstGeom>
+          <a:noFill/>
+        </p:spPr>
+        <p:txBody>
+          <a:bodyPr wrap="square">
+            <a:spAutoFit/>
+          </a:bodyPr>
+          <a:lstStyle/>
+          <a:p>
+            <a:pPr algn="l"/>
+            <a:r>
+              <a:rPr sz="1000" b="1" i="0">
+                <a:solidFill>
+                  <a:srgbClr val="003087"/>
+                </a:solidFill>
+                <a:latin typeface="Segoe UI"/>
+              </a:rPr>
+              <a:t>✅  RIM — Rappel Imminent</a:t>
+            </a:r>
+          </a:p>
+        </p:txBody>
+      </p:sp>
+      <p:sp>
+        <p:nvSpPr>
+          <p:cNvPr id="37" name="TextBox 36"/>
+          <p:cNvSpPr txBox="1"/>
+          <p:nvPr/>
+        </p:nvSpPr>
+        <p:spPr>
+          <a:xfrm>
+            <a:off x="4709160" y="4599431"/>
+            <a:ext cx="6949440" cy="256032"/>
+          </a:xfrm>
+          <a:prstGeom prst="rect">
+            <a:avLst/>
+          </a:prstGeom>
+          <a:noFill/>
+        </p:spPr>
+        <p:txBody>
+          <a:bodyPr wrap="square">
+            <a:spAutoFit/>
+          </a:bodyPr>
+          <a:lstStyle/>
+          <a:p>
+            <a:pPr algn="l"/>
+            <a:r>
+              <a:rPr sz="1000" b="0" i="0">
+                <a:solidFill>
+                  <a:srgbClr val="555555"/>
+                </a:solidFill>
+                <a:latin typeface="Segoe UI"/>
+              </a:rPr>
+              <a:t>Intéressé, pas disponible, demande à être rappelé très vite</a:t>
+            </a:r>
+          </a:p>
+        </p:txBody>
+      </p:sp>
+      <p:sp>
+        <p:nvSpPr>
+          <p:cNvPr id="38" name="Rectangle 37"/>
+          <p:cNvSpPr/>
+          <p:nvPr/>
+        </p:nvSpPr>
+        <p:spPr>
+          <a:xfrm>
+            <a:off x="320040" y="4919471"/>
+            <a:ext cx="11521440" cy="384048"/>
+          </a:xfrm>
+          <a:prstGeom prst="rect">
+            <a:avLst/>
+          </a:prstGeom>
+          <a:solidFill>
+            <a:srgbClr val="FEFDE8"/>
+          </a:solidFill>
+          <a:ln w="6350">
+            <a:solidFill>
+              <a:srgbClr val="DCE3F0"/>
+            </a:solidFill>
+          </a:ln>
+        </p:spPr>
+        <p:style>
+          <a:lnRef idx="1">
+            <a:schemeClr val="accent1"/>
+          </a:lnRef>
+          <a:fillRef idx="3">
+            <a:schemeClr val="accent1"/>
+          </a:fillRef>
+          <a:effectRef idx="2">
+            <a:schemeClr val="accent1"/>
+          </a:effectRef>
+          <a:fontRef idx="minor">
+            <a:schemeClr val="lt1"/>
+          </a:fontRef>
+        </p:style>
+        <p:txBody>
+          <a:bodyPr rtlCol="0" anchor="ctr"/>
+          <a:lstStyle/>
+          <a:p>
+            <a:pPr algn="ctr"/>
+          </a:p>
+        </p:txBody>
+      </p:sp>
+      <p:sp>
+        <p:nvSpPr>
+          <p:cNvPr id="39" name="Rectangle 38"/>
+          <p:cNvSpPr/>
+          <p:nvPr/>
+        </p:nvSpPr>
+        <p:spPr>
+          <a:xfrm>
+            <a:off x="320040" y="4919471"/>
+            <a:ext cx="54864" cy="384048"/>
+          </a:xfrm>
+          <a:prstGeom prst="rect">
+            <a:avLst/>
+          </a:prstGeom>
+          <a:solidFill>
+            <a:srgbClr val="F1C40F"/>
+          </a:solidFill>
+          <a:ln>
+            <a:noFill/>
+          </a:ln>
+        </p:spPr>
+        <p:style>
+          <a:lnRef idx="1">
+            <a:schemeClr val="accent1"/>
+          </a:lnRef>
+          <a:fillRef idx="3">
+            <a:schemeClr val="accent1"/>
+          </a:fillRef>
+          <a:effectRef idx="2">
+            <a:schemeClr val="accent1"/>
+          </a:effectRef>
+          <a:fontRef idx="minor">
+            <a:schemeClr val="lt1"/>
+          </a:fontRef>
+        </p:style>
+        <p:txBody>
+          <a:bodyPr rtlCol="0" anchor="ctr"/>
+          <a:lstStyle/>
+          <a:p>
+            <a:pPr algn="ctr"/>
+          </a:p>
+        </p:txBody>
+      </p:sp>
+      <p:sp>
+        <p:nvSpPr>
+          <p:cNvPr id="40" name="TextBox 39"/>
+          <p:cNvSpPr txBox="1"/>
+          <p:nvPr/>
+        </p:nvSpPr>
+        <p:spPr>
+          <a:xfrm>
+            <a:off x="502920" y="4992623"/>
+            <a:ext cx="4114800" cy="256032"/>
+          </a:xfrm>
+          <a:prstGeom prst="rect">
+            <a:avLst/>
+          </a:prstGeom>
+          <a:noFill/>
+        </p:spPr>
+        <p:txBody>
+          <a:bodyPr wrap="square">
+            <a:spAutoFit/>
+          </a:bodyPr>
+          <a:lstStyle/>
+          <a:p>
+            <a:pPr algn="l"/>
+            <a:r>
+              <a:rPr sz="1000" b="1" i="0">
+                <a:solidFill>
+                  <a:srgbClr val="003087"/>
+                </a:solidFill>
+                <a:latin typeface="Segoe UI"/>
+              </a:rPr>
+              <a:t>🕐  ABSENT</a:t>
+            </a:r>
+          </a:p>
+        </p:txBody>
+      </p:sp>
+      <p:sp>
+        <p:nvSpPr>
+          <p:cNvPr id="41" name="TextBox 40"/>
+          <p:cNvSpPr txBox="1"/>
+          <p:nvPr/>
+        </p:nvSpPr>
+        <p:spPr>
+          <a:xfrm>
+            <a:off x="4709160" y="4992623"/>
+            <a:ext cx="6949440" cy="256032"/>
+          </a:xfrm>
+          <a:prstGeom prst="rect">
+            <a:avLst/>
+          </a:prstGeom>
+          <a:noFill/>
+        </p:spPr>
+        <p:txBody>
+          <a:bodyPr wrap="square">
+            <a:spAutoFit/>
+          </a:bodyPr>
+          <a:lstStyle/>
+          <a:p>
+            <a:pPr algn="l"/>
+            <a:r>
+              <a:rPr sz="1000" b="0" i="0">
+                <a:solidFill>
+                  <a:srgbClr val="555555"/>
+                </a:solidFill>
+                <a:latin typeface="Segoe UI"/>
+              </a:rPr>
+              <a:t>Répondeur / NRP / Raccroché SANS identification — à rappeler</a:t>
+            </a:r>
+          </a:p>
+        </p:txBody>
+      </p:sp>
+      <p:sp>
+        <p:nvSpPr>
+          <p:cNvPr id="42" name="Rectangle 41"/>
+          <p:cNvSpPr/>
+          <p:nvPr/>
+        </p:nvSpPr>
+        <p:spPr>
+          <a:xfrm>
+            <a:off x="320040" y="5312663"/>
+            <a:ext cx="11521440" cy="384048"/>
+          </a:xfrm>
+          <a:prstGeom prst="rect">
+            <a:avLst/>
+          </a:prstGeom>
+          <a:solidFill>
+            <a:srgbClr val="FEFDE8"/>
+          </a:solidFill>
+          <a:ln w="6350">
+            <a:solidFill>
+              <a:srgbClr val="DCE3F0"/>
+            </a:solidFill>
+          </a:ln>
+        </p:spPr>
+        <p:style>
+          <a:lnRef idx="1">
+            <a:schemeClr val="accent1"/>
+          </a:lnRef>
+          <a:fillRef idx="3">
+            <a:schemeClr val="accent1"/>
+          </a:fillRef>
+          <a:effectRef idx="2">
+            <a:schemeClr val="accent1"/>
+          </a:effectRef>
+          <a:fontRef idx="minor">
+            <a:schemeClr val="lt1"/>
+          </a:fontRef>
+        </p:style>
+        <p:txBody>
+          <a:bodyPr rtlCol="0" anchor="ctr"/>
+          <a:lstStyle/>
+          <a:p>
+            <a:pPr algn="ctr"/>
+          </a:p>
+        </p:txBody>
+      </p:sp>
+      <p:sp>
+        <p:nvSpPr>
+          <p:cNvPr id="43" name="Rectangle 42"/>
+          <p:cNvSpPr/>
+          <p:nvPr/>
+        </p:nvSpPr>
+        <p:spPr>
+          <a:xfrm>
+            <a:off x="320040" y="5312663"/>
+            <a:ext cx="54864" cy="384048"/>
+          </a:xfrm>
+          <a:prstGeom prst="rect">
+            <a:avLst/>
+          </a:prstGeom>
+          <a:solidFill>
+            <a:srgbClr val="F1C40F"/>
+          </a:solidFill>
+          <a:ln>
+            <a:noFill/>
+          </a:ln>
+        </p:spPr>
+        <p:style>
+          <a:lnRef idx="1">
+            <a:schemeClr val="accent1"/>
+          </a:lnRef>
+          <a:fillRef idx="3">
+            <a:schemeClr val="accent1"/>
+          </a:fillRef>
+          <a:effectRef idx="2">
+            <a:schemeClr val="accent1"/>
+          </a:effectRef>
+          <a:fontRef idx="minor">
+            <a:schemeClr val="lt1"/>
+          </a:fontRef>
+        </p:style>
+        <p:txBody>
+          <a:bodyPr rtlCol="0" anchor="ctr"/>
+          <a:lstStyle/>
+          <a:p>
+            <a:pPr algn="ctr"/>
+          </a:p>
+        </p:txBody>
+      </p:sp>
+      <p:sp>
+        <p:nvSpPr>
+          <p:cNvPr id="44" name="TextBox 43"/>
+          <p:cNvSpPr txBox="1"/>
+          <p:nvPr/>
+        </p:nvSpPr>
+        <p:spPr>
+          <a:xfrm>
+            <a:off x="502920" y="5385815"/>
+            <a:ext cx="4114800" cy="256032"/>
+          </a:xfrm>
+          <a:prstGeom prst="rect">
+            <a:avLst/>
+          </a:prstGeom>
+          <a:noFill/>
+        </p:spPr>
+        <p:txBody>
+          <a:bodyPr wrap="square">
+            <a:spAutoFit/>
+          </a:bodyPr>
+          <a:lstStyle/>
+          <a:p>
+            <a:pPr algn="l"/>
+            <a:r>
+              <a:rPr sz="1000" b="1" i="0">
+                <a:solidFill>
+                  <a:srgbClr val="003087"/>
+                </a:solidFill>
+                <a:latin typeface="Segoe UI"/>
+              </a:rPr>
+              <a:t>🕐  DEL — Don En Ligne</a:t>
+            </a:r>
+          </a:p>
+        </p:txBody>
+      </p:sp>
+      <p:sp>
+        <p:nvSpPr>
+          <p:cNvPr id="45" name="TextBox 44"/>
+          <p:cNvSpPr txBox="1"/>
+          <p:nvPr/>
+        </p:nvSpPr>
+        <p:spPr>
+          <a:xfrm>
+            <a:off x="4709160" y="5385815"/>
+            <a:ext cx="6949440" cy="256032"/>
+          </a:xfrm>
+          <a:prstGeom prst="rect">
+            <a:avLst/>
+          </a:prstGeom>
+          <a:noFill/>
+        </p:spPr>
+        <p:txBody>
+          <a:bodyPr wrap="square">
+            <a:spAutoFit/>
+          </a:bodyPr>
+          <a:lstStyle/>
+          <a:p>
+            <a:pPr algn="l"/>
+            <a:r>
+              <a:rPr sz="1000" b="0" i="0">
+                <a:solidFill>
+                  <a:srgbClr val="555555"/>
+                </a:solidFill>
+                <a:latin typeface="Segoe UI"/>
+              </a:rPr>
+              <a:t>Prêt à donner mais préfère le faire via lien web</a:t>
+            </a:r>
+          </a:p>
+        </p:txBody>
+      </p:sp>
+      <p:sp>
+        <p:nvSpPr>
+          <p:cNvPr id="46" name="Rectangle 45"/>
+          <p:cNvSpPr/>
+          <p:nvPr/>
+        </p:nvSpPr>
+        <p:spPr>
+          <a:xfrm>
+            <a:off x="320040" y="5705855"/>
+            <a:ext cx="11521440" cy="384048"/>
+          </a:xfrm>
+          <a:prstGeom prst="rect">
+            <a:avLst/>
+          </a:prstGeom>
+          <a:solidFill>
+            <a:srgbClr val="FDF0EF"/>
+          </a:solidFill>
+          <a:ln w="6350">
+            <a:solidFill>
+              <a:srgbClr val="DCE3F0"/>
+            </a:solidFill>
+          </a:ln>
+        </p:spPr>
+        <p:style>
+          <a:lnRef idx="1">
+            <a:schemeClr val="accent1"/>
+          </a:lnRef>
+          <a:fillRef idx="3">
+            <a:schemeClr val="accent1"/>
+          </a:fillRef>
+          <a:effectRef idx="2">
+            <a:schemeClr val="accent1"/>
+          </a:effectRef>
+          <a:fontRef idx="minor">
+            <a:schemeClr val="lt1"/>
+          </a:fontRef>
+        </p:style>
+        <p:txBody>
+          <a:bodyPr rtlCol="0" anchor="ctr"/>
+          <a:lstStyle/>
+          <a:p>
+            <a:pPr algn="ctr"/>
+          </a:p>
+        </p:txBody>
+      </p:sp>
+      <p:sp>
+        <p:nvSpPr>
+          <p:cNvPr id="47" name="Rectangle 46"/>
+          <p:cNvSpPr/>
+          <p:nvPr/>
+        </p:nvSpPr>
+        <p:spPr>
+          <a:xfrm>
+            <a:off x="320040" y="5705855"/>
+            <a:ext cx="54864" cy="384048"/>
+          </a:xfrm>
+          <a:prstGeom prst="rect">
+            <a:avLst/>
+          </a:prstGeom>
+          <a:solidFill>
+            <a:srgbClr val="E74C3C"/>
+          </a:solidFill>
+          <a:ln>
+            <a:noFill/>
+          </a:ln>
+        </p:spPr>
+        <p:style>
+          <a:lnRef idx="1">
+            <a:schemeClr val="accent1"/>
+          </a:lnRef>
+          <a:fillRef idx="3">
+            <a:schemeClr val="accent1"/>
+          </a:fillRef>
+          <a:effectRef idx="2">
+            <a:schemeClr val="accent1"/>
+          </a:effectRef>
+          <a:fontRef idx="minor">
+            <a:schemeClr val="lt1"/>
+          </a:fontRef>
+        </p:style>
+        <p:txBody>
+          <a:bodyPr rtlCol="0" anchor="ctr"/>
+          <a:lstStyle/>
+          <a:p>
+            <a:pPr algn="ctr"/>
+          </a:p>
+        </p:txBody>
+      </p:sp>
+      <p:sp>
+        <p:nvSpPr>
+          <p:cNvPr id="48" name="TextBox 47"/>
+          <p:cNvSpPr txBox="1"/>
+          <p:nvPr/>
+        </p:nvSpPr>
+        <p:spPr>
+          <a:xfrm>
+            <a:off x="502920" y="5779007"/>
+            <a:ext cx="4114800" cy="256032"/>
+          </a:xfrm>
+          <a:prstGeom prst="rect">
+            <a:avLst/>
+          </a:prstGeom>
+          <a:noFill/>
+        </p:spPr>
+        <p:txBody>
+          <a:bodyPr wrap="square">
+            <a:spAutoFit/>
+          </a:bodyPr>
+          <a:lstStyle/>
+          <a:p>
+            <a:pPr algn="l"/>
+            <a:r>
+              <a:rPr sz="1000" b="1" i="0">
+                <a:solidFill>
+                  <a:srgbClr val="003087"/>
+                </a:solidFill>
+                <a:latin typeface="Segoe UI"/>
+              </a:rPr>
+              <a:t>❌  RA — Refus Argumenté</a:t>
+            </a:r>
+          </a:p>
+        </p:txBody>
+      </p:sp>
+      <p:sp>
+        <p:nvSpPr>
+          <p:cNvPr id="49" name="TextBox 48"/>
+          <p:cNvSpPr txBox="1"/>
+          <p:nvPr/>
+        </p:nvSpPr>
+        <p:spPr>
+          <a:xfrm>
+            <a:off x="4709160" y="5779007"/>
+            <a:ext cx="6949440" cy="256032"/>
+          </a:xfrm>
+          <a:prstGeom prst="rect">
+            <a:avLst/>
+          </a:prstGeom>
+          <a:noFill/>
+        </p:spPr>
+        <p:txBody>
+          <a:bodyPr wrap="square">
+            <a:spAutoFit/>
+          </a:bodyPr>
+          <a:lstStyle/>
+          <a:p>
+            <a:pPr algn="l"/>
+            <a:r>
+              <a:rPr sz="1000" b="0" i="0">
+                <a:solidFill>
+                  <a:srgbClr val="555555"/>
+                </a:solidFill>
+                <a:latin typeface="Segoe UI"/>
+              </a:rPr>
+              <a:t>Refuse avec une raison valide — NE PLUS CONTACTER 4 mois UNICEF</a:t>
+            </a:r>
+          </a:p>
+        </p:txBody>
+      </p:sp>
+      <p:sp>
+        <p:nvSpPr>
+          <p:cNvPr id="50" name="Rectangle 49"/>
+          <p:cNvSpPr/>
+          <p:nvPr/>
+        </p:nvSpPr>
+        <p:spPr>
+          <a:xfrm>
+            <a:off x="320040" y="6099047"/>
+            <a:ext cx="11521440" cy="384048"/>
+          </a:xfrm>
+          <a:prstGeom prst="rect">
+            <a:avLst/>
+          </a:prstGeom>
+          <a:solidFill>
+            <a:srgbClr val="FDF0EF"/>
+          </a:solidFill>
+          <a:ln w="6350">
+            <a:solidFill>
+              <a:srgbClr val="DCE3F0"/>
+            </a:solidFill>
+          </a:ln>
+        </p:spPr>
+        <p:style>
+          <a:lnRef idx="1">
+            <a:schemeClr val="accent1"/>
+          </a:lnRef>
+          <a:fillRef idx="3">
+            <a:schemeClr val="accent1"/>
+          </a:fillRef>
+          <a:effectRef idx="2">
+            <a:schemeClr val="accent1"/>
+          </a:effectRef>
+          <a:fontRef idx="minor">
+            <a:schemeClr val="lt1"/>
+          </a:fontRef>
+        </p:style>
+        <p:txBody>
+          <a:bodyPr rtlCol="0" anchor="ctr"/>
+          <a:lstStyle/>
+          <a:p>
+            <a:pPr algn="ctr"/>
+          </a:p>
+        </p:txBody>
+      </p:sp>
+      <p:sp>
+        <p:nvSpPr>
+          <p:cNvPr id="51" name="Rectangle 50"/>
+          <p:cNvSpPr/>
+          <p:nvPr/>
+        </p:nvSpPr>
+        <p:spPr>
+          <a:xfrm>
+            <a:off x="320040" y="6099047"/>
+            <a:ext cx="54864" cy="384048"/>
+          </a:xfrm>
+          <a:prstGeom prst="rect">
+            <a:avLst/>
+          </a:prstGeom>
+          <a:solidFill>
+            <a:srgbClr val="E74C3C"/>
+          </a:solidFill>
+          <a:ln>
+            <a:noFill/>
+          </a:ln>
+        </p:spPr>
+        <p:style>
+          <a:lnRef idx="1">
+            <a:schemeClr val="accent1"/>
+          </a:lnRef>
+          <a:fillRef idx="3">
+            <a:schemeClr val="accent1"/>
+          </a:fillRef>
+          <a:effectRef idx="2">
+            <a:schemeClr val="accent1"/>
+          </a:effectRef>
+          <a:fontRef idx="minor">
+            <a:schemeClr val="lt1"/>
+          </a:fontRef>
+        </p:style>
+        <p:txBody>
+          <a:bodyPr rtlCol="0" anchor="ctr"/>
+          <a:lstStyle/>
+          <a:p>
+            <a:pPr algn="ctr"/>
+          </a:p>
+        </p:txBody>
+      </p:sp>
+      <p:sp>
+        <p:nvSpPr>
+          <p:cNvPr id="52" name="TextBox 51"/>
+          <p:cNvSpPr txBox="1"/>
+          <p:nvPr/>
+        </p:nvSpPr>
+        <p:spPr>
+          <a:xfrm>
+            <a:off x="502920" y="6172199"/>
+            <a:ext cx="4114800" cy="256032"/>
+          </a:xfrm>
+          <a:prstGeom prst="rect">
+            <a:avLst/>
+          </a:prstGeom>
+          <a:noFill/>
+        </p:spPr>
+        <p:txBody>
+          <a:bodyPr wrap="square">
+            <a:spAutoFit/>
+          </a:bodyPr>
+          <a:lstStyle/>
+          <a:p>
+            <a:pPr algn="l"/>
+            <a:r>
+              <a:rPr sz="1000" b="1" i="0">
+                <a:solidFill>
+                  <a:srgbClr val="003087"/>
+                </a:solidFill>
+                <a:latin typeface="Segoe UI"/>
+              </a:rPr>
+              <a:t>❌  RR — Refus de Répondre</a:t>
+            </a:r>
+          </a:p>
+        </p:txBody>
+      </p:sp>
+      <p:sp>
+        <p:nvSpPr>
+          <p:cNvPr id="53" name="TextBox 52"/>
+          <p:cNvSpPr txBox="1"/>
+          <p:nvPr/>
+        </p:nvSpPr>
+        <p:spPr>
+          <a:xfrm>
+            <a:off x="4709160" y="6172199"/>
+            <a:ext cx="6949440" cy="256032"/>
+          </a:xfrm>
+          <a:prstGeom prst="rect">
+            <a:avLst/>
+          </a:prstGeom>
+          <a:noFill/>
+        </p:spPr>
+        <p:txBody>
+          <a:bodyPr wrap="square">
+            <a:spAutoFit/>
+          </a:bodyPr>
+          <a:lstStyle/>
+          <a:p>
+            <a:pPr algn="l"/>
+            <a:r>
+              <a:rPr sz="1000" b="0" i="0">
+                <a:solidFill>
+                  <a:srgbClr val="555555"/>
+                </a:solidFill>
+                <a:latin typeface="Segoe UI"/>
+              </a:rPr>
+              <a:t>Raccroche sans raison / agressif — idem 4 mois UNICEF</a:t>
+            </a:r>
+          </a:p>
+        </p:txBody>
+      </p:sp>
+      <p:sp>
+        <p:nvSpPr>
+          <p:cNvPr id="54" name="Rectangle 53"/>
+          <p:cNvSpPr/>
+          <p:nvPr/>
+        </p:nvSpPr>
+        <p:spPr>
+          <a:xfrm>
+            <a:off x="320040" y="6565391"/>
+            <a:ext cx="11521440" cy="566928"/>
+          </a:xfrm>
+          <a:prstGeom prst="rect">
+            <a:avLst/>
+          </a:prstGeom>
+          <a:solidFill>
+            <a:srgbClr val="F7941D"/>
+          </a:solidFill>
+          <a:ln w="19050">
+            <a:solidFill>
+              <a:srgbClr val="F7611D"/>
+            </a:solidFill>
+          </a:ln>
+        </p:spPr>
+        <p:style>
+          <a:lnRef idx="1">
+            <a:schemeClr val="accent1"/>
+          </a:lnRef>
+          <a:fillRef idx="3">
+            <a:schemeClr val="accent1"/>
+          </a:fillRef>
+          <a:effectRef idx="2">
+            <a:schemeClr val="accent1"/>
+          </a:effectRef>
+          <a:fontRef idx="minor">
+            <a:schemeClr val="lt1"/>
+          </a:fontRef>
+        </p:style>
+        <p:txBody>
+          <a:bodyPr rtlCol="0" anchor="ctr"/>
+          <a:lstStyle/>
+          <a:p>
+            <a:pPr algn="ctr"/>
+          </a:p>
+        </p:txBody>
+      </p:sp>
+      <p:sp>
+        <p:nvSpPr>
+          <p:cNvPr id="55" name="TextBox 54"/>
+          <p:cNvSpPr txBox="1"/>
+          <p:nvPr/>
+        </p:nvSpPr>
+        <p:spPr>
+          <a:xfrm>
+            <a:off x="502920" y="6638543"/>
+            <a:ext cx="10972800" cy="420624"/>
+          </a:xfrm>
+          <a:prstGeom prst="rect">
+            <a:avLst/>
+          </a:prstGeom>
+          <a:noFill/>
+        </p:spPr>
+        <p:txBody>
+          <a:bodyPr wrap="square">
+            <a:spAutoFit/>
+          </a:bodyPr>
+          <a:lstStyle/>
+          <a:p>
+            <a:pPr algn="l"/>
+            <a:r>
+              <a:rPr sz="1000" b="1" i="0">
+                <a:solidFill>
+                  <a:srgbClr val="FFFFFF"/>
+                </a:solidFill>
+                <a:latin typeface="Segoe UI"/>
+              </a:rPr>
+              <a:t>EXEMPLE D'ERREUR DE QUALIFICATION : Un appel tombe sur un répondeur → Le fundraiser qualifie 'RA' (Refus Argumenté). FAUX ! Le répondeur = ABSENT. La personne n'a pas refusé — elle n'était pas là. Qualifier RA = perdre ce contact 4 mois.</a:t>
+            </a:r>
+          </a:p>
+        </p:txBody>
+      </p:sp>
+    </p:spTree>
+  </p:cSld>
+  <p:clrMapOvr>
+    <a:masterClrMapping/>
+  </p:clrMapOvr>
+</p:sld>
+</file>
+
+<file path=ppt/slides/slide15.xml><?xml version="1.0" encoding="utf-8"?>
+<p:sld xmlns:a="http://schemas.openxmlformats.org/drawingml/2006/main" xmlns:p="http://schemas.openxmlformats.org/presentationml/2006/main" xmlns:r="http://schemas.openxmlformats.org/officeDocument/2006/relationships">
+  <p:cSld>
+    <p:spTree>
+      <p:nvGrpSpPr>
+        <p:cNvPr id="1" name=""/>
+        <p:cNvGrpSpPr/>
+        <p:nvPr/>
+      </p:nvGrpSpPr>
+      <p:grpSpPr/>
+      <p:sp>
+        <p:nvSpPr>
+          <p:cNvPr id="2" name="Rectangle 1"/>
+          <p:cNvSpPr/>
+          <p:nvPr/>
+        </p:nvSpPr>
+        <p:spPr>
+          <a:xfrm>
+            <a:off x="0" y="0"/>
+            <a:ext cx="12188952" cy="1234440"/>
+          </a:xfrm>
+          <a:prstGeom prst="rect">
+            <a:avLst/>
+          </a:prstGeom>
+          <a:solidFill>
+            <a:srgbClr val="003087"/>
+          </a:solidFill>
+          <a:ln>
+            <a:noFill/>
+          </a:ln>
+        </p:spPr>
+        <p:style>
+          <a:lnRef idx="1">
+            <a:schemeClr val="accent1"/>
+          </a:lnRef>
+          <a:fillRef idx="3">
+            <a:schemeClr val="accent1"/>
+          </a:fillRef>
+          <a:effectRef idx="2">
+            <a:schemeClr val="accent1"/>
+          </a:effectRef>
+          <a:fontRef idx="minor">
+            <a:schemeClr val="lt1"/>
+          </a:fontRef>
+        </p:style>
+        <p:txBody>
+          <a:bodyPr rtlCol="0" anchor="ctr"/>
+          <a:lstStyle/>
+          <a:p>
+            <a:pPr algn="ctr"/>
+          </a:p>
+        </p:txBody>
+      </p:sp>
+      <p:sp>
+        <p:nvSpPr>
+          <p:cNvPr id="3" name="Rectangle 2"/>
+          <p:cNvSpPr/>
+          <p:nvPr/>
+        </p:nvSpPr>
+        <p:spPr>
+          <a:xfrm>
+            <a:off x="0" y="0"/>
+            <a:ext cx="12188952" cy="54864"/>
+          </a:xfrm>
+          <a:prstGeom prst="rect">
+            <a:avLst/>
+          </a:prstGeom>
+          <a:solidFill>
+            <a:srgbClr val="7C3AED"/>
+          </a:solidFill>
+          <a:ln>
+            <a:noFill/>
+          </a:ln>
+        </p:spPr>
+        <p:style>
+          <a:lnRef idx="1">
+            <a:schemeClr val="accent1"/>
+          </a:lnRef>
+          <a:fillRef idx="3">
+            <a:schemeClr val="accent1"/>
+          </a:fillRef>
+          <a:effectRef idx="2">
+            <a:schemeClr val="accent1"/>
+          </a:effectRef>
+          <a:fontRef idx="minor">
+            <a:schemeClr val="lt1"/>
+          </a:fontRef>
+        </p:style>
+        <p:txBody>
+          <a:bodyPr rtlCol="0" anchor="ctr"/>
+          <a:lstStyle/>
+          <a:p>
+            <a:pPr algn="ctr"/>
+          </a:p>
+        </p:txBody>
+      </p:sp>
+      <p:sp>
+        <p:nvSpPr>
+          <p:cNvPr id="4" name="TextBox 3"/>
+          <p:cNvSpPr txBox="1"/>
+          <p:nvPr/>
+        </p:nvSpPr>
+        <p:spPr>
+          <a:xfrm>
+            <a:off x="365760" y="91440"/>
+            <a:ext cx="11430000" cy="530352"/>
+          </a:xfrm>
+          <a:prstGeom prst="rect">
+            <a:avLst/>
+          </a:prstGeom>
+          <a:noFill/>
+        </p:spPr>
+        <p:txBody>
+          <a:bodyPr wrap="square">
+            <a:spAutoFit/>
+          </a:bodyPr>
+          <a:lstStyle/>
+          <a:p>
+            <a:pPr algn="l"/>
+            <a:r>
+              <a:rPr sz="2200" b="1" i="0">
+                <a:solidFill>
+                  <a:srgbClr val="FFFFFF"/>
+                </a:solidFill>
+                <a:latin typeface="Segoe UI"/>
+              </a:rPr>
+              <a:t>→  NOMENCLATURE COMPLÉMENTAIRE — J2</a:t>
+            </a:r>
+          </a:p>
+        </p:txBody>
+      </p:sp>
+      <p:sp>
+        <p:nvSpPr>
+          <p:cNvPr id="5" name="TextBox 4"/>
+          <p:cNvSpPr txBox="1"/>
+          <p:nvPr/>
+        </p:nvSpPr>
+        <p:spPr>
+          <a:xfrm>
+            <a:off x="365760" y="658368"/>
+            <a:ext cx="11430000" cy="402336"/>
+          </a:xfrm>
+          <a:prstGeom prst="rect">
+            <a:avLst/>
+          </a:prstGeom>
+          <a:noFill/>
+        </p:spPr>
+        <p:txBody>
+          <a:bodyPr wrap="square">
+            <a:spAutoFit/>
+          </a:bodyPr>
+          <a:lstStyle/>
+          <a:p>
+            <a:pPr algn="l"/>
+            <a:r>
+              <a:rPr sz="1200" b="0" i="1">
+                <a:solidFill>
+                  <a:srgbClr val="00AEEF"/>
+                </a:solidFill>
+                <a:latin typeface="Segoe UI"/>
+              </a:rPr>
+              <a:t>Nouveaux termes : ABSENT, CICR, Comité de la Charte, Particulier / Professionnel</a:t>
+            </a:r>
+          </a:p>
+        </p:txBody>
+      </p:sp>
+      <p:sp>
+        <p:nvSpPr>
+          <p:cNvPr id="6" name="Rectangle 5"/>
+          <p:cNvSpPr/>
+          <p:nvPr/>
+        </p:nvSpPr>
+        <p:spPr>
+          <a:xfrm>
+            <a:off x="0" y="6492240"/>
+            <a:ext cx="12188952" cy="365760"/>
+          </a:xfrm>
+          <a:prstGeom prst="rect">
+            <a:avLst/>
+          </a:prstGeom>
+          <a:solidFill>
+            <a:srgbClr val="003087"/>
+          </a:solidFill>
+          <a:ln>
+            <a:noFill/>
+          </a:ln>
+        </p:spPr>
+        <p:style>
+          <a:lnRef idx="1">
+            <a:schemeClr val="accent1"/>
+          </a:lnRef>
+          <a:fillRef idx="3">
+            <a:schemeClr val="accent1"/>
+          </a:fillRef>
+          <a:effectRef idx="2">
+            <a:schemeClr val="accent1"/>
+          </a:effectRef>
+          <a:fontRef idx="minor">
+            <a:schemeClr val="lt1"/>
+          </a:fontRef>
+        </p:style>
+        <p:txBody>
+          <a:bodyPr rtlCol="0" anchor="ctr"/>
+          <a:lstStyle/>
+          <a:p>
+            <a:pPr algn="ctr"/>
+          </a:p>
+        </p:txBody>
+      </p:sp>
+      <p:sp>
+        <p:nvSpPr>
+          <p:cNvPr id="7" name="TextBox 6"/>
+          <p:cNvSpPr txBox="1"/>
+          <p:nvPr/>
+        </p:nvSpPr>
+        <p:spPr>
+          <a:xfrm>
+            <a:off x="274320" y="6510528"/>
+            <a:ext cx="11640312" cy="310896"/>
+          </a:xfrm>
+          <a:prstGeom prst="rect">
+            <a:avLst/>
+          </a:prstGeom>
+          <a:noFill/>
+        </p:spPr>
+        <p:txBody>
+          <a:bodyPr wrap="square">
+            <a:spAutoFit/>
+          </a:bodyPr>
+          <a:lstStyle/>
+          <a:p>
+            <a:pPr algn="ctr"/>
+            <a:r>
+              <a:rPr sz="900" b="0" i="0">
+                <a:solidFill>
+                  <a:srgbClr val="AABBDD"/>
+                </a:solidFill>
+                <a:latin typeface="Segoe UI"/>
+              </a:rPr>
+              <a:t>J2 FIM — Matinée  |  Fidelis × SHY Performance  |  Le Monde Associatif &amp; Humanitaire</a:t>
+            </a:r>
+          </a:p>
+        </p:txBody>
+      </p:sp>
+      <p:sp>
+        <p:nvSpPr>
+          <p:cNvPr id="8" name="Rectangle 7"/>
+          <p:cNvSpPr/>
+          <p:nvPr/>
+        </p:nvSpPr>
+        <p:spPr>
+          <a:xfrm>
+            <a:off x="320040" y="1371600"/>
+            <a:ext cx="11521440" cy="1234440"/>
+          </a:xfrm>
+          <a:prstGeom prst="rect">
+            <a:avLst/>
+          </a:prstGeom>
+          <a:solidFill>
+            <a:srgbClr val="FFFFFF"/>
+          </a:solidFill>
+          <a:ln w="15240">
+            <a:solidFill>
+              <a:srgbClr val="0D9488"/>
+            </a:solidFill>
+          </a:ln>
+        </p:spPr>
+        <p:style>
+          <a:lnRef idx="1">
+            <a:schemeClr val="accent1"/>
+          </a:lnRef>
+          <a:fillRef idx="3">
+            <a:schemeClr val="accent1"/>
+          </a:fillRef>
+          <a:effectRef idx="2">
+            <a:schemeClr val="accent1"/>
+          </a:effectRef>
+          <a:fontRef idx="minor">
+            <a:schemeClr val="lt1"/>
+          </a:fontRef>
+        </p:style>
+        <p:txBody>
+          <a:bodyPr rtlCol="0" anchor="ctr"/>
+          <a:lstStyle/>
+          <a:p>
+            <a:pPr algn="ctr"/>
+          </a:p>
+        </p:txBody>
+      </p:sp>
+      <p:sp>
+        <p:nvSpPr>
+          <p:cNvPr id="9" name="Rectangle 8"/>
+          <p:cNvSpPr/>
+          <p:nvPr/>
+        </p:nvSpPr>
+        <p:spPr>
+          <a:xfrm>
+            <a:off x="320040" y="1371600"/>
+            <a:ext cx="54864" cy="1234440"/>
+          </a:xfrm>
+          <a:prstGeom prst="rect">
+            <a:avLst/>
+          </a:prstGeom>
+          <a:solidFill>
+            <a:srgbClr val="0D9488"/>
+          </a:solidFill>
+          <a:ln>
+            <a:noFill/>
+          </a:ln>
+        </p:spPr>
+        <p:style>
+          <a:lnRef idx="1">
+            <a:schemeClr val="accent1"/>
+          </a:lnRef>
+          <a:fillRef idx="3">
+            <a:schemeClr val="accent1"/>
+          </a:fillRef>
+          <a:effectRef idx="2">
+            <a:schemeClr val="accent1"/>
+          </a:effectRef>
+          <a:fontRef idx="minor">
+            <a:schemeClr val="lt1"/>
+          </a:fontRef>
+        </p:style>
+        <p:txBody>
+          <a:bodyPr rtlCol="0" anchor="ctr"/>
+          <a:lstStyle/>
+          <a:p>
+            <a:pPr algn="ctr"/>
+          </a:p>
+        </p:txBody>
+      </p:sp>
+      <p:sp>
+        <p:nvSpPr>
+          <p:cNvPr id="10" name="Rectangle 9"/>
+          <p:cNvSpPr/>
+          <p:nvPr/>
+        </p:nvSpPr>
+        <p:spPr>
+          <a:xfrm>
+            <a:off x="374904" y="1371600"/>
+            <a:ext cx="1920240" cy="1234440"/>
+          </a:xfrm>
+          <a:prstGeom prst="rect">
+            <a:avLst/>
+          </a:prstGeom>
+          <a:solidFill>
+            <a:srgbClr val="F0F4F9"/>
+          </a:solidFill>
+          <a:ln>
+            <a:noFill/>
+          </a:ln>
+        </p:spPr>
+        <p:style>
+          <a:lnRef idx="1">
+            <a:schemeClr val="accent1"/>
+          </a:lnRef>
+          <a:fillRef idx="3">
+            <a:schemeClr val="accent1"/>
+          </a:fillRef>
+          <a:effectRef idx="2">
+            <a:schemeClr val="accent1"/>
+          </a:effectRef>
+          <a:fontRef idx="minor">
+            <a:schemeClr val="lt1"/>
+          </a:fontRef>
+        </p:style>
+        <p:txBody>
+          <a:bodyPr rtlCol="0" anchor="ctr"/>
+          <a:lstStyle/>
+          <a:p>
+            <a:pPr algn="ctr"/>
+          </a:p>
+        </p:txBody>
+      </p:sp>
+      <p:sp>
+        <p:nvSpPr>
+          <p:cNvPr id="11" name="TextBox 10"/>
+          <p:cNvSpPr txBox="1"/>
+          <p:nvPr/>
+        </p:nvSpPr>
+        <p:spPr>
+          <a:xfrm>
+            <a:off x="457200" y="1444752"/>
+            <a:ext cx="1783080" cy="347472"/>
+          </a:xfrm>
+          <a:prstGeom prst="rect">
+            <a:avLst/>
+          </a:prstGeom>
+          <a:noFill/>
+        </p:spPr>
+        <p:txBody>
+          <a:bodyPr wrap="square">
+            <a:spAutoFit/>
+          </a:bodyPr>
+          <a:lstStyle/>
+          <a:p>
+            <a:pPr algn="l"/>
+            <a:r>
+              <a:rPr sz="1300" b="1" i="0">
+                <a:solidFill>
+                  <a:srgbClr val="0D9488"/>
+                </a:solidFill>
+                <a:latin typeface="Segoe UI"/>
+              </a:rPr>
+              <a:t>ABSENT</a:t>
+            </a:r>
+          </a:p>
+        </p:txBody>
+      </p:sp>
+      <p:sp>
+        <p:nvSpPr>
+          <p:cNvPr id="12" name="TextBox 11"/>
+          <p:cNvSpPr txBox="1"/>
+          <p:nvPr/>
+        </p:nvSpPr>
+        <p:spPr>
+          <a:xfrm>
+            <a:off x="457200" y="1828800"/>
+            <a:ext cx="1783080" cy="475488"/>
+          </a:xfrm>
+          <a:prstGeom prst="rect">
+            <a:avLst/>
+          </a:prstGeom>
+          <a:noFill/>
+        </p:spPr>
+        <p:txBody>
+          <a:bodyPr wrap="square">
+            <a:spAutoFit/>
+          </a:bodyPr>
+          <a:lstStyle/>
+          <a:p>
+            <a:pPr algn="l"/>
+            <a:r>
+              <a:rPr sz="800" b="0" i="1">
+                <a:solidFill>
+                  <a:srgbClr val="555555"/>
+                </a:solidFill>
+                <a:latin typeface="Segoe UI"/>
+              </a:rPr>
+              <a:t>Qualification utilisée lorsqu'un appel n'aboutit pas à une identification réelle de la personne.</a:t>
+            </a:r>
+          </a:p>
+        </p:txBody>
+      </p:sp>
+      <p:sp>
+        <p:nvSpPr>
+          <p:cNvPr id="13" name="TextBox 12"/>
+          <p:cNvSpPr txBox="1"/>
+          <p:nvPr/>
+        </p:nvSpPr>
+        <p:spPr>
+          <a:xfrm>
+            <a:off x="2423160" y="1426464"/>
+            <a:ext cx="6858000" cy="475488"/>
+          </a:xfrm>
+          <a:prstGeom prst="rect">
+            <a:avLst/>
+          </a:prstGeom>
+          <a:noFill/>
+        </p:spPr>
+        <p:txBody>
+          <a:bodyPr wrap="square">
+            <a:spAutoFit/>
+          </a:bodyPr>
+          <a:lstStyle/>
+          <a:p>
+            <a:pPr algn="l"/>
+            <a:r>
+              <a:rPr sz="950" b="0" i="0">
+                <a:solidFill>
+                  <a:srgbClr val="555555"/>
+                </a:solidFill>
+                <a:latin typeface="Segoe UI"/>
+              </a:rPr>
+              <a:t>Répondeur téléphonique — NRP (No Response / pas de réponse) — Raccroché SANS identification de l'interlocuteur.</a:t>
+            </a:r>
+          </a:p>
+        </p:txBody>
+      </p:sp>
+      <p:sp>
+        <p:nvSpPr>
+          <p:cNvPr id="14" name="Rectangle 13"/>
+          <p:cNvSpPr/>
+          <p:nvPr/>
+        </p:nvSpPr>
+        <p:spPr>
+          <a:xfrm>
+            <a:off x="9372600" y="1426464"/>
+            <a:ext cx="2377440" cy="1115568"/>
+          </a:xfrm>
+          <a:prstGeom prst="rect">
+            <a:avLst/>
+          </a:prstGeom>
+          <a:solidFill>
+            <a:srgbClr val="F0F4F9"/>
+          </a:solidFill>
+          <a:ln>
+            <a:noFill/>
+          </a:ln>
+        </p:spPr>
+        <p:style>
+          <a:lnRef idx="1">
+            <a:schemeClr val="accent1"/>
+          </a:lnRef>
+          <a:fillRef idx="3">
+            <a:schemeClr val="accent1"/>
+          </a:fillRef>
+          <a:effectRef idx="2">
+            <a:schemeClr val="accent1"/>
+          </a:effectRef>
+          <a:fontRef idx="minor">
+            <a:schemeClr val="lt1"/>
+          </a:fontRef>
+        </p:style>
+        <p:txBody>
+          <a:bodyPr rtlCol="0" anchor="ctr"/>
+          <a:lstStyle/>
+          <a:p>
+            <a:pPr algn="ctr"/>
+          </a:p>
+        </p:txBody>
+      </p:sp>
+      <p:sp>
+        <p:nvSpPr>
+          <p:cNvPr id="15" name="TextBox 14"/>
+          <p:cNvSpPr txBox="1"/>
+          <p:nvPr/>
+        </p:nvSpPr>
+        <p:spPr>
+          <a:xfrm>
+            <a:off x="9464040" y="1463040"/>
+            <a:ext cx="2194560" cy="1024128"/>
+          </a:xfrm>
+          <a:prstGeom prst="rect">
+            <a:avLst/>
+          </a:prstGeom>
+          <a:noFill/>
+        </p:spPr>
+        <p:txBody>
+          <a:bodyPr wrap="square">
+            <a:spAutoFit/>
+          </a:bodyPr>
+          <a:lstStyle/>
+          <a:p>
+            <a:pPr algn="l"/>
+            <a:r>
+              <a:rPr sz="850" b="0" i="0">
+                <a:solidFill>
+                  <a:srgbClr val="0D9488"/>
+                </a:solidFill>
+                <a:latin typeface="Segoe UI"/>
+              </a:rPr>
+              <a:t>⚡ À NE PAS CONFONDRE avec RA (Refus Argumenté) ou RR (Refus de Répondre).
+L'ABSENT doit être recontacté — il n'a pas refusé, il n'était simplement pas disponible.</a:t>
+            </a:r>
+          </a:p>
+        </p:txBody>
+      </p:sp>
+      <p:sp>
+        <p:nvSpPr>
+          <p:cNvPr id="16" name="Rectangle 15"/>
+          <p:cNvSpPr/>
+          <p:nvPr/>
+        </p:nvSpPr>
+        <p:spPr>
+          <a:xfrm>
+            <a:off x="320040" y="2697480"/>
+            <a:ext cx="11521440" cy="1234440"/>
+          </a:xfrm>
+          <a:prstGeom prst="rect">
+            <a:avLst/>
+          </a:prstGeom>
+          <a:solidFill>
+            <a:srgbClr val="FFFFFF"/>
+          </a:solidFill>
+          <a:ln w="15240">
+            <a:solidFill>
+              <a:srgbClr val="E74C3C"/>
+            </a:solidFill>
+          </a:ln>
+        </p:spPr>
+        <p:style>
+          <a:lnRef idx="1">
+            <a:schemeClr val="accent1"/>
+          </a:lnRef>
+          <a:fillRef idx="3">
+            <a:schemeClr val="accent1"/>
+          </a:fillRef>
+          <a:effectRef idx="2">
+            <a:schemeClr val="accent1"/>
+          </a:effectRef>
+          <a:fontRef idx="minor">
+            <a:schemeClr val="lt1"/>
+          </a:fontRef>
+        </p:style>
+        <p:txBody>
+          <a:bodyPr rtlCol="0" anchor="ctr"/>
+          <a:lstStyle/>
+          <a:p>
+            <a:pPr algn="ctr"/>
+          </a:p>
+        </p:txBody>
+      </p:sp>
+      <p:sp>
+        <p:nvSpPr>
+          <p:cNvPr id="17" name="Rectangle 16"/>
+          <p:cNvSpPr/>
+          <p:nvPr/>
+        </p:nvSpPr>
+        <p:spPr>
+          <a:xfrm>
+            <a:off x="320040" y="2697480"/>
+            <a:ext cx="54864" cy="1234440"/>
+          </a:xfrm>
+          <a:prstGeom prst="rect">
+            <a:avLst/>
+          </a:prstGeom>
+          <a:solidFill>
+            <a:srgbClr val="E74C3C"/>
+          </a:solidFill>
+          <a:ln>
+            <a:noFill/>
+          </a:ln>
+        </p:spPr>
+        <p:style>
+          <a:lnRef idx="1">
+            <a:schemeClr val="accent1"/>
+          </a:lnRef>
+          <a:fillRef idx="3">
+            <a:schemeClr val="accent1"/>
+          </a:fillRef>
+          <a:effectRef idx="2">
+            <a:schemeClr val="accent1"/>
+          </a:effectRef>
+          <a:fontRef idx="minor">
+            <a:schemeClr val="lt1"/>
+          </a:fontRef>
+        </p:style>
+        <p:txBody>
+          <a:bodyPr rtlCol="0" anchor="ctr"/>
+          <a:lstStyle/>
+          <a:p>
+            <a:pPr algn="ctr"/>
+          </a:p>
+        </p:txBody>
+      </p:sp>
+      <p:sp>
+        <p:nvSpPr>
+          <p:cNvPr id="18" name="Rectangle 17"/>
+          <p:cNvSpPr/>
+          <p:nvPr/>
+        </p:nvSpPr>
+        <p:spPr>
+          <a:xfrm>
+            <a:off x="374904" y="2697480"/>
+            <a:ext cx="1920240" cy="1234440"/>
+          </a:xfrm>
+          <a:prstGeom prst="rect">
+            <a:avLst/>
+          </a:prstGeom>
+          <a:solidFill>
+            <a:srgbClr val="F0F4F9"/>
+          </a:solidFill>
+          <a:ln>
+            <a:noFill/>
+          </a:ln>
+        </p:spPr>
+        <p:style>
+          <a:lnRef idx="1">
+            <a:schemeClr val="accent1"/>
+          </a:lnRef>
+          <a:fillRef idx="3">
+            <a:schemeClr val="accent1"/>
+          </a:fillRef>
+          <a:effectRef idx="2">
+            <a:schemeClr val="accent1"/>
+          </a:effectRef>
+          <a:fontRef idx="minor">
+            <a:schemeClr val="lt1"/>
+          </a:fontRef>
+        </p:style>
+        <p:txBody>
+          <a:bodyPr rtlCol="0" anchor="ctr"/>
+          <a:lstStyle/>
+          <a:p>
+            <a:pPr algn="ctr"/>
+          </a:p>
+        </p:txBody>
+      </p:sp>
+      <p:sp>
+        <p:nvSpPr>
+          <p:cNvPr id="19" name="TextBox 18"/>
+          <p:cNvSpPr txBox="1"/>
+          <p:nvPr/>
+        </p:nvSpPr>
+        <p:spPr>
+          <a:xfrm>
+            <a:off x="457200" y="2770632"/>
+            <a:ext cx="1783080" cy="347472"/>
+          </a:xfrm>
+          <a:prstGeom prst="rect">
+            <a:avLst/>
+          </a:prstGeom>
+          <a:noFill/>
+        </p:spPr>
+        <p:txBody>
+          <a:bodyPr wrap="square">
+            <a:spAutoFit/>
+          </a:bodyPr>
+          <a:lstStyle/>
+          <a:p>
+            <a:pPr algn="l"/>
+            <a:r>
+              <a:rPr sz="1300" b="1" i="0">
+                <a:solidFill>
+                  <a:srgbClr val="E74C3C"/>
+                </a:solidFill>
+                <a:latin typeface="Segoe UI"/>
+              </a:rPr>
+              <a:t>CICR</a:t>
+            </a:r>
+          </a:p>
+        </p:txBody>
+      </p:sp>
+      <p:sp>
+        <p:nvSpPr>
+          <p:cNvPr id="20" name="TextBox 19"/>
+          <p:cNvSpPr txBox="1"/>
+          <p:nvPr/>
+        </p:nvSpPr>
+        <p:spPr>
+          <a:xfrm>
+            <a:off x="457200" y="3154680"/>
+            <a:ext cx="1783080" cy="475488"/>
+          </a:xfrm>
+          <a:prstGeom prst="rect">
+            <a:avLst/>
+          </a:prstGeom>
+          <a:noFill/>
+        </p:spPr>
+        <p:txBody>
+          <a:bodyPr wrap="square">
+            <a:spAutoFit/>
+          </a:bodyPr>
+          <a:lstStyle/>
+          <a:p>
+            <a:pPr algn="l"/>
+            <a:r>
+              <a:rPr sz="800" b="0" i="1">
+                <a:solidFill>
+                  <a:srgbClr val="555555"/>
+                </a:solidFill>
+                <a:latin typeface="Segoe UI"/>
+              </a:rPr>
+              <a:t>Comité International de la Croix-Rouge — organisation humanitaire fondée à Genève en 1863.</a:t>
+            </a:r>
+          </a:p>
+        </p:txBody>
+      </p:sp>
+      <p:sp>
+        <p:nvSpPr>
+          <p:cNvPr id="21" name="TextBox 20"/>
+          <p:cNvSpPr txBox="1"/>
+          <p:nvPr/>
+        </p:nvSpPr>
+        <p:spPr>
+          <a:xfrm>
+            <a:off x="2423160" y="2752344"/>
+            <a:ext cx="6858000" cy="475488"/>
+          </a:xfrm>
+          <a:prstGeom prst="rect">
+            <a:avLst/>
+          </a:prstGeom>
+          <a:noFill/>
+        </p:spPr>
+        <p:txBody>
+          <a:bodyPr wrap="square">
+            <a:spAutoFit/>
+          </a:bodyPr>
+          <a:lstStyle/>
+          <a:p>
+            <a:pPr algn="l"/>
+            <a:r>
+              <a:rPr sz="950" b="0" i="0">
+                <a:solidFill>
+                  <a:srgbClr val="555555"/>
+                </a:solidFill>
+                <a:latin typeface="Segoe UI"/>
+              </a:rPr>
+              <a:t>Agit EXCLUSIVEMENT dans les zones de CONFLIT armé : protection des prisonniers de guerre, échange d'otages, visites aux détenus, aide aux civils victimes de guerre.</a:t>
+            </a:r>
+          </a:p>
+        </p:txBody>
+      </p:sp>
+      <p:sp>
+        <p:nvSpPr>
+          <p:cNvPr id="22" name="Rectangle 21"/>
+          <p:cNvSpPr/>
+          <p:nvPr/>
+        </p:nvSpPr>
+        <p:spPr>
+          <a:xfrm>
+            <a:off x="9372600" y="2752344"/>
+            <a:ext cx="2377440" cy="1115568"/>
+          </a:xfrm>
+          <a:prstGeom prst="rect">
+            <a:avLst/>
+          </a:prstGeom>
+          <a:solidFill>
+            <a:srgbClr val="F0F4F9"/>
+          </a:solidFill>
+          <a:ln>
+            <a:noFill/>
+          </a:ln>
+        </p:spPr>
+        <p:style>
+          <a:lnRef idx="1">
+            <a:schemeClr val="accent1"/>
+          </a:lnRef>
+          <a:fillRef idx="3">
+            <a:schemeClr val="accent1"/>
+          </a:fillRef>
+          <a:effectRef idx="2">
+            <a:schemeClr val="accent1"/>
+          </a:effectRef>
+          <a:fontRef idx="minor">
+            <a:schemeClr val="lt1"/>
+          </a:fontRef>
+        </p:style>
+        <p:txBody>
+          <a:bodyPr rtlCol="0" anchor="ctr"/>
+          <a:lstStyle/>
+          <a:p>
+            <a:pPr algn="ctr"/>
+          </a:p>
+        </p:txBody>
+      </p:sp>
+      <p:sp>
+        <p:nvSpPr>
+          <p:cNvPr id="23" name="TextBox 22"/>
+          <p:cNvSpPr txBox="1"/>
+          <p:nvPr/>
+        </p:nvSpPr>
+        <p:spPr>
+          <a:xfrm>
+            <a:off x="9464040" y="2788920"/>
+            <a:ext cx="2194560" cy="1024128"/>
+          </a:xfrm>
+          <a:prstGeom prst="rect">
+            <a:avLst/>
+          </a:prstGeom>
+          <a:noFill/>
+        </p:spPr>
+        <p:txBody>
+          <a:bodyPr wrap="square">
+            <a:spAutoFit/>
+          </a:bodyPr>
+          <a:lstStyle/>
+          <a:p>
+            <a:pPr algn="l"/>
+            <a:r>
+              <a:rPr sz="850" b="0" i="0">
+                <a:solidFill>
+                  <a:srgbClr val="E74C3C"/>
+                </a:solidFill>
+                <a:latin typeface="Segoe UI"/>
+              </a:rPr>
+              <a:t>⚡ DISTINCT de la Croix-Rouge française (action nationale, catastrophes) et de l'UNICEF (enfance, développement).</a:t>
+            </a:r>
+          </a:p>
+        </p:txBody>
+      </p:sp>
+      <p:sp>
+        <p:nvSpPr>
+          <p:cNvPr id="24" name="Rectangle 23"/>
+          <p:cNvSpPr/>
+          <p:nvPr/>
+        </p:nvSpPr>
+        <p:spPr>
+          <a:xfrm>
+            <a:off x="320040" y="4023360"/>
+            <a:ext cx="11521440" cy="1234440"/>
+          </a:xfrm>
+          <a:prstGeom prst="rect">
+            <a:avLst/>
+          </a:prstGeom>
+          <a:solidFill>
+            <a:srgbClr val="FFFFFF"/>
+          </a:solidFill>
+          <a:ln w="15240">
+            <a:solidFill>
+              <a:srgbClr val="0057B8"/>
+            </a:solidFill>
+          </a:ln>
+        </p:spPr>
+        <p:style>
+          <a:lnRef idx="1">
+            <a:schemeClr val="accent1"/>
+          </a:lnRef>
+          <a:fillRef idx="3">
+            <a:schemeClr val="accent1"/>
+          </a:fillRef>
+          <a:effectRef idx="2">
+            <a:schemeClr val="accent1"/>
+          </a:effectRef>
+          <a:fontRef idx="minor">
+            <a:schemeClr val="lt1"/>
+          </a:fontRef>
+        </p:style>
+        <p:txBody>
+          <a:bodyPr rtlCol="0" anchor="ctr"/>
+          <a:lstStyle/>
+          <a:p>
+            <a:pPr algn="ctr"/>
+          </a:p>
+        </p:txBody>
+      </p:sp>
+      <p:sp>
+        <p:nvSpPr>
+          <p:cNvPr id="25" name="Rectangle 24"/>
+          <p:cNvSpPr/>
+          <p:nvPr/>
+        </p:nvSpPr>
+        <p:spPr>
+          <a:xfrm>
+            <a:off x="320040" y="4023360"/>
+            <a:ext cx="54864" cy="1234440"/>
+          </a:xfrm>
+          <a:prstGeom prst="rect">
+            <a:avLst/>
+          </a:prstGeom>
+          <a:solidFill>
+            <a:srgbClr val="0057B8"/>
+          </a:solidFill>
+          <a:ln>
+            <a:noFill/>
+          </a:ln>
+        </p:spPr>
+        <p:style>
+          <a:lnRef idx="1">
+            <a:schemeClr val="accent1"/>
+          </a:lnRef>
+          <a:fillRef idx="3">
+            <a:schemeClr val="accent1"/>
+          </a:fillRef>
+          <a:effectRef idx="2">
+            <a:schemeClr val="accent1"/>
+          </a:effectRef>
+          <a:fontRef idx="minor">
+            <a:schemeClr val="lt1"/>
+          </a:fontRef>
+        </p:style>
+        <p:txBody>
+          <a:bodyPr rtlCol="0" anchor="ctr"/>
+          <a:lstStyle/>
+          <a:p>
+            <a:pPr algn="ctr"/>
+          </a:p>
+        </p:txBody>
+      </p:sp>
+      <p:sp>
+        <p:nvSpPr>
+          <p:cNvPr id="26" name="Rectangle 25"/>
+          <p:cNvSpPr/>
+          <p:nvPr/>
+        </p:nvSpPr>
+        <p:spPr>
+          <a:xfrm>
+            <a:off x="374904" y="4023360"/>
+            <a:ext cx="1920240" cy="1234440"/>
+          </a:xfrm>
+          <a:prstGeom prst="rect">
+            <a:avLst/>
+          </a:prstGeom>
+          <a:solidFill>
+            <a:srgbClr val="F0F4F9"/>
+          </a:solidFill>
+          <a:ln>
+            <a:noFill/>
+          </a:ln>
+        </p:spPr>
+        <p:style>
+          <a:lnRef idx="1">
+            <a:schemeClr val="accent1"/>
+          </a:lnRef>
+          <a:fillRef idx="3">
+            <a:schemeClr val="accent1"/>
+          </a:fillRef>
+          <a:effectRef idx="2">
+            <a:schemeClr val="accent1"/>
+          </a:effectRef>
+          <a:fontRef idx="minor">
+            <a:schemeClr val="lt1"/>
+          </a:fontRef>
+        </p:style>
+        <p:txBody>
+          <a:bodyPr rtlCol="0" anchor="ctr"/>
+          <a:lstStyle/>
+          <a:p>
+            <a:pPr algn="ctr"/>
+          </a:p>
+        </p:txBody>
+      </p:sp>
+      <p:sp>
+        <p:nvSpPr>
+          <p:cNvPr id="27" name="TextBox 26"/>
+          <p:cNvSpPr txBox="1"/>
+          <p:nvPr/>
+        </p:nvSpPr>
+        <p:spPr>
+          <a:xfrm>
+            <a:off x="457200" y="4096512"/>
+            <a:ext cx="1783080" cy="347472"/>
+          </a:xfrm>
+          <a:prstGeom prst="rect">
+            <a:avLst/>
+          </a:prstGeom>
+          <a:noFill/>
+        </p:spPr>
+        <p:txBody>
+          <a:bodyPr wrap="square">
+            <a:spAutoFit/>
+          </a:bodyPr>
+          <a:lstStyle/>
+          <a:p>
+            <a:pPr algn="l"/>
+            <a:r>
+              <a:rPr sz="1300" b="1" i="0">
+                <a:solidFill>
+                  <a:srgbClr val="0057B8"/>
+                </a:solidFill>
+                <a:latin typeface="Segoe UI"/>
+              </a:rPr>
+              <a:t>COMITÉ DE LA CHARTE</a:t>
+            </a:r>
+          </a:p>
+        </p:txBody>
+      </p:sp>
+      <p:sp>
+        <p:nvSpPr>
+          <p:cNvPr id="28" name="TextBox 27"/>
+          <p:cNvSpPr txBox="1"/>
+          <p:nvPr/>
+        </p:nvSpPr>
+        <p:spPr>
+          <a:xfrm>
+            <a:off x="457200" y="4480560"/>
+            <a:ext cx="1783080" cy="475488"/>
+          </a:xfrm>
+          <a:prstGeom prst="rect">
+            <a:avLst/>
+          </a:prstGeom>
+          <a:noFill/>
+        </p:spPr>
+        <p:txBody>
+          <a:bodyPr wrap="square">
+            <a:spAutoFit/>
+          </a:bodyPr>
+          <a:lstStyle/>
+          <a:p>
+            <a:pPr algn="l"/>
+            <a:r>
+              <a:rPr sz="800" b="0" i="1">
+                <a:solidFill>
+                  <a:srgbClr val="555555"/>
+                </a:solidFill>
+                <a:latin typeface="Segoe UI"/>
+              </a:rPr>
+              <a:t>Comité de la Charte du Don en Confiance — organisme de régulation et de contrôle du secteur associatif.</a:t>
+            </a:r>
+          </a:p>
+        </p:txBody>
+      </p:sp>
+      <p:sp>
+        <p:nvSpPr>
+          <p:cNvPr id="29" name="TextBox 28"/>
+          <p:cNvSpPr txBox="1"/>
+          <p:nvPr/>
+        </p:nvSpPr>
+        <p:spPr>
+          <a:xfrm>
+            <a:off x="2423160" y="4078224"/>
+            <a:ext cx="6858000" cy="475488"/>
+          </a:xfrm>
+          <a:prstGeom prst="rect">
+            <a:avLst/>
+          </a:prstGeom>
+          <a:noFill/>
+        </p:spPr>
+        <p:txBody>
+          <a:bodyPr wrap="square">
+            <a:spAutoFit/>
+          </a:bodyPr>
+          <a:lstStyle/>
+          <a:p>
+            <a:pPr algn="l"/>
+            <a:r>
+              <a:rPr sz="950" b="0" i="0">
+                <a:solidFill>
+                  <a:srgbClr val="555555"/>
+                </a:solidFill>
+                <a:latin typeface="Segoe UI"/>
+              </a:rPr>
+              <a:t>Créé en 1989, renforcé après l'Affaire ARC (1996). Délivre le label « Don en Confiance ».
+Renforce le contrôle de l'État sur les associations : audits annuels obligatoires, publication des comptes, transparence sur l'utilisation des dons. UNICEF France est membre labellisé.</a:t>
+            </a:r>
+          </a:p>
+        </p:txBody>
+      </p:sp>
+      <p:sp>
+        <p:nvSpPr>
+          <p:cNvPr id="30" name="Rectangle 29"/>
+          <p:cNvSpPr/>
+          <p:nvPr/>
+        </p:nvSpPr>
+        <p:spPr>
+          <a:xfrm>
+            <a:off x="9372600" y="4078224"/>
+            <a:ext cx="2377440" cy="1115568"/>
+          </a:xfrm>
+          <a:prstGeom prst="rect">
+            <a:avLst/>
+          </a:prstGeom>
+          <a:solidFill>
+            <a:srgbClr val="F0F4F9"/>
+          </a:solidFill>
+          <a:ln>
+            <a:noFill/>
+          </a:ln>
+        </p:spPr>
+        <p:style>
+          <a:lnRef idx="1">
+            <a:schemeClr val="accent1"/>
+          </a:lnRef>
+          <a:fillRef idx="3">
+            <a:schemeClr val="accent1"/>
+          </a:fillRef>
+          <a:effectRef idx="2">
+            <a:schemeClr val="accent1"/>
+          </a:effectRef>
+          <a:fontRef idx="minor">
+            <a:schemeClr val="lt1"/>
+          </a:fontRef>
+        </p:style>
+        <p:txBody>
+          <a:bodyPr rtlCol="0" anchor="ctr"/>
+          <a:lstStyle/>
+          <a:p>
+            <a:pPr algn="ctr"/>
+          </a:p>
+        </p:txBody>
+      </p:sp>
+      <p:sp>
+        <p:nvSpPr>
+          <p:cNvPr id="31" name="TextBox 30"/>
+          <p:cNvSpPr txBox="1"/>
+          <p:nvPr/>
+        </p:nvSpPr>
+        <p:spPr>
+          <a:xfrm>
+            <a:off x="9464040" y="4114800"/>
+            <a:ext cx="2194560" cy="1024128"/>
+          </a:xfrm>
+          <a:prstGeom prst="rect">
+            <a:avLst/>
+          </a:prstGeom>
+          <a:noFill/>
+        </p:spPr>
+        <p:txBody>
+          <a:bodyPr wrap="square">
+            <a:spAutoFit/>
+          </a:bodyPr>
+          <a:lstStyle/>
+          <a:p>
+            <a:pPr algn="l"/>
+            <a:r>
+              <a:rPr sz="850" b="0" i="0">
+                <a:solidFill>
+                  <a:srgbClr val="0057B8"/>
+                </a:solidFill>
+                <a:latin typeface="Segoe UI"/>
+              </a:rPr>
+              <a:t>⚡ Pour le fundraiser : le label Don en Confiance est un argument fort face aux donateurs méfiants.</a:t>
+            </a:r>
+          </a:p>
+        </p:txBody>
+      </p:sp>
+      <p:sp>
+        <p:nvSpPr>
+          <p:cNvPr id="32" name="Rectangle 31"/>
+          <p:cNvSpPr/>
+          <p:nvPr/>
+        </p:nvSpPr>
+        <p:spPr>
+          <a:xfrm>
+            <a:off x="320040" y="5349240"/>
+            <a:ext cx="11521440" cy="1234440"/>
+          </a:xfrm>
+          <a:prstGeom prst="rect">
+            <a:avLst/>
+          </a:prstGeom>
+          <a:solidFill>
+            <a:srgbClr val="FFFFFF"/>
+          </a:solidFill>
+          <a:ln w="15240">
+            <a:solidFill>
+              <a:srgbClr val="F7941D"/>
+            </a:solidFill>
+          </a:ln>
+        </p:spPr>
+        <p:style>
+          <a:lnRef idx="1">
+            <a:schemeClr val="accent1"/>
+          </a:lnRef>
+          <a:fillRef idx="3">
+            <a:schemeClr val="accent1"/>
+          </a:fillRef>
+          <a:effectRef idx="2">
+            <a:schemeClr val="accent1"/>
+          </a:effectRef>
+          <a:fontRef idx="minor">
+            <a:schemeClr val="lt1"/>
+          </a:fontRef>
+        </p:style>
+        <p:txBody>
+          <a:bodyPr rtlCol="0" anchor="ctr"/>
+          <a:lstStyle/>
+          <a:p>
+            <a:pPr algn="ctr"/>
+          </a:p>
+        </p:txBody>
+      </p:sp>
+      <p:sp>
+        <p:nvSpPr>
+          <p:cNvPr id="33" name="Rectangle 32"/>
+          <p:cNvSpPr/>
+          <p:nvPr/>
+        </p:nvSpPr>
+        <p:spPr>
+          <a:xfrm>
+            <a:off x="320040" y="5349240"/>
+            <a:ext cx="54864" cy="1234440"/>
+          </a:xfrm>
+          <a:prstGeom prst="rect">
+            <a:avLst/>
+          </a:prstGeom>
+          <a:solidFill>
+            <a:srgbClr val="F7941D"/>
+          </a:solidFill>
+          <a:ln>
+            <a:noFill/>
+          </a:ln>
+        </p:spPr>
+        <p:style>
+          <a:lnRef idx="1">
+            <a:schemeClr val="accent1"/>
+          </a:lnRef>
+          <a:fillRef idx="3">
+            <a:schemeClr val="accent1"/>
+          </a:fillRef>
+          <a:effectRef idx="2">
+            <a:schemeClr val="accent1"/>
+          </a:effectRef>
+          <a:fontRef idx="minor">
+            <a:schemeClr val="lt1"/>
+          </a:fontRef>
+        </p:style>
+        <p:txBody>
+          <a:bodyPr rtlCol="0" anchor="ctr"/>
+          <a:lstStyle/>
+          <a:p>
+            <a:pPr algn="ctr"/>
+          </a:p>
+        </p:txBody>
+      </p:sp>
+      <p:sp>
+        <p:nvSpPr>
+          <p:cNvPr id="34" name="Rectangle 33"/>
+          <p:cNvSpPr/>
+          <p:nvPr/>
+        </p:nvSpPr>
+        <p:spPr>
+          <a:xfrm>
+            <a:off x="374904" y="5349240"/>
+            <a:ext cx="1920240" cy="1234440"/>
+          </a:xfrm>
+          <a:prstGeom prst="rect">
+            <a:avLst/>
+          </a:prstGeom>
+          <a:solidFill>
+            <a:srgbClr val="F0F4F9"/>
+          </a:solidFill>
+          <a:ln>
+            <a:noFill/>
+          </a:ln>
+        </p:spPr>
+        <p:style>
+          <a:lnRef idx="1">
+            <a:schemeClr val="accent1"/>
+          </a:lnRef>
+          <a:fillRef idx="3">
+            <a:schemeClr val="accent1"/>
+          </a:fillRef>
+          <a:effectRef idx="2">
+            <a:schemeClr val="accent1"/>
+          </a:effectRef>
+          <a:fontRef idx="minor">
+            <a:schemeClr val="lt1"/>
+          </a:fontRef>
+        </p:style>
+        <p:txBody>
+          <a:bodyPr rtlCol="0" anchor="ctr"/>
+          <a:lstStyle/>
+          <a:p>
+            <a:pPr algn="ctr"/>
+          </a:p>
+        </p:txBody>
+      </p:sp>
+      <p:sp>
+        <p:nvSpPr>
+          <p:cNvPr id="35" name="TextBox 34"/>
+          <p:cNvSpPr txBox="1"/>
+          <p:nvPr/>
+        </p:nvSpPr>
+        <p:spPr>
+          <a:xfrm>
+            <a:off x="457200" y="5422392"/>
+            <a:ext cx="1783080" cy="347472"/>
+          </a:xfrm>
+          <a:prstGeom prst="rect">
+            <a:avLst/>
+          </a:prstGeom>
+          <a:noFill/>
+        </p:spPr>
+        <p:txBody>
+          <a:bodyPr wrap="square">
+            <a:spAutoFit/>
+          </a:bodyPr>
+          <a:lstStyle/>
+          <a:p>
+            <a:pPr algn="l"/>
+            <a:r>
+              <a:rPr sz="1300" b="1" i="0">
+                <a:solidFill>
+                  <a:srgbClr val="F7941D"/>
+                </a:solidFill>
+                <a:latin typeface="Segoe UI"/>
+              </a:rPr>
+              <a:t>PARTICULIER / PROFESSIONNEL</a:t>
+            </a:r>
+          </a:p>
+        </p:txBody>
+      </p:sp>
+      <p:sp>
+        <p:nvSpPr>
+          <p:cNvPr id="36" name="TextBox 35"/>
+          <p:cNvSpPr txBox="1"/>
+          <p:nvPr/>
+        </p:nvSpPr>
+        <p:spPr>
+          <a:xfrm>
+            <a:off x="457200" y="5806440"/>
+            <a:ext cx="1783080" cy="475488"/>
+          </a:xfrm>
+          <a:prstGeom prst="rect">
+            <a:avLst/>
+          </a:prstGeom>
+          <a:noFill/>
+        </p:spPr>
+        <p:txBody>
+          <a:bodyPr wrap="square">
+            <a:spAutoFit/>
+          </a:bodyPr>
+          <a:lstStyle/>
+          <a:p>
+            <a:pPr algn="l"/>
+            <a:r>
+              <a:rPr sz="800" b="0" i="1">
+                <a:solidFill>
+                  <a:srgbClr val="555555"/>
+                </a:solidFill>
+                <a:latin typeface="Segoe UI"/>
+              </a:rPr>
+              <a:t>Distinction fondamentale lors de vos appels téléphoniques.</a:t>
+            </a:r>
+          </a:p>
+        </p:txBody>
+      </p:sp>
+      <p:sp>
+        <p:nvSpPr>
+          <p:cNvPr id="37" name="TextBox 36"/>
+          <p:cNvSpPr txBox="1"/>
+          <p:nvPr/>
+        </p:nvSpPr>
+        <p:spPr>
+          <a:xfrm>
+            <a:off x="2423160" y="5404104"/>
+            <a:ext cx="6858000" cy="475488"/>
+          </a:xfrm>
+          <a:prstGeom prst="rect">
+            <a:avLst/>
+          </a:prstGeom>
+          <a:noFill/>
+        </p:spPr>
+        <p:txBody>
+          <a:bodyPr wrap="square">
+            <a:spAutoFit/>
+          </a:bodyPr>
+          <a:lstStyle/>
+          <a:p>
+            <a:pPr algn="l"/>
+            <a:r>
+              <a:rPr sz="950" b="0" i="0">
+                <a:solidFill>
+                  <a:srgbClr val="555555"/>
+                </a:solidFill>
+                <a:latin typeface="Segoe UI"/>
+              </a:rPr>
+              <a:t>PARTICULIER : personne physique appelée à titre personnel — cible principale, peut faire un don.
+PROFESSIONNEL : entreprise, cabinet, commerce, artisan appelé sur numéro pro. Les dons se font UNIQUEMENT par les particuliers, jamais au nom d'une entreprise.</a:t>
+            </a:r>
+          </a:p>
+        </p:txBody>
+      </p:sp>
+      <p:sp>
+        <p:nvSpPr>
+          <p:cNvPr id="38" name="Rectangle 37"/>
+          <p:cNvSpPr/>
+          <p:nvPr/>
+        </p:nvSpPr>
+        <p:spPr>
+          <a:xfrm>
+            <a:off x="9372600" y="5404104"/>
+            <a:ext cx="2377440" cy="1115568"/>
+          </a:xfrm>
+          <a:prstGeom prst="rect">
+            <a:avLst/>
+          </a:prstGeom>
+          <a:solidFill>
+            <a:srgbClr val="F0F4F9"/>
+          </a:solidFill>
+          <a:ln>
+            <a:noFill/>
+          </a:ln>
+        </p:spPr>
+        <p:style>
+          <a:lnRef idx="1">
+            <a:schemeClr val="accent1"/>
+          </a:lnRef>
+          <a:fillRef idx="3">
+            <a:schemeClr val="accent1"/>
+          </a:fillRef>
+          <a:effectRef idx="2">
+            <a:schemeClr val="accent1"/>
+          </a:effectRef>
+          <a:fontRef idx="minor">
+            <a:schemeClr val="lt1"/>
+          </a:fontRef>
+        </p:style>
+        <p:txBody>
+          <a:bodyPr rtlCol="0" anchor="ctr"/>
+          <a:lstStyle/>
+          <a:p>
+            <a:pPr algn="ctr"/>
+          </a:p>
+        </p:txBody>
+      </p:sp>
+      <p:sp>
+        <p:nvSpPr>
+          <p:cNvPr id="39" name="TextBox 38"/>
+          <p:cNvSpPr txBox="1"/>
+          <p:nvPr/>
+        </p:nvSpPr>
+        <p:spPr>
+          <a:xfrm>
+            <a:off x="9464040" y="5440680"/>
+            <a:ext cx="2194560" cy="1024128"/>
+          </a:xfrm>
+          <a:prstGeom prst="rect">
+            <a:avLst/>
+          </a:prstGeom>
+          <a:noFill/>
+        </p:spPr>
+        <p:txBody>
+          <a:bodyPr wrap="square">
+            <a:spAutoFit/>
+          </a:bodyPr>
+          <a:lstStyle/>
+          <a:p>
+            <a:pPr algn="l"/>
+            <a:r>
+              <a:rPr sz="850" b="0" i="0">
+                <a:solidFill>
+                  <a:srgbClr val="F7941D"/>
+                </a:solidFill>
+                <a:latin typeface="Segoe UI"/>
+              </a:rPr>
+              <a:t>⚡ Si vous atteignez un professionnel : restez courtois, qualifiez ABSENT ou demandez le numéro personnel.</a:t>
             </a:r>
           </a:p>
         </p:txBody>

--- a/J2_Matin_Formation_Fidelis.pptx
+++ b/J2_Matin_Formation_Fidelis.pptx
@@ -3389,7 +3389,7 @@
                 </a:solidFill>
                 <a:latin typeface="Segoe UI"/>
               </a:rPr>
-              <a:t>9h30 – 13h30  |  4 heures  |  Fidelis mandaté par l'UNICEF</a:t>
+              <a:t>9h30 – 17h30  |  7 heures  |  1h pause déjeuner  |  Fidelis mandaté par l'UNICEF</a:t>
             </a:r>
           </a:p>
         </p:txBody>
